--- a/RNN/RNN.pptx
+++ b/RNN/RNN.pptx
@@ -5,26 +5,27 @@
     <p:sldMasterId id="2147483660" r:id="rId1"/>
   </p:sldMasterIdLst>
   <p:notesMasterIdLst>
-    <p:notesMasterId r:id="rId16"/>
+    <p:notesMasterId r:id="rId17"/>
   </p:notesMasterIdLst>
   <p:handoutMasterIdLst>
-    <p:handoutMasterId r:id="rId17"/>
+    <p:handoutMasterId r:id="rId18"/>
   </p:handoutMasterIdLst>
   <p:sldIdLst>
     <p:sldId id="256" r:id="rId2"/>
     <p:sldId id="1122" r:id="rId3"/>
     <p:sldId id="1134" r:id="rId4"/>
-    <p:sldId id="1133" r:id="rId5"/>
-    <p:sldId id="1125" r:id="rId6"/>
-    <p:sldId id="1127" r:id="rId7"/>
-    <p:sldId id="1128" r:id="rId8"/>
-    <p:sldId id="1123" r:id="rId9"/>
-    <p:sldId id="1130" r:id="rId10"/>
-    <p:sldId id="1131" r:id="rId11"/>
-    <p:sldId id="1129" r:id="rId12"/>
-    <p:sldId id="978" r:id="rId13"/>
-    <p:sldId id="1121" r:id="rId14"/>
-    <p:sldId id="1132" r:id="rId15"/>
+    <p:sldId id="1135" r:id="rId5"/>
+    <p:sldId id="1133" r:id="rId6"/>
+    <p:sldId id="1125" r:id="rId7"/>
+    <p:sldId id="1127" r:id="rId8"/>
+    <p:sldId id="1128" r:id="rId9"/>
+    <p:sldId id="1123" r:id="rId10"/>
+    <p:sldId id="1130" r:id="rId11"/>
+    <p:sldId id="1131" r:id="rId12"/>
+    <p:sldId id="1129" r:id="rId13"/>
+    <p:sldId id="978" r:id="rId14"/>
+    <p:sldId id="1121" r:id="rId15"/>
+    <p:sldId id="1132" r:id="rId16"/>
   </p:sldIdLst>
   <p:sldSz cx="12192000" cy="6858000"/>
   <p:notesSz cx="6858000" cy="9144000"/>
@@ -135,6 +136,7 @@
           <p14:sldIdLst>
             <p14:sldId id="1122"/>
             <p14:sldId id="1134"/>
+            <p14:sldId id="1135"/>
             <p14:sldId id="1133"/>
             <p14:sldId id="1125"/>
             <p14:sldId id="1127"/>
@@ -270,7 +272,7 @@
                 <a:latin typeface="맑은 고딕" panose="020B0503020000020004" pitchFamily="50" charset="-127"/>
                 <a:ea typeface="맑은 고딕" panose="020B0503020000020004" pitchFamily="50" charset="-127"/>
               </a:rPr>
-              <a:t>2026-06-18</a:t>
+              <a:t>2026-06-30</a:t>
             </a:fld>
             <a:endParaRPr lang="ko-KR" altLang="en-US">
               <a:latin typeface="맑은 고딕" panose="020B0503020000020004" pitchFamily="50" charset="-127"/>
@@ -456,7 +458,7 @@
           <a:p>
             <a:fld id="{43E1C3DD-4A19-441D-907C-380838DB51C4}" type="datetime1">
               <a:rPr lang="ko-KR" altLang="en-US" noProof="0" smtClean="0"/>
-              <a:t>2026-06-18</a:t>
+              <a:t>2026-06-30</a:t>
             </a:fld>
             <a:endParaRPr lang="ko-KR" altLang="en-US" noProof="0"/>
           </a:p>
@@ -902,7 +904,7 @@
             <a:fld id="{DF61EA0F-A667-4B49-8422-0062BC55E249}" type="slidenum">
               <a:rPr lang="en-US" altLang="ko-KR" noProof="0" smtClean="0"/>
               <a:pPr/>
-              <a:t>6</a:t>
+              <a:t>7</a:t>
             </a:fld>
             <a:endParaRPr lang="ko-KR" altLang="en-US" noProof="0"/>
           </a:p>
@@ -1389,7 +1391,7 @@
           <a:p>
             <a:fld id="{990475B5-67CA-4281-BDCA-DA943C3C8EB3}" type="datetime1">
               <a:rPr lang="ko-KR" altLang="en-US" noProof="0" smtClean="0"/>
-              <a:t>2026-06-18</a:t>
+              <a:t>2026-06-30</a:t>
             </a:fld>
             <a:endParaRPr lang="ko-KR" altLang="en-US" noProof="0"/>
           </a:p>
@@ -2043,7 +2045,7 @@
           <a:p>
             <a:fld id="{48A87A34-81AB-432B-8DAE-1953F412C126}" type="datetimeFigureOut">
               <a:rPr lang="en-US" smtClean="0"/>
-              <a:t>6/18/2026</a:t>
+              <a:t>6/30/2026</a:t>
             </a:fld>
             <a:endParaRPr lang="en-US" dirty="0"/>
           </a:p>
@@ -2339,7 +2341,7 @@
           <a:p>
             <a:fld id="{C655C81E-72E7-4D05-94B5-F45B321A525D}" type="datetime1">
               <a:rPr lang="ko-KR" altLang="en-US" noProof="0" smtClean="0"/>
-              <a:t>2026-06-18</a:t>
+              <a:t>2026-06-30</a:t>
             </a:fld>
             <a:endParaRPr lang="ko-KR" altLang="en-US" noProof="0" dirty="0">
               <a:latin typeface="맑은 고딕" panose="020B0503020000020004" pitchFamily="50" charset="-127"/>
@@ -3150,6 +3152,1293 @@
         <p:cNvPr id="1" name="">
           <a:extLst>
             <a:ext uri="{FF2B5EF4-FFF2-40B4-BE49-F238E27FC236}">
+              <a16:creationId xmlns:a16="http://schemas.microsoft.com/office/drawing/2014/main" id="{7588426D-8F0A-9C95-EE6A-7E25361B4E84}"/>
+            </a:ext>
+          </a:extLst>
+        </p:cNvPr>
+        <p:cNvGrpSpPr/>
+        <p:nvPr/>
+      </p:nvGrpSpPr>
+      <p:grpSpPr>
+        <a:xfrm>
+          <a:off x="0" y="0"/>
+          <a:ext cx="0" cy="0"/>
+          <a:chOff x="0" y="0"/>
+          <a:chExt cx="0" cy="0"/>
+        </a:xfrm>
+      </p:grpSpPr>
+      <p:sp>
+        <p:nvSpPr>
+          <p:cNvPr id="4" name="슬라이드 번호 개체 틀 3">
+            <a:extLst>
+              <a:ext uri="{FF2B5EF4-FFF2-40B4-BE49-F238E27FC236}">
+                <a16:creationId xmlns:a16="http://schemas.microsoft.com/office/drawing/2014/main" id="{0CBC867F-634A-CA6A-7E8F-C93BE0151EF8}"/>
+              </a:ext>
+            </a:extLst>
+          </p:cNvPr>
+          <p:cNvSpPr>
+            <a:spLocks noGrp="1"/>
+          </p:cNvSpPr>
+          <p:nvPr>
+            <p:ph type="sldNum" sz="quarter" idx="12"/>
+          </p:nvPr>
+        </p:nvSpPr>
+        <p:spPr>
+          <a:xfrm>
+            <a:off x="10514011" y="6036261"/>
+            <a:ext cx="753545" cy="365125"/>
+          </a:xfrm>
+        </p:spPr>
+        <p:txBody>
+          <a:bodyPr/>
+          <a:lstStyle/>
+          <a:p>
+            <a:fld id="{D57F1E4F-1CFF-5643-939E-217C01CDF565}" type="slidenum">
+              <a:rPr lang="en-US" smtClean="0"/>
+              <a:pPr/>
+              <a:t>10</a:t>
+            </a:fld>
+            <a:endParaRPr lang="en-US" dirty="0"/>
+          </a:p>
+        </p:txBody>
+      </p:sp>
+      <p:sp>
+        <p:nvSpPr>
+          <p:cNvPr id="3" name="제목 1">
+            <a:extLst>
+              <a:ext uri="{FF2B5EF4-FFF2-40B4-BE49-F238E27FC236}">
+                <a16:creationId xmlns:a16="http://schemas.microsoft.com/office/drawing/2014/main" id="{33F4EFA4-4F17-3197-CE10-BB3BDAD9A141}"/>
+              </a:ext>
+            </a:extLst>
+          </p:cNvPr>
+          <p:cNvSpPr txBox="1">
+            <a:spLocks/>
+          </p:cNvSpPr>
+          <p:nvPr/>
+        </p:nvSpPr>
+        <p:spPr>
+          <a:xfrm>
+            <a:off x="475645" y="481983"/>
+            <a:ext cx="10353762" cy="766439"/>
+          </a:xfrm>
+          <a:prstGeom prst="rect">
+            <a:avLst/>
+          </a:prstGeom>
+        </p:spPr>
+        <p:txBody>
+          <a:bodyPr vert="horz" lIns="91440" tIns="45720" rIns="91440" bIns="45720" rtlCol="0" anchor="ctr">
+            <a:normAutofit/>
+          </a:bodyPr>
+          <a:lstStyle>
+            <a:lvl1pPr algn="ctr" defTabSz="914400" rtl="0" eaLnBrk="1" latinLnBrk="1" hangingPunct="1">
+              <a:lnSpc>
+                <a:spcPct val="90000"/>
+              </a:lnSpc>
+              <a:spcBef>
+                <a:spcPct val="0"/>
+              </a:spcBef>
+              <a:buNone/>
+              <a:defRPr sz="3200" kern="1200" cap="all" baseline="0">
+                <a:solidFill>
+                  <a:schemeClr val="tx1"/>
+                </a:solidFill>
+                <a:effectLst/>
+                <a:latin typeface="Batang" panose="02030600000101010101" pitchFamily="18" charset="-127"/>
+                <a:ea typeface="Batang" panose="02030600000101010101" pitchFamily="18" charset="-127"/>
+                <a:cs typeface="+mj-cs"/>
+              </a:defRPr>
+            </a:lvl1pPr>
+          </a:lstStyle>
+          <a:p>
+            <a:pPr algn="l"/>
+            <a:r>
+              <a:rPr lang="en-US" altLang="ko-KR" sz="2800" cap="none" dirty="0">
+                <a:solidFill>
+                  <a:schemeClr val="bg2">
+                    <a:lumMod val="25000"/>
+                  </a:schemeClr>
+                </a:solidFill>
+                <a:latin typeface="D2Coding" panose="020B0609020101020101" pitchFamily="49" charset="-127"/>
+                <a:ea typeface="D2Coding" panose="020B0609020101020101" pitchFamily="49" charset="-127"/>
+                <a:cs typeface="Segoe UI Light" panose="020B0502040204020203" pitchFamily="34" charset="0"/>
+              </a:rPr>
+              <a:t>Recurrent Neural Network (RNN)</a:t>
+            </a:r>
+            <a:endParaRPr lang="ko-KR" altLang="en-US" sz="2800" cap="none" dirty="0">
+              <a:solidFill>
+                <a:schemeClr val="bg2">
+                  <a:lumMod val="25000"/>
+                </a:schemeClr>
+              </a:solidFill>
+              <a:latin typeface="D2Coding" panose="020B0609020101020101" pitchFamily="49" charset="-127"/>
+              <a:ea typeface="D2Coding" panose="020B0609020101020101" pitchFamily="49" charset="-127"/>
+              <a:cs typeface="Segoe UI Light" panose="020B0502040204020203" pitchFamily="34" charset="0"/>
+            </a:endParaRPr>
+          </a:p>
+        </p:txBody>
+      </p:sp>
+      <p:sp>
+        <p:nvSpPr>
+          <p:cNvPr id="13" name="TextBox 12">
+            <a:extLst>
+              <a:ext uri="{FF2B5EF4-FFF2-40B4-BE49-F238E27FC236}">
+                <a16:creationId xmlns:a16="http://schemas.microsoft.com/office/drawing/2014/main" id="{E67D1473-2FE3-A86E-CE51-23B8E5AA8E21}"/>
+              </a:ext>
+            </a:extLst>
+          </p:cNvPr>
+          <p:cNvSpPr txBox="1"/>
+          <p:nvPr/>
+        </p:nvSpPr>
+        <p:spPr>
+          <a:xfrm>
+            <a:off x="629920" y="1390662"/>
+            <a:ext cx="9884091" cy="5093702"/>
+          </a:xfrm>
+          <a:prstGeom prst="rect">
+            <a:avLst/>
+          </a:prstGeom>
+          <a:solidFill>
+            <a:srgbClr val="76E3FF"/>
+          </a:solidFill>
+        </p:spPr>
+        <p:txBody>
+          <a:bodyPr wrap="square" rtlCol="0">
+            <a:spAutoFit/>
+          </a:bodyPr>
+          <a:lstStyle/>
+          <a:p>
+            <a:r>
+              <a:rPr lang="en-US" altLang="ko-KR" sz="1300" dirty="0">
+                <a:latin typeface="D2Coding" panose="020B0609020101020101" pitchFamily="49" charset="-127"/>
+                <a:ea typeface="D2Coding" panose="020B0609020101020101" pitchFamily="49" charset="-127"/>
+              </a:rPr>
+              <a:t>import </a:t>
+            </a:r>
+            <a:r>
+              <a:rPr lang="en-US" altLang="ko-KR" sz="1300" dirty="0" err="1">
+                <a:latin typeface="D2Coding" panose="020B0609020101020101" pitchFamily="49" charset="-127"/>
+                <a:ea typeface="D2Coding" panose="020B0609020101020101" pitchFamily="49" charset="-127"/>
+              </a:rPr>
+              <a:t>numpy</a:t>
+            </a:r>
+            <a:r>
+              <a:rPr lang="en-US" altLang="ko-KR" sz="1300" dirty="0">
+                <a:latin typeface="D2Coding" panose="020B0609020101020101" pitchFamily="49" charset="-127"/>
+                <a:ea typeface="D2Coding" panose="020B0609020101020101" pitchFamily="49" charset="-127"/>
+              </a:rPr>
+              <a:t> as np</a:t>
+            </a:r>
+          </a:p>
+          <a:p>
+            <a:r>
+              <a:rPr lang="en-US" altLang="ko-KR" sz="1300" dirty="0">
+                <a:latin typeface="D2Coding" panose="020B0609020101020101" pitchFamily="49" charset="-127"/>
+                <a:ea typeface="D2Coding" panose="020B0609020101020101" pitchFamily="49" charset="-127"/>
+              </a:rPr>
+              <a:t>from </a:t>
+            </a:r>
+            <a:r>
+              <a:rPr lang="en-US" altLang="ko-KR" sz="1300" dirty="0" err="1">
+                <a:latin typeface="D2Coding" panose="020B0609020101020101" pitchFamily="49" charset="-127"/>
+                <a:ea typeface="D2Coding" panose="020B0609020101020101" pitchFamily="49" charset="-127"/>
+              </a:rPr>
+              <a:t>gensim.models</a:t>
+            </a:r>
+            <a:r>
+              <a:rPr lang="en-US" altLang="ko-KR" sz="1300" dirty="0">
+                <a:latin typeface="D2Coding" panose="020B0609020101020101" pitchFamily="49" charset="-127"/>
+                <a:ea typeface="D2Coding" panose="020B0609020101020101" pitchFamily="49" charset="-127"/>
+              </a:rPr>
+              <a:t> import Word2Vec</a:t>
+            </a:r>
+          </a:p>
+          <a:p>
+            <a:endParaRPr lang="en-US" altLang="ko-KR" sz="1300" dirty="0">
+              <a:latin typeface="D2Coding" panose="020B0609020101020101" pitchFamily="49" charset="-127"/>
+              <a:ea typeface="D2Coding" panose="020B0609020101020101" pitchFamily="49" charset="-127"/>
+            </a:endParaRPr>
+          </a:p>
+          <a:p>
+            <a:r>
+              <a:rPr lang="en-US" altLang="ko-KR" sz="1300" dirty="0">
+                <a:latin typeface="D2Coding" panose="020B0609020101020101" pitchFamily="49" charset="-127"/>
+                <a:ea typeface="D2Coding" panose="020B0609020101020101" pitchFamily="49" charset="-127"/>
+              </a:rPr>
+              <a:t># 1. </a:t>
+            </a:r>
+            <a:r>
+              <a:rPr lang="ko-KR" altLang="en-US" sz="1300" dirty="0">
+                <a:latin typeface="D2Coding" panose="020B0609020101020101" pitchFamily="49" charset="-127"/>
+                <a:ea typeface="D2Coding" panose="020B0609020101020101" pitchFamily="49" charset="-127"/>
+              </a:rPr>
+              <a:t>예시 문장 데이터 </a:t>
+            </a:r>
+            <a:r>
+              <a:rPr lang="en-US" altLang="ko-KR" sz="1300" dirty="0">
+                <a:latin typeface="D2Coding" panose="020B0609020101020101" pitchFamily="49" charset="-127"/>
+                <a:ea typeface="D2Coding" panose="020B0609020101020101" pitchFamily="49" charset="-127"/>
+              </a:rPr>
+              <a:t>(Word2Vec </a:t>
+            </a:r>
+            <a:r>
+              <a:rPr lang="ko-KR" altLang="en-US" sz="1300" dirty="0">
+                <a:latin typeface="D2Coding" panose="020B0609020101020101" pitchFamily="49" charset="-127"/>
+                <a:ea typeface="D2Coding" panose="020B0609020101020101" pitchFamily="49" charset="-127"/>
+              </a:rPr>
+              <a:t>학습용 코퍼스</a:t>
+            </a:r>
+            <a:r>
+              <a:rPr lang="en-US" altLang="ko-KR" sz="1300" dirty="0">
+                <a:latin typeface="D2Coding" panose="020B0609020101020101" pitchFamily="49" charset="-127"/>
+                <a:ea typeface="D2Coding" panose="020B0609020101020101" pitchFamily="49" charset="-127"/>
+              </a:rPr>
+              <a:t>), </a:t>
+            </a:r>
+            <a:r>
+              <a:rPr lang="ko-KR" altLang="en-US" sz="1300" dirty="0">
+                <a:latin typeface="D2Coding" panose="020B0609020101020101" pitchFamily="49" charset="-127"/>
+                <a:ea typeface="D2Coding" panose="020B0609020101020101" pitchFamily="49" charset="-127"/>
+              </a:rPr>
+              <a:t>단어들이 모델 내부에서 학습될 수 있도록 리스트 형태로 제공</a:t>
+            </a:r>
+          </a:p>
+          <a:p>
+            <a:r>
+              <a:rPr lang="en-US" altLang="ko-KR" sz="1300" dirty="0">
+                <a:latin typeface="D2Coding" panose="020B0609020101020101" pitchFamily="49" charset="-127"/>
+                <a:ea typeface="D2Coding" panose="020B0609020101020101" pitchFamily="49" charset="-127"/>
+              </a:rPr>
+              <a:t>sentences = [["I", "am", “your”, “father”]]</a:t>
+            </a:r>
+          </a:p>
+          <a:p>
+            <a:endParaRPr lang="en-US" altLang="ko-KR" sz="1300" dirty="0">
+              <a:latin typeface="D2Coding" panose="020B0609020101020101" pitchFamily="49" charset="-127"/>
+              <a:ea typeface="D2Coding" panose="020B0609020101020101" pitchFamily="49" charset="-127"/>
+            </a:endParaRPr>
+          </a:p>
+          <a:p>
+            <a:r>
+              <a:rPr lang="en-US" altLang="ko-KR" sz="1300" dirty="0">
+                <a:latin typeface="D2Coding" panose="020B0609020101020101" pitchFamily="49" charset="-127"/>
+                <a:ea typeface="D2Coding" panose="020B0609020101020101" pitchFamily="49" charset="-127"/>
+              </a:rPr>
+              <a:t># 2. </a:t>
+            </a:r>
+            <a:r>
+              <a:rPr lang="en-US" altLang="ko-KR" sz="1300" dirty="0" err="1">
+                <a:latin typeface="D2Coding" panose="020B0609020101020101" pitchFamily="49" charset="-127"/>
+                <a:ea typeface="D2Coding" panose="020B0609020101020101" pitchFamily="49" charset="-127"/>
+              </a:rPr>
+              <a:t>Gensim</a:t>
+            </a:r>
+            <a:r>
+              <a:rPr lang="en-US" altLang="ko-KR" sz="1300" dirty="0">
+                <a:latin typeface="D2Coding" panose="020B0609020101020101" pitchFamily="49" charset="-127"/>
+                <a:ea typeface="D2Coding" panose="020B0609020101020101" pitchFamily="49" charset="-127"/>
+              </a:rPr>
+              <a:t> Word2Vec </a:t>
+            </a:r>
+            <a:r>
+              <a:rPr lang="ko-KR" altLang="en-US" sz="1300" dirty="0">
+                <a:latin typeface="D2Coding" panose="020B0609020101020101" pitchFamily="49" charset="-127"/>
+                <a:ea typeface="D2Coding" panose="020B0609020101020101" pitchFamily="49" charset="-127"/>
+              </a:rPr>
+              <a:t>모델 생성 및 학습</a:t>
+            </a:r>
+          </a:p>
+          <a:p>
+            <a:r>
+              <a:rPr lang="en-US" altLang="ko-KR" sz="1300" dirty="0">
+                <a:latin typeface="D2Coding" panose="020B0609020101020101" pitchFamily="49" charset="-127"/>
+                <a:ea typeface="D2Coding" panose="020B0609020101020101" pitchFamily="49" charset="-127"/>
+              </a:rPr>
+              <a:t># </a:t>
+            </a:r>
+            <a:r>
+              <a:rPr lang="en-US" altLang="ko-KR" sz="1300" dirty="0" err="1">
+                <a:latin typeface="D2Coding" panose="020B0609020101020101" pitchFamily="49" charset="-127"/>
+                <a:ea typeface="D2Coding" panose="020B0609020101020101" pitchFamily="49" charset="-127"/>
+              </a:rPr>
+              <a:t>vector_size</a:t>
+            </a:r>
+            <a:r>
+              <a:rPr lang="en-US" altLang="ko-KR" sz="1300" dirty="0">
+                <a:latin typeface="D2Coding" panose="020B0609020101020101" pitchFamily="49" charset="-127"/>
+                <a:ea typeface="D2Coding" panose="020B0609020101020101" pitchFamily="49" charset="-127"/>
+              </a:rPr>
+              <a:t>=4 : </a:t>
+            </a:r>
+            <a:r>
+              <a:rPr lang="ko-KR" altLang="en-US" sz="1300" dirty="0">
+                <a:latin typeface="D2Coding" panose="020B0609020101020101" pitchFamily="49" charset="-127"/>
+                <a:ea typeface="D2Coding" panose="020B0609020101020101" pitchFamily="49" charset="-127"/>
+              </a:rPr>
+              <a:t>단어 하나를 </a:t>
+            </a:r>
+            <a:r>
+              <a:rPr lang="en-US" altLang="ko-KR" sz="1300" dirty="0">
+                <a:latin typeface="D2Coding" panose="020B0609020101020101" pitchFamily="49" charset="-127"/>
+                <a:ea typeface="D2Coding" panose="020B0609020101020101" pitchFamily="49" charset="-127"/>
+              </a:rPr>
+              <a:t>4</a:t>
+            </a:r>
+            <a:r>
+              <a:rPr lang="ko-KR" altLang="en-US" sz="1300" dirty="0">
+                <a:latin typeface="D2Coding" panose="020B0609020101020101" pitchFamily="49" charset="-127"/>
+                <a:ea typeface="D2Coding" panose="020B0609020101020101" pitchFamily="49" charset="-127"/>
+              </a:rPr>
+              <a:t>차원 벡터로 표현하겠다는 의미 </a:t>
+            </a:r>
+            <a:r>
+              <a:rPr lang="en-US" altLang="ko-KR" sz="1300" dirty="0">
+                <a:latin typeface="D2Coding" panose="020B0609020101020101" pitchFamily="49" charset="-127"/>
+                <a:ea typeface="D2Coding" panose="020B0609020101020101" pitchFamily="49" charset="-127"/>
+              </a:rPr>
+              <a:t>(</a:t>
+            </a:r>
+            <a:r>
+              <a:rPr lang="en-US" altLang="ko-KR" sz="1300" dirty="0" err="1">
+                <a:latin typeface="D2Coding" panose="020B0609020101020101" pitchFamily="49" charset="-127"/>
+                <a:ea typeface="D2Coding" panose="020B0609020101020101" pitchFamily="49" charset="-127"/>
+              </a:rPr>
+              <a:t>input_size</a:t>
+            </a:r>
+            <a:r>
+              <a:rPr lang="en-US" altLang="ko-KR" sz="1300" dirty="0">
+                <a:latin typeface="D2Coding" panose="020B0609020101020101" pitchFamily="49" charset="-127"/>
+                <a:ea typeface="D2Coding" panose="020B0609020101020101" pitchFamily="49" charset="-127"/>
+              </a:rPr>
+              <a:t>=4)</a:t>
+            </a:r>
+          </a:p>
+          <a:p>
+            <a:r>
+              <a:rPr lang="en-US" altLang="ko-KR" sz="1300" dirty="0">
+                <a:latin typeface="D2Coding" panose="020B0609020101020101" pitchFamily="49" charset="-127"/>
+                <a:ea typeface="D2Coding" panose="020B0609020101020101" pitchFamily="49" charset="-127"/>
+              </a:rPr>
+              <a:t># </a:t>
+            </a:r>
+            <a:r>
+              <a:rPr lang="en-US" altLang="ko-KR" sz="1300" dirty="0" err="1">
+                <a:latin typeface="D2Coding" panose="020B0609020101020101" pitchFamily="49" charset="-127"/>
+                <a:ea typeface="D2Coding" panose="020B0609020101020101" pitchFamily="49" charset="-127"/>
+              </a:rPr>
+              <a:t>min_count</a:t>
+            </a:r>
+            <a:r>
+              <a:rPr lang="en-US" altLang="ko-KR" sz="1300" dirty="0">
+                <a:latin typeface="D2Coding" panose="020B0609020101020101" pitchFamily="49" charset="-127"/>
+                <a:ea typeface="D2Coding" panose="020B0609020101020101" pitchFamily="49" charset="-127"/>
+              </a:rPr>
+              <a:t>=1  : </a:t>
+            </a:r>
+            <a:r>
+              <a:rPr lang="ko-KR" altLang="en-US" sz="1300" dirty="0">
+                <a:latin typeface="D2Coding" panose="020B0609020101020101" pitchFamily="49" charset="-127"/>
+                <a:ea typeface="D2Coding" panose="020B0609020101020101" pitchFamily="49" charset="-127"/>
+              </a:rPr>
+              <a:t>빈도수가 </a:t>
+            </a:r>
+            <a:r>
+              <a:rPr lang="en-US" altLang="ko-KR" sz="1300" dirty="0">
+                <a:latin typeface="D2Coding" panose="020B0609020101020101" pitchFamily="49" charset="-127"/>
+                <a:ea typeface="D2Coding" panose="020B0609020101020101" pitchFamily="49" charset="-127"/>
+              </a:rPr>
+              <a:t>1</a:t>
+            </a:r>
+            <a:r>
+              <a:rPr lang="ko-KR" altLang="en-US" sz="1300" dirty="0">
+                <a:latin typeface="D2Coding" panose="020B0609020101020101" pitchFamily="49" charset="-127"/>
+                <a:ea typeface="D2Coding" panose="020B0609020101020101" pitchFamily="49" charset="-127"/>
+              </a:rPr>
+              <a:t>번만 나와도 단어장에 포함</a:t>
+            </a:r>
+            <a:r>
+              <a:rPr lang="en-US" altLang="ko-KR" sz="1300" dirty="0">
+                <a:latin typeface="D2Coding" panose="020B0609020101020101" pitchFamily="49" charset="-127"/>
+                <a:ea typeface="D2Coding" panose="020B0609020101020101" pitchFamily="49" charset="-127"/>
+              </a:rPr>
+              <a:t>, window=2 : </a:t>
+            </a:r>
+            <a:r>
+              <a:rPr lang="ko-KR" altLang="en-US" sz="1300" dirty="0">
+                <a:latin typeface="D2Coding" panose="020B0609020101020101" pitchFamily="49" charset="-127"/>
+                <a:ea typeface="D2Coding" panose="020B0609020101020101" pitchFamily="49" charset="-127"/>
+              </a:rPr>
+              <a:t>문맥을 파악할 앞뒤 단어의 범위</a:t>
+            </a:r>
+          </a:p>
+          <a:p>
+            <a:r>
+              <a:rPr lang="en-US" altLang="ko-KR" sz="1300" dirty="0">
+                <a:latin typeface="D2Coding" panose="020B0609020101020101" pitchFamily="49" charset="-127"/>
+                <a:ea typeface="D2Coding" panose="020B0609020101020101" pitchFamily="49" charset="-127"/>
+              </a:rPr>
+              <a:t>model = Word2Vec(sentences, </a:t>
+            </a:r>
+            <a:r>
+              <a:rPr lang="en-US" altLang="ko-KR" sz="1300" dirty="0" err="1">
+                <a:latin typeface="D2Coding" panose="020B0609020101020101" pitchFamily="49" charset="-127"/>
+                <a:ea typeface="D2Coding" panose="020B0609020101020101" pitchFamily="49" charset="-127"/>
+              </a:rPr>
+              <a:t>vector_size</a:t>
+            </a:r>
+            <a:r>
+              <a:rPr lang="en-US" altLang="ko-KR" sz="1300" dirty="0">
+                <a:latin typeface="D2Coding" panose="020B0609020101020101" pitchFamily="49" charset="-127"/>
+                <a:ea typeface="D2Coding" panose="020B0609020101020101" pitchFamily="49" charset="-127"/>
+              </a:rPr>
+              <a:t>=4, </a:t>
+            </a:r>
+            <a:r>
+              <a:rPr lang="en-US" altLang="ko-KR" sz="1300" dirty="0" err="1">
+                <a:latin typeface="D2Coding" panose="020B0609020101020101" pitchFamily="49" charset="-127"/>
+                <a:ea typeface="D2Coding" panose="020B0609020101020101" pitchFamily="49" charset="-127"/>
+              </a:rPr>
+              <a:t>min_count</a:t>
+            </a:r>
+            <a:r>
+              <a:rPr lang="en-US" altLang="ko-KR" sz="1300" dirty="0">
+                <a:latin typeface="D2Coding" panose="020B0609020101020101" pitchFamily="49" charset="-127"/>
+                <a:ea typeface="D2Coding" panose="020B0609020101020101" pitchFamily="49" charset="-127"/>
+              </a:rPr>
+              <a:t>=1, window=2, epochs=100, seed=42)</a:t>
+            </a:r>
+          </a:p>
+          <a:p>
+            <a:endParaRPr lang="en-US" altLang="ko-KR" sz="1300" dirty="0">
+              <a:latin typeface="D2Coding" panose="020B0609020101020101" pitchFamily="49" charset="-127"/>
+              <a:ea typeface="D2Coding" panose="020B0609020101020101" pitchFamily="49" charset="-127"/>
+            </a:endParaRPr>
+          </a:p>
+          <a:p>
+            <a:r>
+              <a:rPr lang="en-US" altLang="ko-KR" sz="1300" dirty="0">
+                <a:latin typeface="D2Coding" panose="020B0609020101020101" pitchFamily="49" charset="-127"/>
+                <a:ea typeface="D2Coding" panose="020B0609020101020101" pitchFamily="49" charset="-127"/>
+              </a:rPr>
+              <a:t># 3. RNN</a:t>
+            </a:r>
+            <a:r>
+              <a:rPr lang="ko-KR" altLang="en-US" sz="1300" dirty="0">
+                <a:latin typeface="D2Coding" panose="020B0609020101020101" pitchFamily="49" charset="-127"/>
+                <a:ea typeface="D2Coding" panose="020B0609020101020101" pitchFamily="49" charset="-127"/>
+              </a:rPr>
+              <a:t>에 입력할 데이터 구조</a:t>
+            </a:r>
+            <a:r>
+              <a:rPr lang="en-US" altLang="ko-KR" sz="1300" dirty="0">
+                <a:latin typeface="D2Coding" panose="020B0609020101020101" pitchFamily="49" charset="-127"/>
+                <a:ea typeface="D2Coding" panose="020B0609020101020101" pitchFamily="49" charset="-127"/>
+              </a:rPr>
+              <a:t>(Matrix) </a:t>
+            </a:r>
+            <a:r>
+              <a:rPr lang="ko-KR" altLang="en-US" sz="1300" dirty="0">
+                <a:latin typeface="D2Coding" panose="020B0609020101020101" pitchFamily="49" charset="-127"/>
+                <a:ea typeface="D2Coding" panose="020B0609020101020101" pitchFamily="49" charset="-127"/>
+              </a:rPr>
+              <a:t>만들기</a:t>
+            </a:r>
+          </a:p>
+          <a:p>
+            <a:r>
+              <a:rPr lang="en-US" altLang="ko-KR" sz="1300" dirty="0">
+                <a:latin typeface="D2Coding" panose="020B0609020101020101" pitchFamily="49" charset="-127"/>
+                <a:ea typeface="D2Coding" panose="020B0609020101020101" pitchFamily="49" charset="-127"/>
+              </a:rPr>
+              <a:t>timesteps = 4    # </a:t>
+            </a:r>
+            <a:r>
+              <a:rPr lang="ko-KR" altLang="en-US" sz="1300" dirty="0">
+                <a:latin typeface="D2Coding" panose="020B0609020101020101" pitchFamily="49" charset="-127"/>
+                <a:ea typeface="D2Coding" panose="020B0609020101020101" pitchFamily="49" charset="-127"/>
+              </a:rPr>
+              <a:t>문장 속 단어의 수 </a:t>
+            </a:r>
+            <a:r>
+              <a:rPr lang="en-US" altLang="ko-KR" sz="1300" dirty="0">
+                <a:latin typeface="D2Coding" panose="020B0609020101020101" pitchFamily="49" charset="-127"/>
+                <a:ea typeface="D2Coding" panose="020B0609020101020101" pitchFamily="49" charset="-127"/>
+              </a:rPr>
+              <a:t>(“I”, “am”, “your", "father")</a:t>
+            </a:r>
+          </a:p>
+          <a:p>
+            <a:r>
+              <a:rPr lang="en-US" altLang="ko-KR" sz="1300" dirty="0" err="1">
+                <a:latin typeface="D2Coding" panose="020B0609020101020101" pitchFamily="49" charset="-127"/>
+                <a:ea typeface="D2Coding" panose="020B0609020101020101" pitchFamily="49" charset="-127"/>
+              </a:rPr>
+              <a:t>input_size</a:t>
+            </a:r>
+            <a:r>
+              <a:rPr lang="en-US" altLang="ko-KR" sz="1300" dirty="0">
+                <a:latin typeface="D2Coding" panose="020B0609020101020101" pitchFamily="49" charset="-127"/>
+                <a:ea typeface="D2Coding" panose="020B0609020101020101" pitchFamily="49" charset="-127"/>
+              </a:rPr>
+              <a:t> = 4   # Word2Vec </a:t>
+            </a:r>
+            <a:r>
+              <a:rPr lang="ko-KR" altLang="en-US" sz="1300" dirty="0" err="1">
+                <a:latin typeface="D2Coding" panose="020B0609020101020101" pitchFamily="49" charset="-127"/>
+                <a:ea typeface="D2Coding" panose="020B0609020101020101" pitchFamily="49" charset="-127"/>
+              </a:rPr>
+              <a:t>임베딩</a:t>
+            </a:r>
+            <a:r>
+              <a:rPr lang="ko-KR" altLang="en-US" sz="1300" dirty="0">
+                <a:latin typeface="D2Coding" panose="020B0609020101020101" pitchFamily="49" charset="-127"/>
+                <a:ea typeface="D2Coding" panose="020B0609020101020101" pitchFamily="49" charset="-127"/>
+              </a:rPr>
+              <a:t> 차원수</a:t>
+            </a:r>
+          </a:p>
+          <a:p>
+            <a:r>
+              <a:rPr lang="en-US" altLang="ko-KR" sz="1300" dirty="0" err="1">
+                <a:latin typeface="D2Coding" panose="020B0609020101020101" pitchFamily="49" charset="-127"/>
+                <a:ea typeface="D2Coding" panose="020B0609020101020101" pitchFamily="49" charset="-127"/>
+              </a:rPr>
+              <a:t>hidden_size</a:t>
+            </a:r>
+            <a:r>
+              <a:rPr lang="en-US" altLang="ko-KR" sz="1300" dirty="0">
+                <a:latin typeface="D2Coding" panose="020B0609020101020101" pitchFamily="49" charset="-127"/>
+                <a:ea typeface="D2Coding" panose="020B0609020101020101" pitchFamily="49" charset="-127"/>
+              </a:rPr>
+              <a:t> = 2  # </a:t>
+            </a:r>
+            <a:r>
+              <a:rPr lang="ko-KR" altLang="en-US" sz="1300" dirty="0">
+                <a:latin typeface="D2Coding" panose="020B0609020101020101" pitchFamily="49" charset="-127"/>
+                <a:ea typeface="D2Coding" panose="020B0609020101020101" pitchFamily="49" charset="-127"/>
+              </a:rPr>
+              <a:t>은닉 상태의 크기 </a:t>
+            </a:r>
+            <a:r>
+              <a:rPr lang="en-US" altLang="ko-KR" sz="1300" dirty="0">
+                <a:latin typeface="D2Coding" panose="020B0609020101020101" pitchFamily="49" charset="-127"/>
+                <a:ea typeface="D2Coding" panose="020B0609020101020101" pitchFamily="49" charset="-127"/>
+              </a:rPr>
+              <a:t>(</a:t>
+            </a:r>
+            <a:r>
+              <a:rPr lang="ko-KR" altLang="en-US" sz="1300" dirty="0">
+                <a:latin typeface="D2Coding" panose="020B0609020101020101" pitchFamily="49" charset="-127"/>
+                <a:ea typeface="D2Coding" panose="020B0609020101020101" pitchFamily="49" charset="-127"/>
+              </a:rPr>
+              <a:t>기억 방의 개수</a:t>
+            </a:r>
+            <a:r>
+              <a:rPr lang="en-US" altLang="ko-KR" sz="1300" dirty="0">
+                <a:latin typeface="D2Coding" panose="020B0609020101020101" pitchFamily="49" charset="-127"/>
+                <a:ea typeface="D2Coding" panose="020B0609020101020101" pitchFamily="49" charset="-127"/>
+              </a:rPr>
+              <a:t>)</a:t>
+            </a:r>
+          </a:p>
+          <a:p>
+            <a:endParaRPr lang="en-US" altLang="ko-KR" sz="1300" dirty="0">
+              <a:latin typeface="D2Coding" panose="020B0609020101020101" pitchFamily="49" charset="-127"/>
+              <a:ea typeface="D2Coding" panose="020B0609020101020101" pitchFamily="49" charset="-127"/>
+            </a:endParaRPr>
+          </a:p>
+          <a:p>
+            <a:r>
+              <a:rPr lang="en-US" altLang="ko-KR" sz="1300" dirty="0">
+                <a:latin typeface="D2Coding" panose="020B0609020101020101" pitchFamily="49" charset="-127"/>
+                <a:ea typeface="D2Coding" panose="020B0609020101020101" pitchFamily="49" charset="-127"/>
+              </a:rPr>
+              <a:t># 4</a:t>
+            </a:r>
+            <a:r>
+              <a:rPr lang="ko-KR" altLang="en-US" sz="1300" dirty="0">
+                <a:latin typeface="D2Coding" panose="020B0609020101020101" pitchFamily="49" charset="-127"/>
+                <a:ea typeface="D2Coding" panose="020B0609020101020101" pitchFamily="49" charset="-127"/>
+              </a:rPr>
+              <a:t>차원 벡터로 변환된 단어들을 순서대로 담을 빈 행렬 생성 </a:t>
+            </a:r>
+            <a:r>
+              <a:rPr lang="en-US" altLang="ko-KR" sz="1300" dirty="0">
+                <a:latin typeface="D2Coding" panose="020B0609020101020101" pitchFamily="49" charset="-127"/>
+                <a:ea typeface="D2Coding" panose="020B0609020101020101" pitchFamily="49" charset="-127"/>
+              </a:rPr>
+              <a:t>- </a:t>
+            </a:r>
+            <a:r>
+              <a:rPr lang="ko-KR" altLang="en-US" sz="1300" dirty="0">
+                <a:latin typeface="D2Coding" panose="020B0609020101020101" pitchFamily="49" charset="-127"/>
+                <a:ea typeface="D2Coding" panose="020B0609020101020101" pitchFamily="49" charset="-127"/>
+              </a:rPr>
+              <a:t>크기</a:t>
+            </a:r>
+            <a:r>
+              <a:rPr lang="en-US" altLang="ko-KR" sz="1300" dirty="0">
+                <a:latin typeface="D2Coding" panose="020B0609020101020101" pitchFamily="49" charset="-127"/>
+                <a:ea typeface="D2Coding" panose="020B0609020101020101" pitchFamily="49" charset="-127"/>
+              </a:rPr>
+              <a:t>: (4, 4)</a:t>
+            </a:r>
+          </a:p>
+          <a:p>
+            <a:r>
+              <a:rPr lang="en-US" altLang="ko-KR" sz="1300" dirty="0">
+                <a:latin typeface="D2Coding" panose="020B0609020101020101" pitchFamily="49" charset="-127"/>
+                <a:ea typeface="D2Coding" panose="020B0609020101020101" pitchFamily="49" charset="-127"/>
+              </a:rPr>
+              <a:t>inputs = </a:t>
+            </a:r>
+            <a:r>
+              <a:rPr lang="en-US" altLang="ko-KR" sz="1300" dirty="0" err="1">
+                <a:latin typeface="D2Coding" panose="020B0609020101020101" pitchFamily="49" charset="-127"/>
+                <a:ea typeface="D2Coding" panose="020B0609020101020101" pitchFamily="49" charset="-127"/>
+              </a:rPr>
+              <a:t>np.zeros</a:t>
+            </a:r>
+            <a:r>
+              <a:rPr lang="en-US" altLang="ko-KR" sz="1300" dirty="0">
+                <a:latin typeface="D2Coding" panose="020B0609020101020101" pitchFamily="49" charset="-127"/>
+                <a:ea typeface="D2Coding" panose="020B0609020101020101" pitchFamily="49" charset="-127"/>
+              </a:rPr>
+              <a:t>((timesteps, </a:t>
+            </a:r>
+            <a:r>
+              <a:rPr lang="en-US" altLang="ko-KR" sz="1300" dirty="0" err="1">
+                <a:latin typeface="D2Coding" panose="020B0609020101020101" pitchFamily="49" charset="-127"/>
+                <a:ea typeface="D2Coding" panose="020B0609020101020101" pitchFamily="49" charset="-127"/>
+              </a:rPr>
+              <a:t>input_size</a:t>
+            </a:r>
+            <a:r>
+              <a:rPr lang="en-US" altLang="ko-KR" sz="1300" dirty="0">
+                <a:latin typeface="D2Coding" panose="020B0609020101020101" pitchFamily="49" charset="-127"/>
+                <a:ea typeface="D2Coding" panose="020B0609020101020101" pitchFamily="49" charset="-127"/>
+              </a:rPr>
+              <a:t>))</a:t>
+            </a:r>
+          </a:p>
+          <a:p>
+            <a:endParaRPr lang="en-US" altLang="ko-KR" sz="1300" dirty="0">
+              <a:latin typeface="D2Coding" panose="020B0609020101020101" pitchFamily="49" charset="-127"/>
+              <a:ea typeface="D2Coding" panose="020B0609020101020101" pitchFamily="49" charset="-127"/>
+            </a:endParaRPr>
+          </a:p>
+          <a:p>
+            <a:r>
+              <a:rPr lang="en-US" altLang="ko-KR" sz="1300" dirty="0">
+                <a:latin typeface="D2Coding" panose="020B0609020101020101" pitchFamily="49" charset="-127"/>
+                <a:ea typeface="D2Coding" panose="020B0609020101020101" pitchFamily="49" charset="-127"/>
+              </a:rPr>
+              <a:t># </a:t>
+            </a:r>
+            <a:r>
+              <a:rPr lang="ko-KR" altLang="en-US" sz="1300" dirty="0">
+                <a:latin typeface="D2Coding" panose="020B0609020101020101" pitchFamily="49" charset="-127"/>
+                <a:ea typeface="D2Coding" panose="020B0609020101020101" pitchFamily="49" charset="-127"/>
+              </a:rPr>
+              <a:t>단어 순서대로 </a:t>
+            </a:r>
+            <a:r>
+              <a:rPr lang="en-US" altLang="ko-KR" sz="1300" dirty="0">
+                <a:latin typeface="D2Coding" panose="020B0609020101020101" pitchFamily="49" charset="-127"/>
+                <a:ea typeface="D2Coding" panose="020B0609020101020101" pitchFamily="49" charset="-127"/>
+              </a:rPr>
+              <a:t>Word2Vec</a:t>
+            </a:r>
+            <a:r>
+              <a:rPr lang="ko-KR" altLang="en-US" sz="1300" dirty="0">
+                <a:latin typeface="D2Coding" panose="020B0609020101020101" pitchFamily="49" charset="-127"/>
+                <a:ea typeface="D2Coding" panose="020B0609020101020101" pitchFamily="49" charset="-127"/>
+              </a:rPr>
+              <a:t>에서 </a:t>
+            </a:r>
+            <a:r>
+              <a:rPr lang="ko-KR" altLang="en-US" sz="1300" dirty="0" err="1">
+                <a:latin typeface="D2Coding" panose="020B0609020101020101" pitchFamily="49" charset="-127"/>
+                <a:ea typeface="D2Coding" panose="020B0609020101020101" pitchFamily="49" charset="-127"/>
+              </a:rPr>
+              <a:t>벡터값을</a:t>
+            </a:r>
+            <a:r>
+              <a:rPr lang="ko-KR" altLang="en-US" sz="1300" dirty="0">
+                <a:latin typeface="D2Coding" panose="020B0609020101020101" pitchFamily="49" charset="-127"/>
+                <a:ea typeface="D2Coding" panose="020B0609020101020101" pitchFamily="49" charset="-127"/>
+              </a:rPr>
+              <a:t> 추출하여 행렬에 </a:t>
+            </a:r>
+            <a:r>
+              <a:rPr lang="ko-KR" altLang="en-US" sz="1300" dirty="0" err="1">
+                <a:latin typeface="D2Coding" panose="020B0609020101020101" pitchFamily="49" charset="-127"/>
+                <a:ea typeface="D2Coding" panose="020B0609020101020101" pitchFamily="49" charset="-127"/>
+              </a:rPr>
+              <a:t>채워넣기</a:t>
+            </a:r>
+            <a:endParaRPr lang="ko-KR" altLang="en-US" sz="1300" dirty="0">
+              <a:latin typeface="D2Coding" panose="020B0609020101020101" pitchFamily="49" charset="-127"/>
+              <a:ea typeface="D2Coding" panose="020B0609020101020101" pitchFamily="49" charset="-127"/>
+            </a:endParaRPr>
+          </a:p>
+          <a:p>
+            <a:r>
+              <a:rPr lang="en-US" altLang="ko-KR" sz="1300" dirty="0" err="1">
+                <a:latin typeface="D2Coding" panose="020B0609020101020101" pitchFamily="49" charset="-127"/>
+                <a:ea typeface="D2Coding" panose="020B0609020101020101" pitchFamily="49" charset="-127"/>
+              </a:rPr>
+              <a:t>word_list</a:t>
+            </a:r>
+            <a:r>
+              <a:rPr lang="en-US" altLang="ko-KR" sz="1300" dirty="0">
+                <a:latin typeface="D2Coding" panose="020B0609020101020101" pitchFamily="49" charset="-127"/>
+                <a:ea typeface="D2Coding" panose="020B0609020101020101" pitchFamily="49" charset="-127"/>
+              </a:rPr>
+              <a:t> = ["I", "am", “your", "father"] # Changed to match the training data</a:t>
+            </a:r>
+          </a:p>
+          <a:p>
+            <a:r>
+              <a:rPr lang="en-US" altLang="ko-KR" sz="1300" dirty="0">
+                <a:latin typeface="D2Coding" panose="020B0609020101020101" pitchFamily="49" charset="-127"/>
+                <a:ea typeface="D2Coding" panose="020B0609020101020101" pitchFamily="49" charset="-127"/>
+              </a:rPr>
+              <a:t>for </a:t>
+            </a:r>
+            <a:r>
+              <a:rPr lang="en-US" altLang="ko-KR" sz="1300" dirty="0" err="1">
+                <a:latin typeface="D2Coding" panose="020B0609020101020101" pitchFamily="49" charset="-127"/>
+                <a:ea typeface="D2Coding" panose="020B0609020101020101" pitchFamily="49" charset="-127"/>
+              </a:rPr>
+              <a:t>i</a:t>
+            </a:r>
+            <a:r>
+              <a:rPr lang="en-US" altLang="ko-KR" sz="1300" dirty="0">
+                <a:latin typeface="D2Coding" panose="020B0609020101020101" pitchFamily="49" charset="-127"/>
+                <a:ea typeface="D2Coding" panose="020B0609020101020101" pitchFamily="49" charset="-127"/>
+              </a:rPr>
+              <a:t>, word in enumerate(</a:t>
+            </a:r>
+            <a:r>
+              <a:rPr lang="en-US" altLang="ko-KR" sz="1300" dirty="0" err="1">
+                <a:latin typeface="D2Coding" panose="020B0609020101020101" pitchFamily="49" charset="-127"/>
+                <a:ea typeface="D2Coding" panose="020B0609020101020101" pitchFamily="49" charset="-127"/>
+              </a:rPr>
+              <a:t>word_list</a:t>
+            </a:r>
+            <a:r>
+              <a:rPr lang="en-US" altLang="ko-KR" sz="1300" dirty="0">
+                <a:latin typeface="D2Coding" panose="020B0609020101020101" pitchFamily="49" charset="-127"/>
+                <a:ea typeface="D2Coding" panose="020B0609020101020101" pitchFamily="49" charset="-127"/>
+              </a:rPr>
+              <a:t>):</a:t>
+            </a:r>
+          </a:p>
+          <a:p>
+            <a:r>
+              <a:rPr lang="en-US" altLang="ko-KR" sz="1300" dirty="0">
+                <a:latin typeface="D2Coding" panose="020B0609020101020101" pitchFamily="49" charset="-127"/>
+                <a:ea typeface="D2Coding" panose="020B0609020101020101" pitchFamily="49" charset="-127"/>
+              </a:rPr>
+              <a:t>    inputs[</a:t>
+            </a:r>
+            <a:r>
+              <a:rPr lang="en-US" altLang="ko-KR" sz="1300" dirty="0" err="1">
+                <a:latin typeface="D2Coding" panose="020B0609020101020101" pitchFamily="49" charset="-127"/>
+                <a:ea typeface="D2Coding" panose="020B0609020101020101" pitchFamily="49" charset="-127"/>
+              </a:rPr>
+              <a:t>i</a:t>
+            </a:r>
+            <a:r>
+              <a:rPr lang="en-US" altLang="ko-KR" sz="1300" dirty="0">
+                <a:latin typeface="D2Coding" panose="020B0609020101020101" pitchFamily="49" charset="-127"/>
+                <a:ea typeface="D2Coding" panose="020B0609020101020101" pitchFamily="49" charset="-127"/>
+              </a:rPr>
+              <a:t>] = </a:t>
+            </a:r>
+            <a:r>
+              <a:rPr lang="en-US" altLang="ko-KR" sz="1300" dirty="0" err="1">
+                <a:latin typeface="D2Coding" panose="020B0609020101020101" pitchFamily="49" charset="-127"/>
+                <a:ea typeface="D2Coding" panose="020B0609020101020101" pitchFamily="49" charset="-127"/>
+              </a:rPr>
+              <a:t>model.wv</a:t>
+            </a:r>
+            <a:r>
+              <a:rPr lang="en-US" altLang="ko-KR" sz="1300" dirty="0">
+                <a:latin typeface="D2Coding" panose="020B0609020101020101" pitchFamily="49" charset="-127"/>
+                <a:ea typeface="D2Coding" panose="020B0609020101020101" pitchFamily="49" charset="-127"/>
+              </a:rPr>
+              <a:t>[word]  # </a:t>
+            </a:r>
+            <a:r>
+              <a:rPr lang="ko-KR" altLang="en-US" sz="1300" dirty="0">
+                <a:latin typeface="D2Coding" panose="020B0609020101020101" pitchFamily="49" charset="-127"/>
+                <a:ea typeface="D2Coding" panose="020B0609020101020101" pitchFamily="49" charset="-127"/>
+              </a:rPr>
+              <a:t>각 단어의 </a:t>
+            </a:r>
+            <a:r>
+              <a:rPr lang="en-US" altLang="ko-KR" sz="1300" dirty="0">
+                <a:latin typeface="D2Coding" panose="020B0609020101020101" pitchFamily="49" charset="-127"/>
+                <a:ea typeface="D2Coding" panose="020B0609020101020101" pitchFamily="49" charset="-127"/>
+              </a:rPr>
+              <a:t>4</a:t>
+            </a:r>
+            <a:r>
+              <a:rPr lang="ko-KR" altLang="en-US" sz="1300" dirty="0">
+                <a:latin typeface="D2Coding" panose="020B0609020101020101" pitchFamily="49" charset="-127"/>
+                <a:ea typeface="D2Coding" panose="020B0609020101020101" pitchFamily="49" charset="-127"/>
+              </a:rPr>
+              <a:t>차원 실수 </a:t>
+            </a:r>
+            <a:r>
+              <a:rPr lang="ko-KR" altLang="en-US" sz="1300" dirty="0" err="1">
+                <a:latin typeface="D2Coding" panose="020B0609020101020101" pitchFamily="49" charset="-127"/>
+                <a:ea typeface="D2Coding" panose="020B0609020101020101" pitchFamily="49" charset="-127"/>
+              </a:rPr>
+              <a:t>벡터값</a:t>
+            </a:r>
+            <a:r>
+              <a:rPr lang="ko-KR" altLang="en-US" sz="1300" dirty="0">
+                <a:latin typeface="D2Coding" panose="020B0609020101020101" pitchFamily="49" charset="-127"/>
+                <a:ea typeface="D2Coding" panose="020B0609020101020101" pitchFamily="49" charset="-127"/>
+              </a:rPr>
+              <a:t> 대입</a:t>
+            </a:r>
+          </a:p>
+          <a:p>
+            <a:r>
+              <a:rPr lang="en-US" altLang="ko-KR" sz="1300" dirty="0">
+                <a:latin typeface="D2Coding" panose="020B0609020101020101" pitchFamily="49" charset="-127"/>
+                <a:ea typeface="D2Coding" panose="020B0609020101020101" pitchFamily="49" charset="-127"/>
+              </a:rPr>
+              <a:t>print("=== </a:t>
+            </a:r>
+            <a:r>
+              <a:rPr lang="en-US" altLang="ko-KR" sz="1300" dirty="0" err="1">
+                <a:latin typeface="D2Coding" panose="020B0609020101020101" pitchFamily="49" charset="-127"/>
+                <a:ea typeface="D2Coding" panose="020B0609020101020101" pitchFamily="49" charset="-127"/>
+              </a:rPr>
+              <a:t>Gensim</a:t>
+            </a:r>
+            <a:r>
+              <a:rPr lang="ko-KR" altLang="en-US" sz="1300" dirty="0">
+                <a:latin typeface="D2Coding" panose="020B0609020101020101" pitchFamily="49" charset="-127"/>
+                <a:ea typeface="D2Coding" panose="020B0609020101020101" pitchFamily="49" charset="-127"/>
+              </a:rPr>
+              <a:t>으로 생성된 실제 텍스트 입력 데이터 </a:t>
+            </a:r>
+            <a:r>
+              <a:rPr lang="en-US" altLang="ko-KR" sz="1300" dirty="0">
+                <a:latin typeface="D2Coding" panose="020B0609020101020101" pitchFamily="49" charset="-127"/>
+                <a:ea typeface="D2Coding" panose="020B0609020101020101" pitchFamily="49" charset="-127"/>
+              </a:rPr>
+              <a:t>(</a:t>
+            </a:r>
+            <a:r>
+              <a:rPr lang="ko-KR" altLang="en-US" sz="1300" dirty="0">
+                <a:latin typeface="D2Coding" panose="020B0609020101020101" pitchFamily="49" charset="-127"/>
+                <a:ea typeface="D2Coding" panose="020B0609020101020101" pitchFamily="49" charset="-127"/>
+              </a:rPr>
+              <a:t>크기</a:t>
+            </a:r>
+            <a:r>
+              <a:rPr lang="en-US" altLang="ko-KR" sz="1300" dirty="0">
+                <a:latin typeface="D2Coding" panose="020B0609020101020101" pitchFamily="49" charset="-127"/>
+                <a:ea typeface="D2Coding" panose="020B0609020101020101" pitchFamily="49" charset="-127"/>
+              </a:rPr>
+              <a:t>: 4x4) ===")</a:t>
+            </a:r>
+          </a:p>
+          <a:p>
+            <a:r>
+              <a:rPr lang="en-US" altLang="ko-KR" sz="1300" dirty="0">
+                <a:latin typeface="D2Coding" panose="020B0609020101020101" pitchFamily="49" charset="-127"/>
+                <a:ea typeface="D2Coding" panose="020B0609020101020101" pitchFamily="49" charset="-127"/>
+              </a:rPr>
+              <a:t>print(inputs)</a:t>
+            </a:r>
+          </a:p>
+        </p:txBody>
+      </p:sp>
+      <p:pic>
+        <p:nvPicPr>
+          <p:cNvPr id="8194" name="Picture 2" descr="Darth Vader I Am Your Father Star Wars Movie Film Sci-fi Quote Picture  Poster | eBay">
+            <a:extLst>
+              <a:ext uri="{FF2B5EF4-FFF2-40B4-BE49-F238E27FC236}">
+                <a16:creationId xmlns:a16="http://schemas.microsoft.com/office/drawing/2014/main" id="{FE1CFB7F-8D0D-C3A5-AE3C-E294A70BAAA0}"/>
+              </a:ext>
+            </a:extLst>
+          </p:cNvPr>
+          <p:cNvPicPr>
+            <a:picLocks noChangeAspect="1" noChangeArrowheads="1"/>
+          </p:cNvPicPr>
+          <p:nvPr/>
+        </p:nvPicPr>
+        <p:blipFill>
+          <a:blip r:embed="rId2">
+            <a:extLst>
+              <a:ext uri="{28A0092B-C50C-407E-A947-70E740481C1C}">
+                <a14:useLocalDpi xmlns:a14="http://schemas.microsoft.com/office/drawing/2010/main" val="0"/>
+              </a:ext>
+            </a:extLst>
+          </a:blip>
+          <a:srcRect/>
+          <a:stretch>
+            <a:fillRect/>
+          </a:stretch>
+        </p:blipFill>
+        <p:spPr bwMode="auto">
+          <a:xfrm>
+            <a:off x="9642909" y="1390662"/>
+            <a:ext cx="2372995" cy="1732377"/>
+          </a:xfrm>
+          <a:prstGeom prst="rect">
+            <a:avLst/>
+          </a:prstGeom>
+          <a:noFill/>
+          <a:extLst>
+            <a:ext uri="{909E8E84-426E-40DD-AFC4-6F175D3DCCD1}">
+              <a14:hiddenFill xmlns:a14="http://schemas.microsoft.com/office/drawing/2010/main">
+                <a:solidFill>
+                  <a:srgbClr val="FFFFFF"/>
+                </a:solidFill>
+              </a14:hiddenFill>
+            </a:ext>
+          </a:extLst>
+        </p:spPr>
+      </p:pic>
+      <p:sp>
+        <p:nvSpPr>
+          <p:cNvPr id="15" name="TextBox 14">
+            <a:extLst>
+              <a:ext uri="{FF2B5EF4-FFF2-40B4-BE49-F238E27FC236}">
+                <a16:creationId xmlns:a16="http://schemas.microsoft.com/office/drawing/2014/main" id="{4AD21CB7-915B-B450-618A-FB2D83F87379}"/>
+              </a:ext>
+            </a:extLst>
+          </p:cNvPr>
+          <p:cNvSpPr txBox="1"/>
+          <p:nvPr/>
+        </p:nvSpPr>
+        <p:spPr>
+          <a:xfrm>
+            <a:off x="6544861" y="3783497"/>
+            <a:ext cx="5388393" cy="769441"/>
+          </a:xfrm>
+          <a:prstGeom prst="rect">
+            <a:avLst/>
+          </a:prstGeom>
+          <a:solidFill>
+            <a:schemeClr val="bg1">
+              <a:lumMod val="95000"/>
+            </a:schemeClr>
+          </a:solidFill>
+        </p:spPr>
+        <p:txBody>
+          <a:bodyPr wrap="square">
+            <a:spAutoFit/>
+          </a:bodyPr>
+          <a:lstStyle/>
+          <a:p>
+            <a:r>
+              <a:rPr lang="en-US" altLang="ko-KR" sz="1100" dirty="0">
+                <a:latin typeface="D2Coding" panose="020B0609020101020101" pitchFamily="49" charset="-127"/>
+                <a:ea typeface="D2Coding" panose="020B0609020101020101" pitchFamily="49" charset="-127"/>
+              </a:rPr>
+              <a:t>Time</a:t>
+            </a:r>
+            <a:r>
+              <a:rPr lang="ko-KR" altLang="en-US" sz="1100" dirty="0">
+                <a:latin typeface="D2Coding" panose="020B0609020101020101" pitchFamily="49" charset="-127"/>
+                <a:ea typeface="D2Coding" panose="020B0609020101020101" pitchFamily="49" charset="-127"/>
+              </a:rPr>
+              <a:t> </a:t>
+            </a:r>
+            <a:r>
+              <a:rPr lang="en-US" altLang="ko-KR" sz="1100" dirty="0">
+                <a:latin typeface="D2Coding" panose="020B0609020101020101" pitchFamily="49" charset="-127"/>
+                <a:ea typeface="D2Coding" panose="020B0609020101020101" pitchFamily="49" charset="-127"/>
+              </a:rPr>
+              <a:t>Steps : </a:t>
+            </a:r>
+          </a:p>
+          <a:p>
+            <a:pPr>
+              <a:buFont typeface="Arial" panose="020B0604020202020204" pitchFamily="34" charset="0"/>
+              <a:buChar char="•"/>
+            </a:pPr>
+            <a:r>
+              <a:rPr lang="ko-KR" altLang="en-US" sz="1100" dirty="0">
+                <a:latin typeface="D2Coding" panose="020B0609020101020101" pitchFamily="49" charset="-127"/>
+                <a:ea typeface="D2Coding" panose="020B0609020101020101" pitchFamily="49" charset="-127"/>
+              </a:rPr>
+              <a:t> 텍스트에서는 </a:t>
+            </a:r>
+            <a:r>
+              <a:rPr lang="en-US" altLang="ko-KR" sz="1100" dirty="0">
+                <a:latin typeface="D2Coding" panose="020B0609020101020101" pitchFamily="49" charset="-127"/>
+                <a:ea typeface="D2Coding" panose="020B0609020101020101" pitchFamily="49" charset="-127"/>
+              </a:rPr>
+              <a:t>"</a:t>
+            </a:r>
+            <a:r>
+              <a:rPr lang="ko-KR" altLang="en-US" sz="1100" dirty="0">
+                <a:latin typeface="D2Coding" panose="020B0609020101020101" pitchFamily="49" charset="-127"/>
+                <a:ea typeface="D2Coding" panose="020B0609020101020101" pitchFamily="49" charset="-127"/>
+              </a:rPr>
+              <a:t>문장 속 단어의 순서</a:t>
+            </a:r>
+            <a:r>
+              <a:rPr lang="en-US" altLang="ko-KR" sz="1100" dirty="0">
+                <a:latin typeface="D2Coding" panose="020B0609020101020101" pitchFamily="49" charset="-127"/>
+                <a:ea typeface="D2Coding" panose="020B0609020101020101" pitchFamily="49" charset="-127"/>
+              </a:rPr>
+              <a:t>(</a:t>
+            </a:r>
+            <a:r>
+              <a:rPr lang="ko-KR" altLang="en-US" sz="1100" dirty="0">
+                <a:latin typeface="D2Coding" panose="020B0609020101020101" pitchFamily="49" charset="-127"/>
+                <a:ea typeface="D2Coding" panose="020B0609020101020101" pitchFamily="49" charset="-127"/>
+              </a:rPr>
+              <a:t>몇 번째 단어인가</a:t>
+            </a:r>
+            <a:r>
+              <a:rPr lang="en-US" altLang="ko-KR" sz="1100" dirty="0">
+                <a:latin typeface="D2Coding" panose="020B0609020101020101" pitchFamily="49" charset="-127"/>
+                <a:ea typeface="D2Coding" panose="020B0609020101020101" pitchFamily="49" charset="-127"/>
+              </a:rPr>
+              <a:t>)"</a:t>
+            </a:r>
+            <a:endParaRPr lang="ko-KR" altLang="en-US" sz="1100" dirty="0">
+              <a:latin typeface="D2Coding" panose="020B0609020101020101" pitchFamily="49" charset="-127"/>
+              <a:ea typeface="D2Coding" panose="020B0609020101020101" pitchFamily="49" charset="-127"/>
+            </a:endParaRPr>
+          </a:p>
+          <a:p>
+            <a:pPr>
+              <a:buFont typeface="Arial" panose="020B0604020202020204" pitchFamily="34" charset="0"/>
+              <a:buChar char="•"/>
+            </a:pPr>
+            <a:r>
+              <a:rPr lang="ko-KR" altLang="en-US" sz="1100" dirty="0">
+                <a:latin typeface="D2Coding" panose="020B0609020101020101" pitchFamily="49" charset="-127"/>
+                <a:ea typeface="D2Coding" panose="020B0609020101020101" pitchFamily="49" charset="-127"/>
+              </a:rPr>
+              <a:t> 시계열 데이터</a:t>
+            </a:r>
+            <a:r>
+              <a:rPr lang="en-US" altLang="ko-KR" sz="1100" dirty="0">
+                <a:latin typeface="D2Coding" panose="020B0609020101020101" pitchFamily="49" charset="-127"/>
+                <a:ea typeface="D2Coding" panose="020B0609020101020101" pitchFamily="49" charset="-127"/>
+              </a:rPr>
+              <a:t>(</a:t>
+            </a:r>
+            <a:r>
+              <a:rPr lang="ko-KR" altLang="en-US" sz="1100" dirty="0">
+                <a:latin typeface="D2Coding" panose="020B0609020101020101" pitchFamily="49" charset="-127"/>
+                <a:ea typeface="D2Coding" panose="020B0609020101020101" pitchFamily="49" charset="-127"/>
+              </a:rPr>
+              <a:t>예</a:t>
+            </a:r>
+            <a:r>
+              <a:rPr lang="en-US" altLang="ko-KR" sz="1100" dirty="0">
+                <a:latin typeface="D2Coding" panose="020B0609020101020101" pitchFamily="49" charset="-127"/>
+                <a:ea typeface="D2Coding" panose="020B0609020101020101" pitchFamily="49" charset="-127"/>
+              </a:rPr>
+              <a:t>: </a:t>
+            </a:r>
+            <a:r>
+              <a:rPr lang="ko-KR" altLang="en-US" sz="1100" dirty="0">
+                <a:latin typeface="D2Coding" panose="020B0609020101020101" pitchFamily="49" charset="-127"/>
+                <a:ea typeface="D2Coding" panose="020B0609020101020101" pitchFamily="49" charset="-127"/>
+              </a:rPr>
+              <a:t>주가</a:t>
+            </a:r>
+            <a:r>
+              <a:rPr lang="en-US" altLang="ko-KR" sz="1100" dirty="0">
+                <a:latin typeface="D2Coding" panose="020B0609020101020101" pitchFamily="49" charset="-127"/>
+                <a:ea typeface="D2Coding" panose="020B0609020101020101" pitchFamily="49" charset="-127"/>
+              </a:rPr>
+              <a:t>)</a:t>
+            </a:r>
+            <a:r>
+              <a:rPr lang="ko-KR" altLang="en-US" sz="1100" dirty="0">
+                <a:latin typeface="D2Coding" panose="020B0609020101020101" pitchFamily="49" charset="-127"/>
+                <a:ea typeface="D2Coding" panose="020B0609020101020101" pitchFamily="49" charset="-127"/>
+              </a:rPr>
+              <a:t>에서는 </a:t>
+            </a:r>
+            <a:r>
+              <a:rPr lang="en-US" altLang="ko-KR" sz="1100" dirty="0">
+                <a:latin typeface="D2Coding" panose="020B0609020101020101" pitchFamily="49" charset="-127"/>
+                <a:ea typeface="D2Coding" panose="020B0609020101020101" pitchFamily="49" charset="-127"/>
+              </a:rPr>
+              <a:t>"</a:t>
+            </a:r>
+            <a:r>
+              <a:rPr lang="ko-KR" altLang="en-US" sz="1100" dirty="0">
+                <a:latin typeface="D2Coding" panose="020B0609020101020101" pitchFamily="49" charset="-127"/>
+                <a:ea typeface="D2Coding" panose="020B0609020101020101" pitchFamily="49" charset="-127"/>
+              </a:rPr>
+              <a:t>날짜의 순서</a:t>
+            </a:r>
+            <a:r>
+              <a:rPr lang="en-US" altLang="ko-KR" sz="1100" dirty="0">
+                <a:latin typeface="D2Coding" panose="020B0609020101020101" pitchFamily="49" charset="-127"/>
+                <a:ea typeface="D2Coding" panose="020B0609020101020101" pitchFamily="49" charset="-127"/>
+              </a:rPr>
+              <a:t>(1</a:t>
+            </a:r>
+            <a:r>
+              <a:rPr lang="ko-KR" altLang="en-US" sz="1100" dirty="0">
+                <a:latin typeface="D2Coding" panose="020B0609020101020101" pitchFamily="49" charset="-127"/>
+                <a:ea typeface="D2Coding" panose="020B0609020101020101" pitchFamily="49" charset="-127"/>
+              </a:rPr>
+              <a:t>일 차</a:t>
+            </a:r>
+            <a:r>
+              <a:rPr lang="en-US" altLang="ko-KR" sz="1100" dirty="0">
+                <a:latin typeface="D2Coding" panose="020B0609020101020101" pitchFamily="49" charset="-127"/>
+                <a:ea typeface="D2Coding" panose="020B0609020101020101" pitchFamily="49" charset="-127"/>
+              </a:rPr>
+              <a:t>, 2</a:t>
+            </a:r>
+            <a:r>
+              <a:rPr lang="ko-KR" altLang="en-US" sz="1100" dirty="0">
+                <a:latin typeface="D2Coding" panose="020B0609020101020101" pitchFamily="49" charset="-127"/>
+                <a:ea typeface="D2Coding" panose="020B0609020101020101" pitchFamily="49" charset="-127"/>
+              </a:rPr>
+              <a:t>일 차</a:t>
+            </a:r>
+            <a:r>
+              <a:rPr lang="en-US" altLang="ko-KR" sz="1100" dirty="0">
+                <a:latin typeface="D2Coding" panose="020B0609020101020101" pitchFamily="49" charset="-127"/>
+                <a:ea typeface="D2Coding" panose="020B0609020101020101" pitchFamily="49" charset="-127"/>
+              </a:rPr>
+              <a:t>, 3</a:t>
+            </a:r>
+            <a:r>
+              <a:rPr lang="ko-KR" altLang="en-US" sz="1100" dirty="0">
+                <a:latin typeface="D2Coding" panose="020B0609020101020101" pitchFamily="49" charset="-127"/>
+                <a:ea typeface="D2Coding" panose="020B0609020101020101" pitchFamily="49" charset="-127"/>
+              </a:rPr>
+              <a:t>일 차</a:t>
+            </a:r>
+            <a:r>
+              <a:rPr lang="en-US" altLang="ko-KR" sz="1100" dirty="0">
+                <a:latin typeface="D2Coding" panose="020B0609020101020101" pitchFamily="49" charset="-127"/>
+                <a:ea typeface="D2Coding" panose="020B0609020101020101" pitchFamily="49" charset="-127"/>
+              </a:rPr>
+              <a:t>...)"</a:t>
+            </a:r>
+            <a:endParaRPr lang="ko-KR" altLang="en-US" sz="1100" dirty="0">
+              <a:latin typeface="D2Coding" panose="020B0609020101020101" pitchFamily="49" charset="-127"/>
+              <a:ea typeface="D2Coding" panose="020B0609020101020101" pitchFamily="49" charset="-127"/>
+            </a:endParaRPr>
+          </a:p>
+          <a:p>
+            <a:pPr>
+              <a:buFont typeface="Arial" panose="020B0604020202020204" pitchFamily="34" charset="0"/>
+              <a:buChar char="•"/>
+            </a:pPr>
+            <a:r>
+              <a:rPr lang="ko-KR" altLang="en-US" sz="1100" dirty="0">
+                <a:latin typeface="D2Coding" panose="020B0609020101020101" pitchFamily="49" charset="-127"/>
+                <a:ea typeface="D2Coding" panose="020B0609020101020101" pitchFamily="49" charset="-127"/>
+              </a:rPr>
+              <a:t> 음성에서는 </a:t>
+            </a:r>
+            <a:r>
+              <a:rPr lang="en-US" altLang="ko-KR" sz="1100" dirty="0">
+                <a:latin typeface="D2Coding" panose="020B0609020101020101" pitchFamily="49" charset="-127"/>
+                <a:ea typeface="D2Coding" panose="020B0609020101020101" pitchFamily="49" charset="-127"/>
+              </a:rPr>
+              <a:t>"</a:t>
+            </a:r>
+            <a:r>
+              <a:rPr lang="ko-KR" altLang="en-US" sz="1100" dirty="0">
+                <a:latin typeface="D2Coding" panose="020B0609020101020101" pitchFamily="49" charset="-127"/>
+                <a:ea typeface="D2Coding" panose="020B0609020101020101" pitchFamily="49" charset="-127"/>
+              </a:rPr>
+              <a:t>오디오 신호의 시간 순서</a:t>
+            </a:r>
+            <a:r>
+              <a:rPr lang="en-US" altLang="ko-KR" sz="1100" dirty="0">
+                <a:latin typeface="D2Coding" panose="020B0609020101020101" pitchFamily="49" charset="-127"/>
+                <a:ea typeface="D2Coding" panose="020B0609020101020101" pitchFamily="49" charset="-127"/>
+              </a:rPr>
+              <a:t>(0.1</a:t>
+            </a:r>
+            <a:r>
+              <a:rPr lang="ko-KR" altLang="en-US" sz="1100" dirty="0">
+                <a:latin typeface="D2Coding" panose="020B0609020101020101" pitchFamily="49" charset="-127"/>
+                <a:ea typeface="D2Coding" panose="020B0609020101020101" pitchFamily="49" charset="-127"/>
+              </a:rPr>
+              <a:t>초</a:t>
+            </a:r>
+            <a:r>
+              <a:rPr lang="en-US" altLang="ko-KR" sz="1100" dirty="0">
+                <a:latin typeface="D2Coding" panose="020B0609020101020101" pitchFamily="49" charset="-127"/>
+                <a:ea typeface="D2Coding" panose="020B0609020101020101" pitchFamily="49" charset="-127"/>
+              </a:rPr>
+              <a:t>, 0.2</a:t>
+            </a:r>
+            <a:r>
+              <a:rPr lang="ko-KR" altLang="en-US" sz="1100" dirty="0">
+                <a:latin typeface="D2Coding" panose="020B0609020101020101" pitchFamily="49" charset="-127"/>
+                <a:ea typeface="D2Coding" panose="020B0609020101020101" pitchFamily="49" charset="-127"/>
+              </a:rPr>
+              <a:t>초</a:t>
+            </a:r>
+            <a:r>
+              <a:rPr lang="en-US" altLang="ko-KR" sz="1100" dirty="0">
+                <a:latin typeface="D2Coding" panose="020B0609020101020101" pitchFamily="49" charset="-127"/>
+                <a:ea typeface="D2Coding" panose="020B0609020101020101" pitchFamily="49" charset="-127"/>
+              </a:rPr>
+              <a:t>, 0.3</a:t>
+            </a:r>
+            <a:r>
+              <a:rPr lang="ko-KR" altLang="en-US" sz="1100" dirty="0">
+                <a:latin typeface="D2Coding" panose="020B0609020101020101" pitchFamily="49" charset="-127"/>
+                <a:ea typeface="D2Coding" panose="020B0609020101020101" pitchFamily="49" charset="-127"/>
+              </a:rPr>
+              <a:t>초</a:t>
+            </a:r>
+            <a:r>
+              <a:rPr lang="en-US" altLang="ko-KR" sz="1100" dirty="0">
+                <a:latin typeface="D2Coding" panose="020B0609020101020101" pitchFamily="49" charset="-127"/>
+                <a:ea typeface="D2Coding" panose="020B0609020101020101" pitchFamily="49" charset="-127"/>
+              </a:rPr>
+              <a:t>...)"</a:t>
+            </a:r>
+            <a:endParaRPr lang="ko-KR" altLang="en-US" sz="1100" dirty="0">
+              <a:latin typeface="D2Coding" panose="020B0609020101020101" pitchFamily="49" charset="-127"/>
+              <a:ea typeface="D2Coding" panose="020B0609020101020101" pitchFamily="49" charset="-127"/>
+            </a:endParaRPr>
+          </a:p>
+        </p:txBody>
+      </p:sp>
+    </p:spTree>
+    <p:extLst>
+      <p:ext uri="{BB962C8B-B14F-4D97-AF65-F5344CB8AC3E}">
+        <p14:creationId xmlns:p14="http://schemas.microsoft.com/office/powerpoint/2010/main" val="2171070356"/>
+      </p:ext>
+    </p:extLst>
+  </p:cSld>
+  <p:clrMapOvr>
+    <a:masterClrMapping/>
+  </p:clrMapOvr>
+</p:sld>
+</file>
+
+<file path=ppt/slides/slide11.xml><?xml version="1.0" encoding="utf-8"?>
+<p:sld xmlns:a="http://schemas.openxmlformats.org/drawingml/2006/main" xmlns:r="http://schemas.openxmlformats.org/officeDocument/2006/relationships" xmlns:p="http://schemas.openxmlformats.org/presentationml/2006/main">
+  <p:cSld>
+    <p:spTree>
+      <p:nvGrpSpPr>
+        <p:cNvPr id="1" name="">
+          <a:extLst>
+            <a:ext uri="{FF2B5EF4-FFF2-40B4-BE49-F238E27FC236}">
               <a16:creationId xmlns:a16="http://schemas.microsoft.com/office/drawing/2014/main" id="{6EA98FCE-16F3-1B06-99F9-9A89C0B2D62C}"/>
             </a:ext>
           </a:extLst>
@@ -3194,7 +4483,7 @@
             <a:fld id="{D57F1E4F-1CFF-5643-939E-217C01CDF565}" type="slidenum">
               <a:rPr lang="en-US" smtClean="0"/>
               <a:pPr/>
-              <a:t>10</a:t>
+              <a:t>11</a:t>
             </a:fld>
             <a:endParaRPr lang="en-US" dirty="0"/>
           </a:p>
@@ -4686,7 +5975,7 @@
 </p:sld>
 </file>
 
-<file path=ppt/slides/slide11.xml><?xml version="1.0" encoding="utf-8"?>
+<file path=ppt/slides/slide12.xml><?xml version="1.0" encoding="utf-8"?>
 <p:sld xmlns:a="http://schemas.openxmlformats.org/drawingml/2006/main" xmlns:r="http://schemas.openxmlformats.org/officeDocument/2006/relationships" xmlns:p="http://schemas.openxmlformats.org/presentationml/2006/main">
   <p:cSld>
     <p:spTree>
@@ -4738,7 +6027,7 @@
             <a:fld id="{D57F1E4F-1CFF-5643-939E-217C01CDF565}" type="slidenum">
               <a:rPr lang="en-US" smtClean="0"/>
               <a:pPr/>
-              <a:t>11</a:t>
+              <a:t>12</a:t>
             </a:fld>
             <a:endParaRPr lang="en-US" dirty="0"/>
           </a:p>
@@ -4888,7 +6177,7 @@
 </p:sld>
 </file>
 
-<file path=ppt/slides/slide12.xml><?xml version="1.0" encoding="utf-8"?>
+<file path=ppt/slides/slide13.xml><?xml version="1.0" encoding="utf-8"?>
 <p:sld xmlns:a="http://schemas.openxmlformats.org/drawingml/2006/main" xmlns:r="http://schemas.openxmlformats.org/officeDocument/2006/relationships" xmlns:p="http://schemas.openxmlformats.org/presentationml/2006/main">
   <p:cSld>
     <p:spTree>
@@ -4940,7 +6229,7 @@
             <a:fld id="{D57F1E4F-1CFF-5643-939E-217C01CDF565}" type="slidenum">
               <a:rPr lang="en-US" smtClean="0"/>
               <a:pPr/>
-              <a:t>12</a:t>
+              <a:t>13</a:t>
             </a:fld>
             <a:endParaRPr lang="en-US" dirty="0"/>
           </a:p>
@@ -5090,7 +6379,7 @@
 </p:sld>
 </file>
 
-<file path=ppt/slides/slide13.xml><?xml version="1.0" encoding="utf-8"?>
+<file path=ppt/slides/slide14.xml><?xml version="1.0" encoding="utf-8"?>
 <p:sld xmlns:a="http://schemas.openxmlformats.org/drawingml/2006/main" xmlns:r="http://schemas.openxmlformats.org/officeDocument/2006/relationships" xmlns:p="http://schemas.openxmlformats.org/presentationml/2006/main">
   <p:cSld>
     <p:spTree>
@@ -5142,7 +6431,7 @@
             <a:fld id="{D57F1E4F-1CFF-5643-939E-217C01CDF565}" type="slidenum">
               <a:rPr lang="en-US" smtClean="0"/>
               <a:pPr/>
-              <a:t>13</a:t>
+              <a:t>14</a:t>
             </a:fld>
             <a:endParaRPr lang="en-US" dirty="0"/>
           </a:p>
@@ -5405,7 +6694,7 @@
 </p:sld>
 </file>
 
-<file path=ppt/slides/slide14.xml><?xml version="1.0" encoding="utf-8"?>
+<file path=ppt/slides/slide15.xml><?xml version="1.0" encoding="utf-8"?>
 <p:sld xmlns:a="http://schemas.openxmlformats.org/drawingml/2006/main" xmlns:r="http://schemas.openxmlformats.org/officeDocument/2006/relationships" xmlns:p="http://schemas.openxmlformats.org/presentationml/2006/main">
   <p:cSld>
     <p:spTree>
@@ -5457,7 +6746,7 @@
             <a:fld id="{D57F1E4F-1CFF-5643-939E-217C01CDF565}" type="slidenum">
               <a:rPr lang="en-US" smtClean="0"/>
               <a:pPr/>
-              <a:t>14</a:t>
+              <a:t>15</a:t>
             </a:fld>
             <a:endParaRPr lang="en-US" dirty="0"/>
           </a:p>
@@ -6390,6 +7679,2190 @@
         <p:cNvPr id="1" name="">
           <a:extLst>
             <a:ext uri="{FF2B5EF4-FFF2-40B4-BE49-F238E27FC236}">
+              <a16:creationId xmlns:a16="http://schemas.microsoft.com/office/drawing/2014/main" id="{33A453A4-36DB-F245-2BB0-D8356B9C0734}"/>
+            </a:ext>
+          </a:extLst>
+        </p:cNvPr>
+        <p:cNvGrpSpPr/>
+        <p:nvPr/>
+      </p:nvGrpSpPr>
+      <p:grpSpPr>
+        <a:xfrm>
+          <a:off x="0" y="0"/>
+          <a:ext cx="0" cy="0"/>
+          <a:chOff x="0" y="0"/>
+          <a:chExt cx="0" cy="0"/>
+        </a:xfrm>
+      </p:grpSpPr>
+      <p:sp>
+        <p:nvSpPr>
+          <p:cNvPr id="4" name="슬라이드 번호 개체 틀 3">
+            <a:extLst>
+              <a:ext uri="{FF2B5EF4-FFF2-40B4-BE49-F238E27FC236}">
+                <a16:creationId xmlns:a16="http://schemas.microsoft.com/office/drawing/2014/main" id="{67D8800B-CA56-2E83-5A7A-80A20196A54A}"/>
+              </a:ext>
+            </a:extLst>
+          </p:cNvPr>
+          <p:cNvSpPr>
+            <a:spLocks noGrp="1"/>
+          </p:cNvSpPr>
+          <p:nvPr>
+            <p:ph type="sldNum" sz="quarter" idx="12"/>
+          </p:nvPr>
+        </p:nvSpPr>
+        <p:spPr>
+          <a:xfrm>
+            <a:off x="10514011" y="6036261"/>
+            <a:ext cx="753545" cy="365125"/>
+          </a:xfrm>
+        </p:spPr>
+        <p:txBody>
+          <a:bodyPr/>
+          <a:lstStyle/>
+          <a:p>
+            <a:fld id="{D57F1E4F-1CFF-5643-939E-217C01CDF565}" type="slidenum">
+              <a:rPr lang="en-US" smtClean="0"/>
+              <a:pPr/>
+              <a:t>4</a:t>
+            </a:fld>
+            <a:endParaRPr lang="en-US" dirty="0"/>
+          </a:p>
+        </p:txBody>
+      </p:sp>
+      <p:sp>
+        <p:nvSpPr>
+          <p:cNvPr id="3" name="제목 1">
+            <a:extLst>
+              <a:ext uri="{FF2B5EF4-FFF2-40B4-BE49-F238E27FC236}">
+                <a16:creationId xmlns:a16="http://schemas.microsoft.com/office/drawing/2014/main" id="{FF1A8E30-B608-7E9F-7E75-95CDFF5EDEF2}"/>
+              </a:ext>
+            </a:extLst>
+          </p:cNvPr>
+          <p:cNvSpPr txBox="1">
+            <a:spLocks/>
+          </p:cNvSpPr>
+          <p:nvPr/>
+        </p:nvSpPr>
+        <p:spPr>
+          <a:xfrm>
+            <a:off x="475645" y="481983"/>
+            <a:ext cx="10353762" cy="766439"/>
+          </a:xfrm>
+          <a:prstGeom prst="rect">
+            <a:avLst/>
+          </a:prstGeom>
+        </p:spPr>
+        <p:txBody>
+          <a:bodyPr vert="horz" lIns="91440" tIns="45720" rIns="91440" bIns="45720" rtlCol="0" anchor="ctr">
+            <a:normAutofit/>
+          </a:bodyPr>
+          <a:lstStyle>
+            <a:lvl1pPr algn="ctr" defTabSz="914400" rtl="0" eaLnBrk="1" latinLnBrk="1" hangingPunct="1">
+              <a:lnSpc>
+                <a:spcPct val="90000"/>
+              </a:lnSpc>
+              <a:spcBef>
+                <a:spcPct val="0"/>
+              </a:spcBef>
+              <a:buNone/>
+              <a:defRPr sz="3200" kern="1200" cap="all" baseline="0">
+                <a:solidFill>
+                  <a:schemeClr val="tx1"/>
+                </a:solidFill>
+                <a:effectLst/>
+                <a:latin typeface="Batang" panose="02030600000101010101" pitchFamily="18" charset="-127"/>
+                <a:ea typeface="Batang" panose="02030600000101010101" pitchFamily="18" charset="-127"/>
+                <a:cs typeface="+mj-cs"/>
+              </a:defRPr>
+            </a:lvl1pPr>
+          </a:lstStyle>
+          <a:p>
+            <a:pPr algn="l"/>
+            <a:r>
+              <a:rPr lang="ko-KR" altLang="en-US" sz="2800" cap="none" dirty="0">
+                <a:solidFill>
+                  <a:schemeClr val="bg2">
+                    <a:lumMod val="25000"/>
+                  </a:schemeClr>
+                </a:solidFill>
+                <a:latin typeface="D2Coding" panose="020B0609020101020101" pitchFamily="49" charset="-127"/>
+                <a:ea typeface="D2Coding" panose="020B0609020101020101" pitchFamily="49" charset="-127"/>
+                <a:cs typeface="Segoe UI Light" panose="020B0502040204020203" pitchFamily="34" charset="0"/>
+              </a:rPr>
+              <a:t>순서가 중요한 데이터</a:t>
+            </a:r>
+          </a:p>
+        </p:txBody>
+      </p:sp>
+      <p:graphicFrame>
+        <p:nvGraphicFramePr>
+          <p:cNvPr id="2" name="표 1">
+            <a:extLst>
+              <a:ext uri="{FF2B5EF4-FFF2-40B4-BE49-F238E27FC236}">
+                <a16:creationId xmlns:a16="http://schemas.microsoft.com/office/drawing/2014/main" id="{52C74E2C-5185-4FDF-D522-52BB3849DFCA}"/>
+              </a:ext>
+            </a:extLst>
+          </p:cNvPr>
+          <p:cNvGraphicFramePr>
+            <a:graphicFrameLocks noGrp="1"/>
+          </p:cNvGraphicFramePr>
+          <p:nvPr>
+            <p:extLst>
+              <p:ext uri="{D42A27DB-BD31-4B8C-83A1-F6EECF244321}">
+                <p14:modId xmlns:p14="http://schemas.microsoft.com/office/powerpoint/2010/main" val="2323456157"/>
+              </p:ext>
+            </p:extLst>
+          </p:nvPr>
+        </p:nvGraphicFramePr>
+        <p:xfrm>
+          <a:off x="655955" y="2405063"/>
+          <a:ext cx="2859405" cy="3970950"/>
+        </p:xfrm>
+        <a:graphic>
+          <a:graphicData uri="http://schemas.openxmlformats.org/drawingml/2006/table">
+            <a:tbl>
+              <a:tblPr>
+                <a:tableStyleId>{5C22544A-7EE6-4342-B048-85BDC9FD1C3A}</a:tableStyleId>
+              </a:tblPr>
+              <a:tblGrid>
+                <a:gridCol w="846151">
+                  <a:extLst>
+                    <a:ext uri="{9D8B030D-6E8A-4147-A177-3AD203B41FA5}">
+                      <a16:colId xmlns:a16="http://schemas.microsoft.com/office/drawing/2014/main" val="2117216945"/>
+                    </a:ext>
+                  </a:extLst>
+                </a:gridCol>
+                <a:gridCol w="846151">
+                  <a:extLst>
+                    <a:ext uri="{9D8B030D-6E8A-4147-A177-3AD203B41FA5}">
+                      <a16:colId xmlns:a16="http://schemas.microsoft.com/office/drawing/2014/main" val="3750196696"/>
+                    </a:ext>
+                  </a:extLst>
+                </a:gridCol>
+                <a:gridCol w="1167103">
+                  <a:extLst>
+                    <a:ext uri="{9D8B030D-6E8A-4147-A177-3AD203B41FA5}">
+                      <a16:colId xmlns:a16="http://schemas.microsoft.com/office/drawing/2014/main" val="2368464626"/>
+                    </a:ext>
+                  </a:extLst>
+                </a:gridCol>
+              </a:tblGrid>
+              <a:tr h="264730">
+                <a:tc>
+                  <a:txBody>
+                    <a:bodyPr/>
+                    <a:lstStyle/>
+                    <a:p>
+                      <a:pPr algn="l" fontAlgn="ctr">
+                        <a:buNone/>
+                      </a:pPr>
+                      <a:r>
+                        <a:rPr lang="ko-KR" altLang="en-US" sz="900" u="none" strike="noStrike">
+                          <a:effectLst/>
+                          <a:latin typeface="D2Coding" panose="020B0609020101020101" pitchFamily="49" charset="-127"/>
+                          <a:ea typeface="D2Coding" panose="020B0609020101020101" pitchFamily="49" charset="-127"/>
+                        </a:rPr>
+                        <a:t>　</a:t>
+                      </a:r>
+                      <a:endParaRPr lang="ko-KR" altLang="en-US" sz="900" b="0" i="0" u="none" strike="noStrike">
+                        <a:solidFill>
+                          <a:srgbClr val="000000"/>
+                        </a:solidFill>
+                        <a:effectLst/>
+                        <a:latin typeface="D2Coding" panose="020B0609020101020101" pitchFamily="49" charset="-127"/>
+                        <a:ea typeface="D2Coding" panose="020B0609020101020101" pitchFamily="49" charset="-127"/>
+                      </a:endParaRPr>
+                    </a:p>
+                  </a:txBody>
+                  <a:tcPr marL="6430" marR="6430" marT="6430" marB="0" anchor="ctr"/>
+                </a:tc>
+                <a:tc>
+                  <a:txBody>
+                    <a:bodyPr/>
+                    <a:lstStyle/>
+                    <a:p>
+                      <a:pPr algn="r" fontAlgn="ctr">
+                        <a:buNone/>
+                      </a:pPr>
+                      <a:r>
+                        <a:rPr lang="ko-KR" altLang="en-US" sz="900" u="none" strike="noStrike">
+                          <a:effectLst/>
+                          <a:latin typeface="D2Coding" panose="020B0609020101020101" pitchFamily="49" charset="-127"/>
+                          <a:ea typeface="D2Coding" panose="020B0609020101020101" pitchFamily="49" charset="-127"/>
+                        </a:rPr>
+                        <a:t>일자</a:t>
+                      </a:r>
+                      <a:endParaRPr lang="ko-KR" altLang="en-US" sz="900" b="0" i="0" u="none" strike="noStrike">
+                        <a:solidFill>
+                          <a:srgbClr val="000000"/>
+                        </a:solidFill>
+                        <a:effectLst/>
+                        <a:latin typeface="D2Coding" panose="020B0609020101020101" pitchFamily="49" charset="-127"/>
+                        <a:ea typeface="D2Coding" panose="020B0609020101020101" pitchFamily="49" charset="-127"/>
+                      </a:endParaRPr>
+                    </a:p>
+                  </a:txBody>
+                  <a:tcPr marL="6430" marR="6430" marT="6430" marB="0" anchor="ctr"/>
+                </a:tc>
+                <a:tc>
+                  <a:txBody>
+                    <a:bodyPr/>
+                    <a:lstStyle/>
+                    <a:p>
+                      <a:pPr algn="r" fontAlgn="ctr">
+                        <a:buNone/>
+                      </a:pPr>
+                      <a:r>
+                        <a:rPr lang="ko-KR" altLang="en-US" sz="900" b="0" i="0" u="none" strike="noStrike" dirty="0">
+                          <a:solidFill>
+                            <a:srgbClr val="000000"/>
+                          </a:solidFill>
+                          <a:effectLst/>
+                          <a:latin typeface="D2Coding" panose="020B0609020101020101" pitchFamily="49" charset="-127"/>
+                          <a:ea typeface="D2Coding" panose="020B0609020101020101" pitchFamily="49" charset="-127"/>
+                        </a:rPr>
+                        <a:t>종가</a:t>
+                      </a:r>
+                      <a:r>
+                        <a:rPr lang="en-US" altLang="ko-KR" sz="900" b="0" i="0" u="none" strike="noStrike" dirty="0">
+                          <a:solidFill>
+                            <a:srgbClr val="000000"/>
+                          </a:solidFill>
+                          <a:effectLst/>
+                          <a:latin typeface="D2Coding" panose="020B0609020101020101" pitchFamily="49" charset="-127"/>
+                          <a:ea typeface="D2Coding" panose="020B0609020101020101" pitchFamily="49" charset="-127"/>
+                        </a:rPr>
+                        <a:t>(USD)</a:t>
+                      </a:r>
+                      <a:endParaRPr lang="ko-KR" altLang="en-US" sz="900" b="0" i="0" u="none" strike="noStrike" dirty="0">
+                        <a:solidFill>
+                          <a:srgbClr val="000000"/>
+                        </a:solidFill>
+                        <a:effectLst/>
+                        <a:latin typeface="D2Coding" panose="020B0609020101020101" pitchFamily="49" charset="-127"/>
+                        <a:ea typeface="D2Coding" panose="020B0609020101020101" pitchFamily="49" charset="-127"/>
+                      </a:endParaRPr>
+                    </a:p>
+                  </a:txBody>
+                  <a:tcPr marL="6430" marR="6430" marT="6430" marB="0" anchor="ctr"/>
+                </a:tc>
+                <a:extLst>
+                  <a:ext uri="{0D108BD9-81ED-4DB2-BD59-A6C34878D82A}">
+                    <a16:rowId xmlns:a16="http://schemas.microsoft.com/office/drawing/2014/main" val="1598936081"/>
+                  </a:ext>
+                </a:extLst>
+              </a:tr>
+              <a:tr h="264730">
+                <a:tc>
+                  <a:txBody>
+                    <a:bodyPr/>
+                    <a:lstStyle/>
+                    <a:p>
+                      <a:pPr algn="l" fontAlgn="ctr">
+                        <a:buNone/>
+                      </a:pPr>
+                      <a:r>
+                        <a:rPr lang="en-US" altLang="ko-KR" sz="900" u="none" strike="noStrike">
+                          <a:effectLst/>
+                          <a:latin typeface="D2Coding" panose="020B0609020101020101" pitchFamily="49" charset="-127"/>
+                          <a:ea typeface="D2Coding" panose="020B0609020101020101" pitchFamily="49" charset="-127"/>
+                        </a:rPr>
+                        <a:t>9</a:t>
+                      </a:r>
+                      <a:r>
+                        <a:rPr lang="ko-KR" altLang="en-US" sz="900" u="none" strike="noStrike">
+                          <a:effectLst/>
+                          <a:latin typeface="D2Coding" panose="020B0609020101020101" pitchFamily="49" charset="-127"/>
+                          <a:ea typeface="D2Coding" panose="020B0609020101020101" pitchFamily="49" charset="-127"/>
+                        </a:rPr>
+                        <a:t>월 </a:t>
+                      </a:r>
+                      <a:r>
+                        <a:rPr lang="en-US" altLang="ko-KR" sz="900" u="none" strike="noStrike">
+                          <a:effectLst/>
+                          <a:latin typeface="D2Coding" panose="020B0609020101020101" pitchFamily="49" charset="-127"/>
+                          <a:ea typeface="D2Coding" panose="020B0609020101020101" pitchFamily="49" charset="-127"/>
+                        </a:rPr>
+                        <a:t>3</a:t>
+                      </a:r>
+                      <a:r>
+                        <a:rPr lang="ko-KR" altLang="en-US" sz="900" u="none" strike="noStrike">
+                          <a:effectLst/>
+                          <a:latin typeface="D2Coding" panose="020B0609020101020101" pitchFamily="49" charset="-127"/>
+                          <a:ea typeface="D2Coding" panose="020B0609020101020101" pitchFamily="49" charset="-127"/>
+                        </a:rPr>
+                        <a:t>주차</a:t>
+                      </a:r>
+                      <a:endParaRPr lang="ko-KR" altLang="en-US" sz="900" b="0" i="0" u="none" strike="noStrike">
+                        <a:solidFill>
+                          <a:srgbClr val="000000"/>
+                        </a:solidFill>
+                        <a:effectLst/>
+                        <a:latin typeface="D2Coding" panose="020B0609020101020101" pitchFamily="49" charset="-127"/>
+                        <a:ea typeface="D2Coding" panose="020B0609020101020101" pitchFamily="49" charset="-127"/>
+                      </a:endParaRPr>
+                    </a:p>
+                  </a:txBody>
+                  <a:tcPr marL="6430" marR="6430" marT="6430" marB="0" anchor="ctr"/>
+                </a:tc>
+                <a:tc>
+                  <a:txBody>
+                    <a:bodyPr/>
+                    <a:lstStyle/>
+                    <a:p>
+                      <a:pPr algn="r" fontAlgn="ctr">
+                        <a:buNone/>
+                      </a:pPr>
+                      <a:r>
+                        <a:rPr lang="en-US" altLang="ko-KR" sz="900" u="none" strike="noStrike">
+                          <a:effectLst/>
+                          <a:latin typeface="D2Coding" panose="020B0609020101020101" pitchFamily="49" charset="-127"/>
+                          <a:ea typeface="D2Coding" panose="020B0609020101020101" pitchFamily="49" charset="-127"/>
+                        </a:rPr>
+                        <a:t>09</a:t>
+                      </a:r>
+                      <a:r>
+                        <a:rPr lang="ko-KR" altLang="en-US" sz="900" u="none" strike="noStrike">
+                          <a:effectLst/>
+                          <a:latin typeface="D2Coding" panose="020B0609020101020101" pitchFamily="49" charset="-127"/>
+                          <a:ea typeface="D2Coding" panose="020B0609020101020101" pitchFamily="49" charset="-127"/>
+                        </a:rPr>
+                        <a:t>월 </a:t>
+                      </a:r>
+                      <a:r>
+                        <a:rPr lang="en-US" altLang="ko-KR" sz="900" u="none" strike="noStrike">
+                          <a:effectLst/>
+                          <a:latin typeface="D2Coding" panose="020B0609020101020101" pitchFamily="49" charset="-127"/>
+                          <a:ea typeface="D2Coding" panose="020B0609020101020101" pitchFamily="49" charset="-127"/>
+                        </a:rPr>
+                        <a:t>13</a:t>
+                      </a:r>
+                      <a:r>
+                        <a:rPr lang="ko-KR" altLang="en-US" sz="900" u="none" strike="noStrike">
+                          <a:effectLst/>
+                          <a:latin typeface="D2Coding" panose="020B0609020101020101" pitchFamily="49" charset="-127"/>
+                          <a:ea typeface="D2Coding" panose="020B0609020101020101" pitchFamily="49" charset="-127"/>
+                        </a:rPr>
+                        <a:t>일</a:t>
+                      </a:r>
+                      <a:endParaRPr lang="ko-KR" altLang="en-US" sz="900" b="0" i="0" u="none" strike="noStrike">
+                        <a:solidFill>
+                          <a:srgbClr val="000000"/>
+                        </a:solidFill>
+                        <a:effectLst/>
+                        <a:latin typeface="D2Coding" panose="020B0609020101020101" pitchFamily="49" charset="-127"/>
+                        <a:ea typeface="D2Coding" panose="020B0609020101020101" pitchFamily="49" charset="-127"/>
+                      </a:endParaRPr>
+                    </a:p>
+                  </a:txBody>
+                  <a:tcPr marL="6430" marR="6430" marT="6430" marB="0" anchor="ctr"/>
+                </a:tc>
+                <a:tc>
+                  <a:txBody>
+                    <a:bodyPr/>
+                    <a:lstStyle/>
+                    <a:p>
+                      <a:pPr algn="r" fontAlgn="ctr">
+                        <a:buNone/>
+                      </a:pPr>
+                      <a:r>
+                        <a:rPr lang="en-US" altLang="ko-KR" sz="900" u="none" strike="noStrike">
+                          <a:effectLst/>
+                          <a:latin typeface="D2Coding" panose="020B0609020101020101" pitchFamily="49" charset="-127"/>
+                          <a:ea typeface="D2Coding" panose="020B0609020101020101" pitchFamily="49" charset="-127"/>
+                        </a:rPr>
+                        <a:t>21.50</a:t>
+                      </a:r>
+                      <a:endParaRPr lang="en-US" altLang="ko-KR" sz="900" b="0" i="0" u="none" strike="noStrike">
+                        <a:solidFill>
+                          <a:srgbClr val="000000"/>
+                        </a:solidFill>
+                        <a:effectLst/>
+                        <a:latin typeface="D2Coding" panose="020B0609020101020101" pitchFamily="49" charset="-127"/>
+                        <a:ea typeface="D2Coding" panose="020B0609020101020101" pitchFamily="49" charset="-127"/>
+                      </a:endParaRPr>
+                    </a:p>
+                  </a:txBody>
+                  <a:tcPr marL="6430" marR="6430" marT="6430" marB="0" anchor="ctr"/>
+                </a:tc>
+                <a:extLst>
+                  <a:ext uri="{0D108BD9-81ED-4DB2-BD59-A6C34878D82A}">
+                    <a16:rowId xmlns:a16="http://schemas.microsoft.com/office/drawing/2014/main" val="2987812900"/>
+                  </a:ext>
+                </a:extLst>
+              </a:tr>
+              <a:tr h="264730">
+                <a:tc>
+                  <a:txBody>
+                    <a:bodyPr/>
+                    <a:lstStyle/>
+                    <a:p>
+                      <a:pPr algn="l" fontAlgn="ctr">
+                        <a:buNone/>
+                      </a:pPr>
+                      <a:endParaRPr lang="ko-KR" altLang="en-US" sz="900" b="0" i="0" u="none" strike="noStrike">
+                        <a:solidFill>
+                          <a:srgbClr val="000000"/>
+                        </a:solidFill>
+                        <a:effectLst/>
+                        <a:latin typeface="D2Coding" panose="020B0609020101020101" pitchFamily="49" charset="-127"/>
+                        <a:ea typeface="D2Coding" panose="020B0609020101020101" pitchFamily="49" charset="-127"/>
+                      </a:endParaRPr>
+                    </a:p>
+                  </a:txBody>
+                  <a:tcPr marL="6430" marR="6430" marT="6430" marB="0" anchor="ctr"/>
+                </a:tc>
+                <a:tc>
+                  <a:txBody>
+                    <a:bodyPr/>
+                    <a:lstStyle/>
+                    <a:p>
+                      <a:pPr algn="r" fontAlgn="ctr">
+                        <a:buNone/>
+                      </a:pPr>
+                      <a:r>
+                        <a:rPr lang="en-US" altLang="ko-KR" sz="900" u="none" strike="noStrike">
+                          <a:effectLst/>
+                          <a:latin typeface="D2Coding" panose="020B0609020101020101" pitchFamily="49" charset="-127"/>
+                          <a:ea typeface="D2Coding" panose="020B0609020101020101" pitchFamily="49" charset="-127"/>
+                        </a:rPr>
+                        <a:t>09</a:t>
+                      </a:r>
+                      <a:r>
+                        <a:rPr lang="ko-KR" altLang="en-US" sz="900" u="none" strike="noStrike">
+                          <a:effectLst/>
+                          <a:latin typeface="D2Coding" panose="020B0609020101020101" pitchFamily="49" charset="-127"/>
+                          <a:ea typeface="D2Coding" panose="020B0609020101020101" pitchFamily="49" charset="-127"/>
+                        </a:rPr>
+                        <a:t>월 </a:t>
+                      </a:r>
+                      <a:r>
+                        <a:rPr lang="en-US" altLang="ko-KR" sz="900" u="none" strike="noStrike">
+                          <a:effectLst/>
+                          <a:latin typeface="D2Coding" panose="020B0609020101020101" pitchFamily="49" charset="-127"/>
+                          <a:ea typeface="D2Coding" panose="020B0609020101020101" pitchFamily="49" charset="-127"/>
+                        </a:rPr>
+                        <a:t>14</a:t>
+                      </a:r>
+                      <a:r>
+                        <a:rPr lang="ko-KR" altLang="en-US" sz="900" u="none" strike="noStrike">
+                          <a:effectLst/>
+                          <a:latin typeface="D2Coding" panose="020B0609020101020101" pitchFamily="49" charset="-127"/>
+                          <a:ea typeface="D2Coding" panose="020B0609020101020101" pitchFamily="49" charset="-127"/>
+                        </a:rPr>
+                        <a:t>일</a:t>
+                      </a:r>
+                      <a:endParaRPr lang="ko-KR" altLang="en-US" sz="900" b="0" i="0" u="none" strike="noStrike">
+                        <a:solidFill>
+                          <a:srgbClr val="000000"/>
+                        </a:solidFill>
+                        <a:effectLst/>
+                        <a:latin typeface="D2Coding" panose="020B0609020101020101" pitchFamily="49" charset="-127"/>
+                        <a:ea typeface="D2Coding" panose="020B0609020101020101" pitchFamily="49" charset="-127"/>
+                      </a:endParaRPr>
+                    </a:p>
+                  </a:txBody>
+                  <a:tcPr marL="6430" marR="6430" marT="6430" marB="0" anchor="ctr"/>
+                </a:tc>
+                <a:tc>
+                  <a:txBody>
+                    <a:bodyPr/>
+                    <a:lstStyle/>
+                    <a:p>
+                      <a:pPr algn="r" fontAlgn="ctr">
+                        <a:buNone/>
+                      </a:pPr>
+                      <a:r>
+                        <a:rPr lang="en-US" altLang="ko-KR" sz="900" u="none" strike="noStrike">
+                          <a:effectLst/>
+                          <a:latin typeface="D2Coding" panose="020B0609020101020101" pitchFamily="49" charset="-127"/>
+                          <a:ea typeface="D2Coding" panose="020B0609020101020101" pitchFamily="49" charset="-127"/>
+                        </a:rPr>
+                        <a:t>21.30</a:t>
+                      </a:r>
+                      <a:endParaRPr lang="en-US" altLang="ko-KR" sz="900" b="0" i="0" u="none" strike="noStrike">
+                        <a:solidFill>
+                          <a:srgbClr val="000000"/>
+                        </a:solidFill>
+                        <a:effectLst/>
+                        <a:latin typeface="D2Coding" panose="020B0609020101020101" pitchFamily="49" charset="-127"/>
+                        <a:ea typeface="D2Coding" panose="020B0609020101020101" pitchFamily="49" charset="-127"/>
+                      </a:endParaRPr>
+                    </a:p>
+                  </a:txBody>
+                  <a:tcPr marL="6430" marR="6430" marT="6430" marB="0" anchor="ctr"/>
+                </a:tc>
+                <a:extLst>
+                  <a:ext uri="{0D108BD9-81ED-4DB2-BD59-A6C34878D82A}">
+                    <a16:rowId xmlns:a16="http://schemas.microsoft.com/office/drawing/2014/main" val="4067937198"/>
+                  </a:ext>
+                </a:extLst>
+              </a:tr>
+              <a:tr h="264730">
+                <a:tc>
+                  <a:txBody>
+                    <a:bodyPr/>
+                    <a:lstStyle/>
+                    <a:p>
+                      <a:pPr algn="l" fontAlgn="ctr">
+                        <a:buNone/>
+                      </a:pPr>
+                      <a:endParaRPr lang="ko-KR" altLang="en-US" sz="900" b="0" i="0" u="none" strike="noStrike">
+                        <a:solidFill>
+                          <a:srgbClr val="000000"/>
+                        </a:solidFill>
+                        <a:effectLst/>
+                        <a:latin typeface="D2Coding" panose="020B0609020101020101" pitchFamily="49" charset="-127"/>
+                        <a:ea typeface="D2Coding" panose="020B0609020101020101" pitchFamily="49" charset="-127"/>
+                      </a:endParaRPr>
+                    </a:p>
+                  </a:txBody>
+                  <a:tcPr marL="6430" marR="6430" marT="6430" marB="0" anchor="ctr"/>
+                </a:tc>
+                <a:tc>
+                  <a:txBody>
+                    <a:bodyPr/>
+                    <a:lstStyle/>
+                    <a:p>
+                      <a:pPr algn="r" fontAlgn="ctr">
+                        <a:buNone/>
+                      </a:pPr>
+                      <a:r>
+                        <a:rPr lang="en-US" altLang="ko-KR" sz="900" u="none" strike="noStrike">
+                          <a:effectLst/>
+                          <a:latin typeface="D2Coding" panose="020B0609020101020101" pitchFamily="49" charset="-127"/>
+                          <a:ea typeface="D2Coding" panose="020B0609020101020101" pitchFamily="49" charset="-127"/>
+                        </a:rPr>
+                        <a:t>09</a:t>
+                      </a:r>
+                      <a:r>
+                        <a:rPr lang="ko-KR" altLang="en-US" sz="900" u="none" strike="noStrike">
+                          <a:effectLst/>
+                          <a:latin typeface="D2Coding" panose="020B0609020101020101" pitchFamily="49" charset="-127"/>
+                          <a:ea typeface="D2Coding" panose="020B0609020101020101" pitchFamily="49" charset="-127"/>
+                        </a:rPr>
+                        <a:t>월 </a:t>
+                      </a:r>
+                      <a:r>
+                        <a:rPr lang="en-US" altLang="ko-KR" sz="900" u="none" strike="noStrike">
+                          <a:effectLst/>
+                          <a:latin typeface="D2Coding" panose="020B0609020101020101" pitchFamily="49" charset="-127"/>
+                          <a:ea typeface="D2Coding" panose="020B0609020101020101" pitchFamily="49" charset="-127"/>
+                        </a:rPr>
+                        <a:t>15</a:t>
+                      </a:r>
+                      <a:r>
+                        <a:rPr lang="ko-KR" altLang="en-US" sz="900" u="none" strike="noStrike">
+                          <a:effectLst/>
+                          <a:latin typeface="D2Coding" panose="020B0609020101020101" pitchFamily="49" charset="-127"/>
+                          <a:ea typeface="D2Coding" panose="020B0609020101020101" pitchFamily="49" charset="-127"/>
+                        </a:rPr>
+                        <a:t>일</a:t>
+                      </a:r>
+                      <a:endParaRPr lang="ko-KR" altLang="en-US" sz="900" b="0" i="0" u="none" strike="noStrike">
+                        <a:solidFill>
+                          <a:srgbClr val="000000"/>
+                        </a:solidFill>
+                        <a:effectLst/>
+                        <a:latin typeface="D2Coding" panose="020B0609020101020101" pitchFamily="49" charset="-127"/>
+                        <a:ea typeface="D2Coding" panose="020B0609020101020101" pitchFamily="49" charset="-127"/>
+                      </a:endParaRPr>
+                    </a:p>
+                  </a:txBody>
+                  <a:tcPr marL="6430" marR="6430" marT="6430" marB="0" anchor="ctr"/>
+                </a:tc>
+                <a:tc>
+                  <a:txBody>
+                    <a:bodyPr/>
+                    <a:lstStyle/>
+                    <a:p>
+                      <a:pPr algn="r" fontAlgn="ctr">
+                        <a:buNone/>
+                      </a:pPr>
+                      <a:r>
+                        <a:rPr lang="en-US" altLang="ko-KR" sz="900" u="none" strike="noStrike">
+                          <a:effectLst/>
+                          <a:latin typeface="D2Coding" panose="020B0609020101020101" pitchFamily="49" charset="-127"/>
+                          <a:ea typeface="D2Coding" panose="020B0609020101020101" pitchFamily="49" charset="-127"/>
+                        </a:rPr>
+                        <a:t>23.00</a:t>
+                      </a:r>
+                      <a:endParaRPr lang="en-US" altLang="ko-KR" sz="900" b="0" i="0" u="none" strike="noStrike">
+                        <a:solidFill>
+                          <a:srgbClr val="000000"/>
+                        </a:solidFill>
+                        <a:effectLst/>
+                        <a:latin typeface="D2Coding" panose="020B0609020101020101" pitchFamily="49" charset="-127"/>
+                        <a:ea typeface="D2Coding" panose="020B0609020101020101" pitchFamily="49" charset="-127"/>
+                      </a:endParaRPr>
+                    </a:p>
+                  </a:txBody>
+                  <a:tcPr marL="6430" marR="6430" marT="6430" marB="0" anchor="ctr"/>
+                </a:tc>
+                <a:extLst>
+                  <a:ext uri="{0D108BD9-81ED-4DB2-BD59-A6C34878D82A}">
+                    <a16:rowId xmlns:a16="http://schemas.microsoft.com/office/drawing/2014/main" val="1509080169"/>
+                  </a:ext>
+                </a:extLst>
+              </a:tr>
+              <a:tr h="264730">
+                <a:tc>
+                  <a:txBody>
+                    <a:bodyPr/>
+                    <a:lstStyle/>
+                    <a:p>
+                      <a:pPr algn="l" fontAlgn="ctr">
+                        <a:buNone/>
+                      </a:pPr>
+                      <a:endParaRPr lang="ko-KR" altLang="en-US" sz="900" b="0" i="0" u="none" strike="noStrike">
+                        <a:solidFill>
+                          <a:srgbClr val="000000"/>
+                        </a:solidFill>
+                        <a:effectLst/>
+                        <a:latin typeface="D2Coding" panose="020B0609020101020101" pitchFamily="49" charset="-127"/>
+                        <a:ea typeface="D2Coding" panose="020B0609020101020101" pitchFamily="49" charset="-127"/>
+                      </a:endParaRPr>
+                    </a:p>
+                  </a:txBody>
+                  <a:tcPr marL="6430" marR="6430" marT="6430" marB="0" anchor="ctr"/>
+                </a:tc>
+                <a:tc>
+                  <a:txBody>
+                    <a:bodyPr/>
+                    <a:lstStyle/>
+                    <a:p>
+                      <a:pPr algn="r" fontAlgn="ctr">
+                        <a:buNone/>
+                      </a:pPr>
+                      <a:r>
+                        <a:rPr lang="en-US" altLang="ko-KR" sz="900" u="none" strike="noStrike">
+                          <a:effectLst/>
+                          <a:latin typeface="D2Coding" panose="020B0609020101020101" pitchFamily="49" charset="-127"/>
+                          <a:ea typeface="D2Coding" panose="020B0609020101020101" pitchFamily="49" charset="-127"/>
+                        </a:rPr>
+                        <a:t>09</a:t>
+                      </a:r>
+                      <a:r>
+                        <a:rPr lang="ko-KR" altLang="en-US" sz="900" u="none" strike="noStrike">
+                          <a:effectLst/>
+                          <a:latin typeface="D2Coding" panose="020B0609020101020101" pitchFamily="49" charset="-127"/>
+                          <a:ea typeface="D2Coding" panose="020B0609020101020101" pitchFamily="49" charset="-127"/>
+                        </a:rPr>
+                        <a:t>월 </a:t>
+                      </a:r>
+                      <a:r>
+                        <a:rPr lang="en-US" altLang="ko-KR" sz="900" u="none" strike="noStrike">
+                          <a:effectLst/>
+                          <a:latin typeface="D2Coding" panose="020B0609020101020101" pitchFamily="49" charset="-127"/>
+                          <a:ea typeface="D2Coding" panose="020B0609020101020101" pitchFamily="49" charset="-127"/>
+                        </a:rPr>
+                        <a:t>16</a:t>
+                      </a:r>
+                      <a:r>
+                        <a:rPr lang="ko-KR" altLang="en-US" sz="900" u="none" strike="noStrike">
+                          <a:effectLst/>
+                          <a:latin typeface="D2Coding" panose="020B0609020101020101" pitchFamily="49" charset="-127"/>
+                          <a:ea typeface="D2Coding" panose="020B0609020101020101" pitchFamily="49" charset="-127"/>
+                        </a:rPr>
+                        <a:t>일</a:t>
+                      </a:r>
+                      <a:endParaRPr lang="ko-KR" altLang="en-US" sz="900" b="0" i="0" u="none" strike="noStrike">
+                        <a:solidFill>
+                          <a:srgbClr val="000000"/>
+                        </a:solidFill>
+                        <a:effectLst/>
+                        <a:latin typeface="D2Coding" panose="020B0609020101020101" pitchFamily="49" charset="-127"/>
+                        <a:ea typeface="D2Coding" panose="020B0609020101020101" pitchFamily="49" charset="-127"/>
+                      </a:endParaRPr>
+                    </a:p>
+                  </a:txBody>
+                  <a:tcPr marL="6430" marR="6430" marT="6430" marB="0" anchor="ctr"/>
+                </a:tc>
+                <a:tc>
+                  <a:txBody>
+                    <a:bodyPr/>
+                    <a:lstStyle/>
+                    <a:p>
+                      <a:pPr algn="r" fontAlgn="ctr">
+                        <a:buNone/>
+                      </a:pPr>
+                      <a:r>
+                        <a:rPr lang="en-US" altLang="ko-KR" sz="900" u="none" strike="noStrike">
+                          <a:effectLst/>
+                          <a:latin typeface="D2Coding" panose="020B0609020101020101" pitchFamily="49" charset="-127"/>
+                          <a:ea typeface="D2Coding" panose="020B0609020101020101" pitchFamily="49" charset="-127"/>
+                        </a:rPr>
+                        <a:t>22.50</a:t>
+                      </a:r>
+                      <a:endParaRPr lang="en-US" altLang="ko-KR" sz="900" b="0" i="0" u="none" strike="noStrike">
+                        <a:solidFill>
+                          <a:srgbClr val="000000"/>
+                        </a:solidFill>
+                        <a:effectLst/>
+                        <a:latin typeface="D2Coding" panose="020B0609020101020101" pitchFamily="49" charset="-127"/>
+                        <a:ea typeface="D2Coding" panose="020B0609020101020101" pitchFamily="49" charset="-127"/>
+                      </a:endParaRPr>
+                    </a:p>
+                  </a:txBody>
+                  <a:tcPr marL="6430" marR="6430" marT="6430" marB="0" anchor="ctr"/>
+                </a:tc>
+                <a:extLst>
+                  <a:ext uri="{0D108BD9-81ED-4DB2-BD59-A6C34878D82A}">
+                    <a16:rowId xmlns:a16="http://schemas.microsoft.com/office/drawing/2014/main" val="4225276208"/>
+                  </a:ext>
+                </a:extLst>
+              </a:tr>
+              <a:tr h="264730">
+                <a:tc>
+                  <a:txBody>
+                    <a:bodyPr/>
+                    <a:lstStyle/>
+                    <a:p>
+                      <a:pPr algn="l" fontAlgn="ctr">
+                        <a:buNone/>
+                      </a:pPr>
+                      <a:endParaRPr lang="ko-KR" altLang="en-US" sz="900" b="0" i="0" u="none" strike="noStrike">
+                        <a:solidFill>
+                          <a:srgbClr val="000000"/>
+                        </a:solidFill>
+                        <a:effectLst/>
+                        <a:latin typeface="D2Coding" panose="020B0609020101020101" pitchFamily="49" charset="-127"/>
+                        <a:ea typeface="D2Coding" panose="020B0609020101020101" pitchFamily="49" charset="-127"/>
+                      </a:endParaRPr>
+                    </a:p>
+                  </a:txBody>
+                  <a:tcPr marL="6430" marR="6430" marT="6430" marB="0" anchor="ctr"/>
+                </a:tc>
+                <a:tc>
+                  <a:txBody>
+                    <a:bodyPr/>
+                    <a:lstStyle/>
+                    <a:p>
+                      <a:pPr algn="r" fontAlgn="ctr">
+                        <a:buNone/>
+                      </a:pPr>
+                      <a:r>
+                        <a:rPr lang="en-US" altLang="ko-KR" sz="900" u="none" strike="noStrike">
+                          <a:effectLst/>
+                          <a:latin typeface="D2Coding" panose="020B0609020101020101" pitchFamily="49" charset="-127"/>
+                          <a:ea typeface="D2Coding" panose="020B0609020101020101" pitchFamily="49" charset="-127"/>
+                        </a:rPr>
+                        <a:t>09</a:t>
+                      </a:r>
+                      <a:r>
+                        <a:rPr lang="ko-KR" altLang="en-US" sz="900" u="none" strike="noStrike">
+                          <a:effectLst/>
+                          <a:latin typeface="D2Coding" panose="020B0609020101020101" pitchFamily="49" charset="-127"/>
+                          <a:ea typeface="D2Coding" panose="020B0609020101020101" pitchFamily="49" charset="-127"/>
+                        </a:rPr>
+                        <a:t>월 </a:t>
+                      </a:r>
+                      <a:r>
+                        <a:rPr lang="en-US" altLang="ko-KR" sz="900" u="none" strike="noStrike">
+                          <a:effectLst/>
+                          <a:latin typeface="D2Coding" panose="020B0609020101020101" pitchFamily="49" charset="-127"/>
+                          <a:ea typeface="D2Coding" panose="020B0609020101020101" pitchFamily="49" charset="-127"/>
+                        </a:rPr>
+                        <a:t>17</a:t>
+                      </a:r>
+                      <a:r>
+                        <a:rPr lang="ko-KR" altLang="en-US" sz="900" u="none" strike="noStrike">
+                          <a:effectLst/>
+                          <a:latin typeface="D2Coding" panose="020B0609020101020101" pitchFamily="49" charset="-127"/>
+                          <a:ea typeface="D2Coding" panose="020B0609020101020101" pitchFamily="49" charset="-127"/>
+                        </a:rPr>
+                        <a:t>일</a:t>
+                      </a:r>
+                      <a:endParaRPr lang="ko-KR" altLang="en-US" sz="900" b="0" i="0" u="none" strike="noStrike">
+                        <a:solidFill>
+                          <a:srgbClr val="000000"/>
+                        </a:solidFill>
+                        <a:effectLst/>
+                        <a:latin typeface="D2Coding" panose="020B0609020101020101" pitchFamily="49" charset="-127"/>
+                        <a:ea typeface="D2Coding" panose="020B0609020101020101" pitchFamily="49" charset="-127"/>
+                      </a:endParaRPr>
+                    </a:p>
+                  </a:txBody>
+                  <a:tcPr marL="6430" marR="6430" marT="6430" marB="0" anchor="ctr"/>
+                </a:tc>
+                <a:tc>
+                  <a:txBody>
+                    <a:bodyPr/>
+                    <a:lstStyle/>
+                    <a:p>
+                      <a:pPr algn="r" fontAlgn="ctr">
+                        <a:buNone/>
+                      </a:pPr>
+                      <a:r>
+                        <a:rPr lang="en-US" altLang="ko-KR" sz="900" u="none" strike="noStrike">
+                          <a:effectLst/>
+                          <a:latin typeface="D2Coding" panose="020B0609020101020101" pitchFamily="49" charset="-127"/>
+                          <a:ea typeface="D2Coding" panose="020B0609020101020101" pitchFamily="49" charset="-127"/>
+                        </a:rPr>
+                        <a:t>21.30</a:t>
+                      </a:r>
+                      <a:endParaRPr lang="en-US" altLang="ko-KR" sz="900" b="0" i="0" u="none" strike="noStrike">
+                        <a:solidFill>
+                          <a:srgbClr val="000000"/>
+                        </a:solidFill>
+                        <a:effectLst/>
+                        <a:latin typeface="D2Coding" panose="020B0609020101020101" pitchFamily="49" charset="-127"/>
+                        <a:ea typeface="D2Coding" panose="020B0609020101020101" pitchFamily="49" charset="-127"/>
+                      </a:endParaRPr>
+                    </a:p>
+                  </a:txBody>
+                  <a:tcPr marL="6430" marR="6430" marT="6430" marB="0" anchor="ctr"/>
+                </a:tc>
+                <a:extLst>
+                  <a:ext uri="{0D108BD9-81ED-4DB2-BD59-A6C34878D82A}">
+                    <a16:rowId xmlns:a16="http://schemas.microsoft.com/office/drawing/2014/main" val="1924689109"/>
+                  </a:ext>
+                </a:extLst>
+              </a:tr>
+              <a:tr h="264730">
+                <a:tc>
+                  <a:txBody>
+                    <a:bodyPr/>
+                    <a:lstStyle/>
+                    <a:p>
+                      <a:pPr algn="l" fontAlgn="ctr">
+                        <a:buNone/>
+                      </a:pPr>
+                      <a:endParaRPr lang="ko-KR" altLang="en-US" sz="900" b="0" i="0" u="none" strike="noStrike">
+                        <a:solidFill>
+                          <a:srgbClr val="000000"/>
+                        </a:solidFill>
+                        <a:effectLst/>
+                        <a:latin typeface="D2Coding" panose="020B0609020101020101" pitchFamily="49" charset="-127"/>
+                        <a:ea typeface="D2Coding" panose="020B0609020101020101" pitchFamily="49" charset="-127"/>
+                      </a:endParaRPr>
+                    </a:p>
+                  </a:txBody>
+                  <a:tcPr marL="6430" marR="6430" marT="6430" marB="0" anchor="ctr"/>
+                </a:tc>
+                <a:tc>
+                  <a:txBody>
+                    <a:bodyPr/>
+                    <a:lstStyle/>
+                    <a:p>
+                      <a:pPr algn="r" fontAlgn="ctr">
+                        <a:buNone/>
+                      </a:pPr>
+                      <a:r>
+                        <a:rPr lang="en-US" altLang="ko-KR" sz="900" u="none" strike="noStrike">
+                          <a:effectLst/>
+                          <a:latin typeface="D2Coding" panose="020B0609020101020101" pitchFamily="49" charset="-127"/>
+                          <a:ea typeface="D2Coding" panose="020B0609020101020101" pitchFamily="49" charset="-127"/>
+                        </a:rPr>
+                        <a:t>09</a:t>
+                      </a:r>
+                      <a:r>
+                        <a:rPr lang="ko-KR" altLang="en-US" sz="900" u="none" strike="noStrike">
+                          <a:effectLst/>
+                          <a:latin typeface="D2Coding" panose="020B0609020101020101" pitchFamily="49" charset="-127"/>
+                          <a:ea typeface="D2Coding" panose="020B0609020101020101" pitchFamily="49" charset="-127"/>
+                        </a:rPr>
+                        <a:t>월 </a:t>
+                      </a:r>
+                      <a:r>
+                        <a:rPr lang="en-US" altLang="ko-KR" sz="900" u="none" strike="noStrike">
+                          <a:effectLst/>
+                          <a:latin typeface="D2Coding" panose="020B0609020101020101" pitchFamily="49" charset="-127"/>
+                          <a:ea typeface="D2Coding" panose="020B0609020101020101" pitchFamily="49" charset="-127"/>
+                        </a:rPr>
+                        <a:t>18</a:t>
+                      </a:r>
+                      <a:r>
+                        <a:rPr lang="ko-KR" altLang="en-US" sz="900" u="none" strike="noStrike">
+                          <a:effectLst/>
+                          <a:latin typeface="D2Coding" panose="020B0609020101020101" pitchFamily="49" charset="-127"/>
+                          <a:ea typeface="D2Coding" panose="020B0609020101020101" pitchFamily="49" charset="-127"/>
+                        </a:rPr>
+                        <a:t>일</a:t>
+                      </a:r>
+                      <a:endParaRPr lang="ko-KR" altLang="en-US" sz="900" b="0" i="0" u="none" strike="noStrike">
+                        <a:solidFill>
+                          <a:srgbClr val="000000"/>
+                        </a:solidFill>
+                        <a:effectLst/>
+                        <a:latin typeface="D2Coding" panose="020B0609020101020101" pitchFamily="49" charset="-127"/>
+                        <a:ea typeface="D2Coding" panose="020B0609020101020101" pitchFamily="49" charset="-127"/>
+                      </a:endParaRPr>
+                    </a:p>
+                  </a:txBody>
+                  <a:tcPr marL="6430" marR="6430" marT="6430" marB="0" anchor="ctr"/>
+                </a:tc>
+                <a:tc>
+                  <a:txBody>
+                    <a:bodyPr/>
+                    <a:lstStyle/>
+                    <a:p>
+                      <a:pPr algn="r" fontAlgn="ctr">
+                        <a:buNone/>
+                      </a:pPr>
+                      <a:r>
+                        <a:rPr lang="en-US" altLang="ko-KR" sz="900" u="none" strike="noStrike">
+                          <a:effectLst/>
+                          <a:latin typeface="D2Coding" panose="020B0609020101020101" pitchFamily="49" charset="-127"/>
+                          <a:ea typeface="D2Coding" panose="020B0609020101020101" pitchFamily="49" charset="-127"/>
+                        </a:rPr>
+                        <a:t>21.50</a:t>
+                      </a:r>
+                      <a:endParaRPr lang="en-US" altLang="ko-KR" sz="900" b="0" i="0" u="none" strike="noStrike">
+                        <a:solidFill>
+                          <a:srgbClr val="000000"/>
+                        </a:solidFill>
+                        <a:effectLst/>
+                        <a:latin typeface="D2Coding" panose="020B0609020101020101" pitchFamily="49" charset="-127"/>
+                        <a:ea typeface="D2Coding" panose="020B0609020101020101" pitchFamily="49" charset="-127"/>
+                      </a:endParaRPr>
+                    </a:p>
+                  </a:txBody>
+                  <a:tcPr marL="6430" marR="6430" marT="6430" marB="0" anchor="ctr"/>
+                </a:tc>
+                <a:extLst>
+                  <a:ext uri="{0D108BD9-81ED-4DB2-BD59-A6C34878D82A}">
+                    <a16:rowId xmlns:a16="http://schemas.microsoft.com/office/drawing/2014/main" val="1050048509"/>
+                  </a:ext>
+                </a:extLst>
+              </a:tr>
+              <a:tr h="264730">
+                <a:tc>
+                  <a:txBody>
+                    <a:bodyPr/>
+                    <a:lstStyle/>
+                    <a:p>
+                      <a:pPr algn="l" fontAlgn="ctr">
+                        <a:buNone/>
+                      </a:pPr>
+                      <a:r>
+                        <a:rPr lang="ko-KR" altLang="en-US" sz="900" u="none" strike="noStrike">
+                          <a:effectLst/>
+                          <a:latin typeface="D2Coding" panose="020B0609020101020101" pitchFamily="49" charset="-127"/>
+                          <a:ea typeface="D2Coding" panose="020B0609020101020101" pitchFamily="49" charset="-127"/>
+                        </a:rPr>
+                        <a:t>　</a:t>
+                      </a:r>
+                      <a:endParaRPr lang="ko-KR" altLang="en-US" sz="900" b="0" i="0" u="none" strike="noStrike">
+                        <a:solidFill>
+                          <a:srgbClr val="000000"/>
+                        </a:solidFill>
+                        <a:effectLst/>
+                        <a:latin typeface="D2Coding" panose="020B0609020101020101" pitchFamily="49" charset="-127"/>
+                        <a:ea typeface="D2Coding" panose="020B0609020101020101" pitchFamily="49" charset="-127"/>
+                      </a:endParaRPr>
+                    </a:p>
+                  </a:txBody>
+                  <a:tcPr marL="6430" marR="6430" marT="6430" marB="0" anchor="ctr"/>
+                </a:tc>
+                <a:tc>
+                  <a:txBody>
+                    <a:bodyPr/>
+                    <a:lstStyle/>
+                    <a:p>
+                      <a:pPr algn="r" fontAlgn="ctr">
+                        <a:buNone/>
+                      </a:pPr>
+                      <a:r>
+                        <a:rPr lang="en-US" altLang="ko-KR" sz="900" u="none" strike="noStrike">
+                          <a:effectLst/>
+                          <a:latin typeface="D2Coding" panose="020B0609020101020101" pitchFamily="49" charset="-127"/>
+                          <a:ea typeface="D2Coding" panose="020B0609020101020101" pitchFamily="49" charset="-127"/>
+                        </a:rPr>
+                        <a:t>09</a:t>
+                      </a:r>
+                      <a:r>
+                        <a:rPr lang="ko-KR" altLang="en-US" sz="900" u="none" strike="noStrike">
+                          <a:effectLst/>
+                          <a:latin typeface="D2Coding" panose="020B0609020101020101" pitchFamily="49" charset="-127"/>
+                          <a:ea typeface="D2Coding" panose="020B0609020101020101" pitchFamily="49" charset="-127"/>
+                        </a:rPr>
+                        <a:t>월 </a:t>
+                      </a:r>
+                      <a:r>
+                        <a:rPr lang="en-US" altLang="ko-KR" sz="900" u="none" strike="noStrike">
+                          <a:effectLst/>
+                          <a:latin typeface="D2Coding" panose="020B0609020101020101" pitchFamily="49" charset="-127"/>
+                          <a:ea typeface="D2Coding" panose="020B0609020101020101" pitchFamily="49" charset="-127"/>
+                        </a:rPr>
+                        <a:t>19</a:t>
+                      </a:r>
+                      <a:r>
+                        <a:rPr lang="ko-KR" altLang="en-US" sz="900" u="none" strike="noStrike">
+                          <a:effectLst/>
+                          <a:latin typeface="D2Coding" panose="020B0609020101020101" pitchFamily="49" charset="-127"/>
+                          <a:ea typeface="D2Coding" panose="020B0609020101020101" pitchFamily="49" charset="-127"/>
+                        </a:rPr>
+                        <a:t>일</a:t>
+                      </a:r>
+                      <a:endParaRPr lang="ko-KR" altLang="en-US" sz="900" b="0" i="0" u="none" strike="noStrike">
+                        <a:solidFill>
+                          <a:srgbClr val="000000"/>
+                        </a:solidFill>
+                        <a:effectLst/>
+                        <a:latin typeface="D2Coding" panose="020B0609020101020101" pitchFamily="49" charset="-127"/>
+                        <a:ea typeface="D2Coding" panose="020B0609020101020101" pitchFamily="49" charset="-127"/>
+                      </a:endParaRPr>
+                    </a:p>
+                  </a:txBody>
+                  <a:tcPr marL="6430" marR="6430" marT="6430" marB="0" anchor="ctr"/>
+                </a:tc>
+                <a:tc>
+                  <a:txBody>
+                    <a:bodyPr/>
+                    <a:lstStyle/>
+                    <a:p>
+                      <a:pPr algn="r" fontAlgn="ctr">
+                        <a:buNone/>
+                      </a:pPr>
+                      <a:r>
+                        <a:rPr lang="en-US" altLang="ko-KR" sz="900" u="none" strike="noStrike">
+                          <a:effectLst/>
+                          <a:latin typeface="D2Coding" panose="020B0609020101020101" pitchFamily="49" charset="-127"/>
+                          <a:ea typeface="D2Coding" panose="020B0609020101020101" pitchFamily="49" charset="-127"/>
+                        </a:rPr>
+                        <a:t>21.20</a:t>
+                      </a:r>
+                      <a:endParaRPr lang="en-US" altLang="ko-KR" sz="900" b="0" i="0" u="none" strike="noStrike">
+                        <a:solidFill>
+                          <a:srgbClr val="000000"/>
+                        </a:solidFill>
+                        <a:effectLst/>
+                        <a:latin typeface="D2Coding" panose="020B0609020101020101" pitchFamily="49" charset="-127"/>
+                        <a:ea typeface="D2Coding" panose="020B0609020101020101" pitchFamily="49" charset="-127"/>
+                      </a:endParaRPr>
+                    </a:p>
+                  </a:txBody>
+                  <a:tcPr marL="6430" marR="6430" marT="6430" marB="0" anchor="ctr"/>
+                </a:tc>
+                <a:extLst>
+                  <a:ext uri="{0D108BD9-81ED-4DB2-BD59-A6C34878D82A}">
+                    <a16:rowId xmlns:a16="http://schemas.microsoft.com/office/drawing/2014/main" val="629261681"/>
+                  </a:ext>
+                </a:extLst>
+              </a:tr>
+              <a:tr h="264730">
+                <a:tc>
+                  <a:txBody>
+                    <a:bodyPr/>
+                    <a:lstStyle/>
+                    <a:p>
+                      <a:pPr algn="l" fontAlgn="ctr">
+                        <a:buNone/>
+                      </a:pPr>
+                      <a:r>
+                        <a:rPr lang="en-US" altLang="ko-KR" sz="900" u="none" strike="noStrike">
+                          <a:effectLst/>
+                          <a:latin typeface="D2Coding" panose="020B0609020101020101" pitchFamily="49" charset="-127"/>
+                          <a:ea typeface="D2Coding" panose="020B0609020101020101" pitchFamily="49" charset="-127"/>
+                        </a:rPr>
+                        <a:t>9</a:t>
+                      </a:r>
+                      <a:r>
+                        <a:rPr lang="ko-KR" altLang="en-US" sz="900" u="none" strike="noStrike">
+                          <a:effectLst/>
+                          <a:latin typeface="D2Coding" panose="020B0609020101020101" pitchFamily="49" charset="-127"/>
+                          <a:ea typeface="D2Coding" panose="020B0609020101020101" pitchFamily="49" charset="-127"/>
+                        </a:rPr>
+                        <a:t>월 </a:t>
+                      </a:r>
+                      <a:r>
+                        <a:rPr lang="en-US" altLang="ko-KR" sz="900" u="none" strike="noStrike">
+                          <a:effectLst/>
+                          <a:latin typeface="D2Coding" panose="020B0609020101020101" pitchFamily="49" charset="-127"/>
+                          <a:ea typeface="D2Coding" panose="020B0609020101020101" pitchFamily="49" charset="-127"/>
+                        </a:rPr>
+                        <a:t>4</a:t>
+                      </a:r>
+                      <a:r>
+                        <a:rPr lang="ko-KR" altLang="en-US" sz="900" u="none" strike="noStrike">
+                          <a:effectLst/>
+                          <a:latin typeface="D2Coding" panose="020B0609020101020101" pitchFamily="49" charset="-127"/>
+                          <a:ea typeface="D2Coding" panose="020B0609020101020101" pitchFamily="49" charset="-127"/>
+                        </a:rPr>
+                        <a:t>주차</a:t>
+                      </a:r>
+                      <a:endParaRPr lang="ko-KR" altLang="en-US" sz="900" b="0" i="0" u="none" strike="noStrike">
+                        <a:solidFill>
+                          <a:srgbClr val="000000"/>
+                        </a:solidFill>
+                        <a:effectLst/>
+                        <a:latin typeface="D2Coding" panose="020B0609020101020101" pitchFamily="49" charset="-127"/>
+                        <a:ea typeface="D2Coding" panose="020B0609020101020101" pitchFamily="49" charset="-127"/>
+                      </a:endParaRPr>
+                    </a:p>
+                  </a:txBody>
+                  <a:tcPr marL="6430" marR="6430" marT="6430" marB="0" anchor="ctr"/>
+                </a:tc>
+                <a:tc>
+                  <a:txBody>
+                    <a:bodyPr/>
+                    <a:lstStyle/>
+                    <a:p>
+                      <a:pPr algn="r" fontAlgn="ctr">
+                        <a:buNone/>
+                      </a:pPr>
+                      <a:r>
+                        <a:rPr lang="en-US" altLang="ko-KR" sz="900" u="none" strike="noStrike">
+                          <a:effectLst/>
+                          <a:latin typeface="D2Coding" panose="020B0609020101020101" pitchFamily="49" charset="-127"/>
+                          <a:ea typeface="D2Coding" panose="020B0609020101020101" pitchFamily="49" charset="-127"/>
+                        </a:rPr>
+                        <a:t>09</a:t>
+                      </a:r>
+                      <a:r>
+                        <a:rPr lang="ko-KR" altLang="en-US" sz="900" u="none" strike="noStrike">
+                          <a:effectLst/>
+                          <a:latin typeface="D2Coding" panose="020B0609020101020101" pitchFamily="49" charset="-127"/>
+                          <a:ea typeface="D2Coding" panose="020B0609020101020101" pitchFamily="49" charset="-127"/>
+                        </a:rPr>
+                        <a:t>월 </a:t>
+                      </a:r>
+                      <a:r>
+                        <a:rPr lang="en-US" altLang="ko-KR" sz="900" u="none" strike="noStrike">
+                          <a:effectLst/>
+                          <a:latin typeface="D2Coding" panose="020B0609020101020101" pitchFamily="49" charset="-127"/>
+                          <a:ea typeface="D2Coding" panose="020B0609020101020101" pitchFamily="49" charset="-127"/>
+                        </a:rPr>
+                        <a:t>20</a:t>
+                      </a:r>
+                      <a:r>
+                        <a:rPr lang="ko-KR" altLang="en-US" sz="900" u="none" strike="noStrike">
+                          <a:effectLst/>
+                          <a:latin typeface="D2Coding" panose="020B0609020101020101" pitchFamily="49" charset="-127"/>
+                          <a:ea typeface="D2Coding" panose="020B0609020101020101" pitchFamily="49" charset="-127"/>
+                        </a:rPr>
+                        <a:t>일</a:t>
+                      </a:r>
+                      <a:endParaRPr lang="ko-KR" altLang="en-US" sz="900" b="0" i="0" u="none" strike="noStrike">
+                        <a:solidFill>
+                          <a:srgbClr val="000000"/>
+                        </a:solidFill>
+                        <a:effectLst/>
+                        <a:latin typeface="D2Coding" panose="020B0609020101020101" pitchFamily="49" charset="-127"/>
+                        <a:ea typeface="D2Coding" panose="020B0609020101020101" pitchFamily="49" charset="-127"/>
+                      </a:endParaRPr>
+                    </a:p>
+                  </a:txBody>
+                  <a:tcPr marL="6430" marR="6430" marT="6430" marB="0" anchor="ctr"/>
+                </a:tc>
+                <a:tc>
+                  <a:txBody>
+                    <a:bodyPr/>
+                    <a:lstStyle/>
+                    <a:p>
+                      <a:pPr algn="r" fontAlgn="ctr">
+                        <a:buNone/>
+                      </a:pPr>
+                      <a:r>
+                        <a:rPr lang="en-US" altLang="ko-KR" sz="900" u="none" strike="noStrike">
+                          <a:effectLst/>
+                          <a:latin typeface="D2Coding" panose="020B0609020101020101" pitchFamily="49" charset="-127"/>
+                          <a:ea typeface="D2Coding" panose="020B0609020101020101" pitchFamily="49" charset="-127"/>
+                        </a:rPr>
+                        <a:t>19.70</a:t>
+                      </a:r>
+                      <a:endParaRPr lang="en-US" altLang="ko-KR" sz="900" b="0" i="0" u="none" strike="noStrike">
+                        <a:solidFill>
+                          <a:srgbClr val="000000"/>
+                        </a:solidFill>
+                        <a:effectLst/>
+                        <a:latin typeface="D2Coding" panose="020B0609020101020101" pitchFamily="49" charset="-127"/>
+                        <a:ea typeface="D2Coding" panose="020B0609020101020101" pitchFamily="49" charset="-127"/>
+                      </a:endParaRPr>
+                    </a:p>
+                  </a:txBody>
+                  <a:tcPr marL="6430" marR="6430" marT="6430" marB="0" anchor="ctr"/>
+                </a:tc>
+                <a:extLst>
+                  <a:ext uri="{0D108BD9-81ED-4DB2-BD59-A6C34878D82A}">
+                    <a16:rowId xmlns:a16="http://schemas.microsoft.com/office/drawing/2014/main" val="3940415727"/>
+                  </a:ext>
+                </a:extLst>
+              </a:tr>
+              <a:tr h="264730">
+                <a:tc>
+                  <a:txBody>
+                    <a:bodyPr/>
+                    <a:lstStyle/>
+                    <a:p>
+                      <a:pPr algn="l" fontAlgn="ctr">
+                        <a:buNone/>
+                      </a:pPr>
+                      <a:endParaRPr lang="ko-KR" altLang="en-US" sz="900" b="0" i="0" u="none" strike="noStrike">
+                        <a:solidFill>
+                          <a:srgbClr val="000000"/>
+                        </a:solidFill>
+                        <a:effectLst/>
+                        <a:latin typeface="D2Coding" panose="020B0609020101020101" pitchFamily="49" charset="-127"/>
+                        <a:ea typeface="D2Coding" panose="020B0609020101020101" pitchFamily="49" charset="-127"/>
+                      </a:endParaRPr>
+                    </a:p>
+                  </a:txBody>
+                  <a:tcPr marL="6430" marR="6430" marT="6430" marB="0" anchor="ctr"/>
+                </a:tc>
+                <a:tc>
+                  <a:txBody>
+                    <a:bodyPr/>
+                    <a:lstStyle/>
+                    <a:p>
+                      <a:pPr algn="r" fontAlgn="ctr">
+                        <a:buNone/>
+                      </a:pPr>
+                      <a:r>
+                        <a:rPr lang="en-US" altLang="ko-KR" sz="900" u="none" strike="noStrike">
+                          <a:effectLst/>
+                          <a:latin typeface="D2Coding" panose="020B0609020101020101" pitchFamily="49" charset="-127"/>
+                          <a:ea typeface="D2Coding" panose="020B0609020101020101" pitchFamily="49" charset="-127"/>
+                        </a:rPr>
+                        <a:t>09</a:t>
+                      </a:r>
+                      <a:r>
+                        <a:rPr lang="ko-KR" altLang="en-US" sz="900" u="none" strike="noStrike">
+                          <a:effectLst/>
+                          <a:latin typeface="D2Coding" panose="020B0609020101020101" pitchFamily="49" charset="-127"/>
+                          <a:ea typeface="D2Coding" panose="020B0609020101020101" pitchFamily="49" charset="-127"/>
+                        </a:rPr>
+                        <a:t>월 </a:t>
+                      </a:r>
+                      <a:r>
+                        <a:rPr lang="en-US" altLang="ko-KR" sz="900" u="none" strike="noStrike">
+                          <a:effectLst/>
+                          <a:latin typeface="D2Coding" panose="020B0609020101020101" pitchFamily="49" charset="-127"/>
+                          <a:ea typeface="D2Coding" panose="020B0609020101020101" pitchFamily="49" charset="-127"/>
+                        </a:rPr>
+                        <a:t>21</a:t>
+                      </a:r>
+                      <a:r>
+                        <a:rPr lang="ko-KR" altLang="en-US" sz="900" u="none" strike="noStrike">
+                          <a:effectLst/>
+                          <a:latin typeface="D2Coding" panose="020B0609020101020101" pitchFamily="49" charset="-127"/>
+                          <a:ea typeface="D2Coding" panose="020B0609020101020101" pitchFamily="49" charset="-127"/>
+                        </a:rPr>
+                        <a:t>일</a:t>
+                      </a:r>
+                      <a:endParaRPr lang="ko-KR" altLang="en-US" sz="900" b="0" i="0" u="none" strike="noStrike">
+                        <a:solidFill>
+                          <a:srgbClr val="000000"/>
+                        </a:solidFill>
+                        <a:effectLst/>
+                        <a:latin typeface="D2Coding" panose="020B0609020101020101" pitchFamily="49" charset="-127"/>
+                        <a:ea typeface="D2Coding" panose="020B0609020101020101" pitchFamily="49" charset="-127"/>
+                      </a:endParaRPr>
+                    </a:p>
+                  </a:txBody>
+                  <a:tcPr marL="6430" marR="6430" marT="6430" marB="0" anchor="ctr"/>
+                </a:tc>
+                <a:tc>
+                  <a:txBody>
+                    <a:bodyPr/>
+                    <a:lstStyle/>
+                    <a:p>
+                      <a:pPr algn="r" fontAlgn="ctr">
+                        <a:buNone/>
+                      </a:pPr>
+                      <a:r>
+                        <a:rPr lang="en-US" altLang="ko-KR" sz="900" u="none" strike="noStrike">
+                          <a:effectLst/>
+                          <a:latin typeface="D2Coding" panose="020B0609020101020101" pitchFamily="49" charset="-127"/>
+                          <a:ea typeface="D2Coding" panose="020B0609020101020101" pitchFamily="49" charset="-127"/>
+                        </a:rPr>
+                        <a:t>19.10</a:t>
+                      </a:r>
+                      <a:endParaRPr lang="en-US" altLang="ko-KR" sz="900" b="0" i="0" u="none" strike="noStrike">
+                        <a:solidFill>
+                          <a:srgbClr val="000000"/>
+                        </a:solidFill>
+                        <a:effectLst/>
+                        <a:latin typeface="D2Coding" panose="020B0609020101020101" pitchFamily="49" charset="-127"/>
+                        <a:ea typeface="D2Coding" panose="020B0609020101020101" pitchFamily="49" charset="-127"/>
+                      </a:endParaRPr>
+                    </a:p>
+                  </a:txBody>
+                  <a:tcPr marL="6430" marR="6430" marT="6430" marB="0" anchor="ctr"/>
+                </a:tc>
+                <a:extLst>
+                  <a:ext uri="{0D108BD9-81ED-4DB2-BD59-A6C34878D82A}">
+                    <a16:rowId xmlns:a16="http://schemas.microsoft.com/office/drawing/2014/main" val="3371060323"/>
+                  </a:ext>
+                </a:extLst>
+              </a:tr>
+              <a:tr h="264730">
+                <a:tc>
+                  <a:txBody>
+                    <a:bodyPr/>
+                    <a:lstStyle/>
+                    <a:p>
+                      <a:pPr algn="l" fontAlgn="ctr">
+                        <a:buNone/>
+                      </a:pPr>
+                      <a:endParaRPr lang="ko-KR" altLang="en-US" sz="900" b="0" i="0" u="none" strike="noStrike">
+                        <a:solidFill>
+                          <a:srgbClr val="000000"/>
+                        </a:solidFill>
+                        <a:effectLst/>
+                        <a:latin typeface="D2Coding" panose="020B0609020101020101" pitchFamily="49" charset="-127"/>
+                        <a:ea typeface="D2Coding" panose="020B0609020101020101" pitchFamily="49" charset="-127"/>
+                      </a:endParaRPr>
+                    </a:p>
+                  </a:txBody>
+                  <a:tcPr marL="6430" marR="6430" marT="6430" marB="0" anchor="ctr"/>
+                </a:tc>
+                <a:tc>
+                  <a:txBody>
+                    <a:bodyPr/>
+                    <a:lstStyle/>
+                    <a:p>
+                      <a:pPr algn="r" fontAlgn="ctr">
+                        <a:buNone/>
+                      </a:pPr>
+                      <a:r>
+                        <a:rPr lang="en-US" altLang="ko-KR" sz="900" u="none" strike="noStrike">
+                          <a:effectLst/>
+                          <a:latin typeface="D2Coding" panose="020B0609020101020101" pitchFamily="49" charset="-127"/>
+                          <a:ea typeface="D2Coding" panose="020B0609020101020101" pitchFamily="49" charset="-127"/>
+                        </a:rPr>
+                        <a:t>09</a:t>
+                      </a:r>
+                      <a:r>
+                        <a:rPr lang="ko-KR" altLang="en-US" sz="900" u="none" strike="noStrike">
+                          <a:effectLst/>
+                          <a:latin typeface="D2Coding" panose="020B0609020101020101" pitchFamily="49" charset="-127"/>
+                          <a:ea typeface="D2Coding" panose="020B0609020101020101" pitchFamily="49" charset="-127"/>
+                        </a:rPr>
+                        <a:t>월 </a:t>
+                      </a:r>
+                      <a:r>
+                        <a:rPr lang="en-US" altLang="ko-KR" sz="900" u="none" strike="noStrike">
+                          <a:effectLst/>
+                          <a:latin typeface="D2Coding" panose="020B0609020101020101" pitchFamily="49" charset="-127"/>
+                          <a:ea typeface="D2Coding" panose="020B0609020101020101" pitchFamily="49" charset="-127"/>
+                        </a:rPr>
+                        <a:t>22</a:t>
+                      </a:r>
+                      <a:r>
+                        <a:rPr lang="ko-KR" altLang="en-US" sz="900" u="none" strike="noStrike">
+                          <a:effectLst/>
+                          <a:latin typeface="D2Coding" panose="020B0609020101020101" pitchFamily="49" charset="-127"/>
+                          <a:ea typeface="D2Coding" panose="020B0609020101020101" pitchFamily="49" charset="-127"/>
+                        </a:rPr>
+                        <a:t>일</a:t>
+                      </a:r>
+                      <a:endParaRPr lang="ko-KR" altLang="en-US" sz="900" b="0" i="0" u="none" strike="noStrike">
+                        <a:solidFill>
+                          <a:srgbClr val="000000"/>
+                        </a:solidFill>
+                        <a:effectLst/>
+                        <a:latin typeface="D2Coding" panose="020B0609020101020101" pitchFamily="49" charset="-127"/>
+                        <a:ea typeface="D2Coding" panose="020B0609020101020101" pitchFamily="49" charset="-127"/>
+                      </a:endParaRPr>
+                    </a:p>
+                  </a:txBody>
+                  <a:tcPr marL="6430" marR="6430" marT="6430" marB="0" anchor="ctr"/>
+                </a:tc>
+                <a:tc>
+                  <a:txBody>
+                    <a:bodyPr/>
+                    <a:lstStyle/>
+                    <a:p>
+                      <a:pPr algn="r" fontAlgn="ctr">
+                        <a:buNone/>
+                      </a:pPr>
+                      <a:r>
+                        <a:rPr lang="en-US" altLang="ko-KR" sz="900" u="none" strike="noStrike">
+                          <a:effectLst/>
+                          <a:latin typeface="D2Coding" panose="020B0609020101020101" pitchFamily="49" charset="-127"/>
+                          <a:ea typeface="D2Coding" panose="020B0609020101020101" pitchFamily="49" charset="-127"/>
+                        </a:rPr>
+                        <a:t>20.20</a:t>
+                      </a:r>
+                      <a:endParaRPr lang="en-US" altLang="ko-KR" sz="900" b="0" i="0" u="none" strike="noStrike">
+                        <a:solidFill>
+                          <a:srgbClr val="000000"/>
+                        </a:solidFill>
+                        <a:effectLst/>
+                        <a:latin typeface="D2Coding" panose="020B0609020101020101" pitchFamily="49" charset="-127"/>
+                        <a:ea typeface="D2Coding" panose="020B0609020101020101" pitchFamily="49" charset="-127"/>
+                      </a:endParaRPr>
+                    </a:p>
+                  </a:txBody>
+                  <a:tcPr marL="6430" marR="6430" marT="6430" marB="0" anchor="ctr"/>
+                </a:tc>
+                <a:extLst>
+                  <a:ext uri="{0D108BD9-81ED-4DB2-BD59-A6C34878D82A}">
+                    <a16:rowId xmlns:a16="http://schemas.microsoft.com/office/drawing/2014/main" val="4247940745"/>
+                  </a:ext>
+                </a:extLst>
+              </a:tr>
+              <a:tr h="264730">
+                <a:tc>
+                  <a:txBody>
+                    <a:bodyPr/>
+                    <a:lstStyle/>
+                    <a:p>
+                      <a:pPr algn="l" fontAlgn="ctr">
+                        <a:buNone/>
+                      </a:pPr>
+                      <a:endParaRPr lang="ko-KR" altLang="en-US" sz="900" b="0" i="0" u="none" strike="noStrike">
+                        <a:solidFill>
+                          <a:srgbClr val="000000"/>
+                        </a:solidFill>
+                        <a:effectLst/>
+                        <a:latin typeface="D2Coding" panose="020B0609020101020101" pitchFamily="49" charset="-127"/>
+                        <a:ea typeface="D2Coding" panose="020B0609020101020101" pitchFamily="49" charset="-127"/>
+                      </a:endParaRPr>
+                    </a:p>
+                  </a:txBody>
+                  <a:tcPr marL="6430" marR="6430" marT="6430" marB="0" anchor="ctr"/>
+                </a:tc>
+                <a:tc>
+                  <a:txBody>
+                    <a:bodyPr/>
+                    <a:lstStyle/>
+                    <a:p>
+                      <a:pPr algn="r" fontAlgn="ctr">
+                        <a:buNone/>
+                      </a:pPr>
+                      <a:r>
+                        <a:rPr lang="en-US" altLang="ko-KR" sz="900" u="none" strike="noStrike">
+                          <a:effectLst/>
+                          <a:latin typeface="D2Coding" panose="020B0609020101020101" pitchFamily="49" charset="-127"/>
+                          <a:ea typeface="D2Coding" panose="020B0609020101020101" pitchFamily="49" charset="-127"/>
+                        </a:rPr>
+                        <a:t>09</a:t>
+                      </a:r>
+                      <a:r>
+                        <a:rPr lang="ko-KR" altLang="en-US" sz="900" u="none" strike="noStrike">
+                          <a:effectLst/>
+                          <a:latin typeface="D2Coding" panose="020B0609020101020101" pitchFamily="49" charset="-127"/>
+                          <a:ea typeface="D2Coding" panose="020B0609020101020101" pitchFamily="49" charset="-127"/>
+                        </a:rPr>
+                        <a:t>월 </a:t>
+                      </a:r>
+                      <a:r>
+                        <a:rPr lang="en-US" altLang="ko-KR" sz="900" u="none" strike="noStrike">
+                          <a:effectLst/>
+                          <a:latin typeface="D2Coding" panose="020B0609020101020101" pitchFamily="49" charset="-127"/>
+                          <a:ea typeface="D2Coding" panose="020B0609020101020101" pitchFamily="49" charset="-127"/>
+                        </a:rPr>
+                        <a:t>23</a:t>
+                      </a:r>
+                      <a:r>
+                        <a:rPr lang="ko-KR" altLang="en-US" sz="900" u="none" strike="noStrike">
+                          <a:effectLst/>
+                          <a:latin typeface="D2Coding" panose="020B0609020101020101" pitchFamily="49" charset="-127"/>
+                          <a:ea typeface="D2Coding" panose="020B0609020101020101" pitchFamily="49" charset="-127"/>
+                        </a:rPr>
+                        <a:t>일</a:t>
+                      </a:r>
+                      <a:endParaRPr lang="ko-KR" altLang="en-US" sz="900" b="0" i="0" u="none" strike="noStrike">
+                        <a:solidFill>
+                          <a:srgbClr val="000000"/>
+                        </a:solidFill>
+                        <a:effectLst/>
+                        <a:latin typeface="D2Coding" panose="020B0609020101020101" pitchFamily="49" charset="-127"/>
+                        <a:ea typeface="D2Coding" panose="020B0609020101020101" pitchFamily="49" charset="-127"/>
+                      </a:endParaRPr>
+                    </a:p>
+                  </a:txBody>
+                  <a:tcPr marL="6430" marR="6430" marT="6430" marB="0" anchor="ctr"/>
+                </a:tc>
+                <a:tc>
+                  <a:txBody>
+                    <a:bodyPr/>
+                    <a:lstStyle/>
+                    <a:p>
+                      <a:pPr algn="r" fontAlgn="ctr">
+                        <a:buNone/>
+                      </a:pPr>
+                      <a:r>
+                        <a:rPr lang="en-US" altLang="ko-KR" sz="900" u="none" strike="noStrike">
+                          <a:effectLst/>
+                          <a:latin typeface="D2Coding" panose="020B0609020101020101" pitchFamily="49" charset="-127"/>
+                          <a:ea typeface="D2Coding" panose="020B0609020101020101" pitchFamily="49" charset="-127"/>
+                        </a:rPr>
+                        <a:t>19.20</a:t>
+                      </a:r>
+                      <a:endParaRPr lang="en-US" altLang="ko-KR" sz="900" b="0" i="0" u="none" strike="noStrike">
+                        <a:solidFill>
+                          <a:srgbClr val="000000"/>
+                        </a:solidFill>
+                        <a:effectLst/>
+                        <a:latin typeface="D2Coding" panose="020B0609020101020101" pitchFamily="49" charset="-127"/>
+                        <a:ea typeface="D2Coding" panose="020B0609020101020101" pitchFamily="49" charset="-127"/>
+                      </a:endParaRPr>
+                    </a:p>
+                  </a:txBody>
+                  <a:tcPr marL="6430" marR="6430" marT="6430" marB="0" anchor="ctr"/>
+                </a:tc>
+                <a:extLst>
+                  <a:ext uri="{0D108BD9-81ED-4DB2-BD59-A6C34878D82A}">
+                    <a16:rowId xmlns:a16="http://schemas.microsoft.com/office/drawing/2014/main" val="381380880"/>
+                  </a:ext>
+                </a:extLst>
+              </a:tr>
+              <a:tr h="264730">
+                <a:tc>
+                  <a:txBody>
+                    <a:bodyPr/>
+                    <a:lstStyle/>
+                    <a:p>
+                      <a:pPr algn="l" fontAlgn="ctr">
+                        <a:buNone/>
+                      </a:pPr>
+                      <a:endParaRPr lang="ko-KR" altLang="en-US" sz="900" b="0" i="0" u="none" strike="noStrike">
+                        <a:solidFill>
+                          <a:srgbClr val="000000"/>
+                        </a:solidFill>
+                        <a:effectLst/>
+                        <a:latin typeface="D2Coding" panose="020B0609020101020101" pitchFamily="49" charset="-127"/>
+                        <a:ea typeface="D2Coding" panose="020B0609020101020101" pitchFamily="49" charset="-127"/>
+                      </a:endParaRPr>
+                    </a:p>
+                  </a:txBody>
+                  <a:tcPr marL="6430" marR="6430" marT="6430" marB="0" anchor="ctr"/>
+                </a:tc>
+                <a:tc>
+                  <a:txBody>
+                    <a:bodyPr/>
+                    <a:lstStyle/>
+                    <a:p>
+                      <a:pPr algn="r" fontAlgn="ctr">
+                        <a:buNone/>
+                      </a:pPr>
+                      <a:r>
+                        <a:rPr lang="en-US" altLang="ko-KR" sz="900" u="none" strike="noStrike">
+                          <a:effectLst/>
+                          <a:latin typeface="D2Coding" panose="020B0609020101020101" pitchFamily="49" charset="-127"/>
+                          <a:ea typeface="D2Coding" panose="020B0609020101020101" pitchFamily="49" charset="-127"/>
+                        </a:rPr>
+                        <a:t>09</a:t>
+                      </a:r>
+                      <a:r>
+                        <a:rPr lang="ko-KR" altLang="en-US" sz="900" u="none" strike="noStrike">
+                          <a:effectLst/>
+                          <a:latin typeface="D2Coding" panose="020B0609020101020101" pitchFamily="49" charset="-127"/>
+                          <a:ea typeface="D2Coding" panose="020B0609020101020101" pitchFamily="49" charset="-127"/>
+                        </a:rPr>
+                        <a:t>월 </a:t>
+                      </a:r>
+                      <a:r>
+                        <a:rPr lang="en-US" altLang="ko-KR" sz="900" u="none" strike="noStrike">
+                          <a:effectLst/>
+                          <a:latin typeface="D2Coding" panose="020B0609020101020101" pitchFamily="49" charset="-127"/>
+                          <a:ea typeface="D2Coding" panose="020B0609020101020101" pitchFamily="49" charset="-127"/>
+                        </a:rPr>
+                        <a:t>24</a:t>
+                      </a:r>
+                      <a:r>
+                        <a:rPr lang="ko-KR" altLang="en-US" sz="900" u="none" strike="noStrike">
+                          <a:effectLst/>
+                          <a:latin typeface="D2Coding" panose="020B0609020101020101" pitchFamily="49" charset="-127"/>
+                          <a:ea typeface="D2Coding" panose="020B0609020101020101" pitchFamily="49" charset="-127"/>
+                        </a:rPr>
+                        <a:t>일</a:t>
+                      </a:r>
+                      <a:endParaRPr lang="ko-KR" altLang="en-US" sz="900" b="0" i="0" u="none" strike="noStrike">
+                        <a:solidFill>
+                          <a:srgbClr val="000000"/>
+                        </a:solidFill>
+                        <a:effectLst/>
+                        <a:latin typeface="D2Coding" panose="020B0609020101020101" pitchFamily="49" charset="-127"/>
+                        <a:ea typeface="D2Coding" panose="020B0609020101020101" pitchFamily="49" charset="-127"/>
+                      </a:endParaRPr>
+                    </a:p>
+                  </a:txBody>
+                  <a:tcPr marL="6430" marR="6430" marT="6430" marB="0" anchor="ctr"/>
+                </a:tc>
+                <a:tc>
+                  <a:txBody>
+                    <a:bodyPr/>
+                    <a:lstStyle/>
+                    <a:p>
+                      <a:pPr algn="r" fontAlgn="ctr">
+                        <a:buNone/>
+                      </a:pPr>
+                      <a:r>
+                        <a:rPr lang="en-US" altLang="ko-KR" sz="900" u="none" strike="noStrike">
+                          <a:effectLst/>
+                          <a:latin typeface="D2Coding" panose="020B0609020101020101" pitchFamily="49" charset="-127"/>
+                          <a:ea typeface="D2Coding" panose="020B0609020101020101" pitchFamily="49" charset="-127"/>
+                        </a:rPr>
+                        <a:t>20.60</a:t>
+                      </a:r>
+                      <a:endParaRPr lang="en-US" altLang="ko-KR" sz="900" b="0" i="0" u="none" strike="noStrike">
+                        <a:solidFill>
+                          <a:srgbClr val="000000"/>
+                        </a:solidFill>
+                        <a:effectLst/>
+                        <a:latin typeface="D2Coding" panose="020B0609020101020101" pitchFamily="49" charset="-127"/>
+                        <a:ea typeface="D2Coding" panose="020B0609020101020101" pitchFamily="49" charset="-127"/>
+                      </a:endParaRPr>
+                    </a:p>
+                  </a:txBody>
+                  <a:tcPr marL="6430" marR="6430" marT="6430" marB="0" anchor="ctr"/>
+                </a:tc>
+                <a:extLst>
+                  <a:ext uri="{0D108BD9-81ED-4DB2-BD59-A6C34878D82A}">
+                    <a16:rowId xmlns:a16="http://schemas.microsoft.com/office/drawing/2014/main" val="4231695106"/>
+                  </a:ext>
+                </a:extLst>
+              </a:tr>
+              <a:tr h="264730">
+                <a:tc>
+                  <a:txBody>
+                    <a:bodyPr/>
+                    <a:lstStyle/>
+                    <a:p>
+                      <a:pPr algn="l" fontAlgn="ctr">
+                        <a:buNone/>
+                      </a:pPr>
+                      <a:endParaRPr lang="ko-KR" altLang="en-US" sz="900" b="0" i="0" u="none" strike="noStrike">
+                        <a:solidFill>
+                          <a:srgbClr val="000000"/>
+                        </a:solidFill>
+                        <a:effectLst/>
+                        <a:latin typeface="D2Coding" panose="020B0609020101020101" pitchFamily="49" charset="-127"/>
+                        <a:ea typeface="D2Coding" panose="020B0609020101020101" pitchFamily="49" charset="-127"/>
+                      </a:endParaRPr>
+                    </a:p>
+                  </a:txBody>
+                  <a:tcPr marL="6430" marR="6430" marT="6430" marB="0" anchor="ctr"/>
+                </a:tc>
+                <a:tc>
+                  <a:txBody>
+                    <a:bodyPr/>
+                    <a:lstStyle/>
+                    <a:p>
+                      <a:pPr algn="r" fontAlgn="ctr">
+                        <a:buNone/>
+                      </a:pPr>
+                      <a:r>
+                        <a:rPr lang="en-US" altLang="ko-KR" sz="900" u="none" strike="noStrike">
+                          <a:effectLst/>
+                          <a:latin typeface="D2Coding" panose="020B0609020101020101" pitchFamily="49" charset="-127"/>
+                          <a:ea typeface="D2Coding" panose="020B0609020101020101" pitchFamily="49" charset="-127"/>
+                        </a:rPr>
+                        <a:t>09</a:t>
+                      </a:r>
+                      <a:r>
+                        <a:rPr lang="ko-KR" altLang="en-US" sz="900" u="none" strike="noStrike">
+                          <a:effectLst/>
+                          <a:latin typeface="D2Coding" panose="020B0609020101020101" pitchFamily="49" charset="-127"/>
+                          <a:ea typeface="D2Coding" panose="020B0609020101020101" pitchFamily="49" charset="-127"/>
+                        </a:rPr>
+                        <a:t>월 </a:t>
+                      </a:r>
+                      <a:r>
+                        <a:rPr lang="en-US" altLang="ko-KR" sz="900" u="none" strike="noStrike">
+                          <a:effectLst/>
+                          <a:latin typeface="D2Coding" panose="020B0609020101020101" pitchFamily="49" charset="-127"/>
+                          <a:ea typeface="D2Coding" panose="020B0609020101020101" pitchFamily="49" charset="-127"/>
+                        </a:rPr>
+                        <a:t>25</a:t>
+                      </a:r>
+                      <a:r>
+                        <a:rPr lang="ko-KR" altLang="en-US" sz="900" u="none" strike="noStrike">
+                          <a:effectLst/>
+                          <a:latin typeface="D2Coding" panose="020B0609020101020101" pitchFamily="49" charset="-127"/>
+                          <a:ea typeface="D2Coding" panose="020B0609020101020101" pitchFamily="49" charset="-127"/>
+                        </a:rPr>
+                        <a:t>일</a:t>
+                      </a:r>
+                      <a:endParaRPr lang="ko-KR" altLang="en-US" sz="900" b="0" i="0" u="none" strike="noStrike">
+                        <a:solidFill>
+                          <a:srgbClr val="000000"/>
+                        </a:solidFill>
+                        <a:effectLst/>
+                        <a:latin typeface="D2Coding" panose="020B0609020101020101" pitchFamily="49" charset="-127"/>
+                        <a:ea typeface="D2Coding" panose="020B0609020101020101" pitchFamily="49" charset="-127"/>
+                      </a:endParaRPr>
+                    </a:p>
+                  </a:txBody>
+                  <a:tcPr marL="6430" marR="6430" marT="6430" marB="0" anchor="ctr"/>
+                </a:tc>
+                <a:tc>
+                  <a:txBody>
+                    <a:bodyPr/>
+                    <a:lstStyle/>
+                    <a:p>
+                      <a:pPr algn="r" fontAlgn="ctr">
+                        <a:buNone/>
+                      </a:pPr>
+                      <a:r>
+                        <a:rPr lang="en-US" altLang="ko-KR" sz="900" u="none" strike="noStrike">
+                          <a:effectLst/>
+                          <a:latin typeface="D2Coding" panose="020B0609020101020101" pitchFamily="49" charset="-127"/>
+                          <a:ea typeface="D2Coding" panose="020B0609020101020101" pitchFamily="49" charset="-127"/>
+                        </a:rPr>
+                        <a:t>20.10</a:t>
+                      </a:r>
+                      <a:endParaRPr lang="en-US" altLang="ko-KR" sz="900" b="0" i="0" u="none" strike="noStrike">
+                        <a:solidFill>
+                          <a:srgbClr val="000000"/>
+                        </a:solidFill>
+                        <a:effectLst/>
+                        <a:latin typeface="D2Coding" panose="020B0609020101020101" pitchFamily="49" charset="-127"/>
+                        <a:ea typeface="D2Coding" panose="020B0609020101020101" pitchFamily="49" charset="-127"/>
+                      </a:endParaRPr>
+                    </a:p>
+                  </a:txBody>
+                  <a:tcPr marL="6430" marR="6430" marT="6430" marB="0" anchor="ctr"/>
+                </a:tc>
+                <a:extLst>
+                  <a:ext uri="{0D108BD9-81ED-4DB2-BD59-A6C34878D82A}">
+                    <a16:rowId xmlns:a16="http://schemas.microsoft.com/office/drawing/2014/main" val="2161971217"/>
+                  </a:ext>
+                </a:extLst>
+              </a:tr>
+              <a:tr h="264730">
+                <a:tc>
+                  <a:txBody>
+                    <a:bodyPr/>
+                    <a:lstStyle/>
+                    <a:p>
+                      <a:pPr algn="l" fontAlgn="ctr">
+                        <a:buNone/>
+                      </a:pPr>
+                      <a:r>
+                        <a:rPr lang="ko-KR" altLang="en-US" sz="900" u="none" strike="noStrike">
+                          <a:effectLst/>
+                          <a:latin typeface="D2Coding" panose="020B0609020101020101" pitchFamily="49" charset="-127"/>
+                          <a:ea typeface="D2Coding" panose="020B0609020101020101" pitchFamily="49" charset="-127"/>
+                        </a:rPr>
+                        <a:t>　</a:t>
+                      </a:r>
+                      <a:endParaRPr lang="ko-KR" altLang="en-US" sz="900" b="0" i="0" u="none" strike="noStrike">
+                        <a:solidFill>
+                          <a:srgbClr val="000000"/>
+                        </a:solidFill>
+                        <a:effectLst/>
+                        <a:latin typeface="D2Coding" panose="020B0609020101020101" pitchFamily="49" charset="-127"/>
+                        <a:ea typeface="D2Coding" panose="020B0609020101020101" pitchFamily="49" charset="-127"/>
+                      </a:endParaRPr>
+                    </a:p>
+                  </a:txBody>
+                  <a:tcPr marL="6430" marR="6430" marT="6430" marB="0" anchor="ctr"/>
+                </a:tc>
+                <a:tc>
+                  <a:txBody>
+                    <a:bodyPr/>
+                    <a:lstStyle/>
+                    <a:p>
+                      <a:pPr algn="r" fontAlgn="ctr">
+                        <a:buNone/>
+                      </a:pPr>
+                      <a:r>
+                        <a:rPr lang="en-US" altLang="ko-KR" sz="900" u="none" strike="noStrike">
+                          <a:effectLst/>
+                          <a:latin typeface="D2Coding" panose="020B0609020101020101" pitchFamily="49" charset="-127"/>
+                          <a:ea typeface="D2Coding" panose="020B0609020101020101" pitchFamily="49" charset="-127"/>
+                        </a:rPr>
+                        <a:t>09</a:t>
+                      </a:r>
+                      <a:r>
+                        <a:rPr lang="ko-KR" altLang="en-US" sz="900" u="none" strike="noStrike">
+                          <a:effectLst/>
+                          <a:latin typeface="D2Coding" panose="020B0609020101020101" pitchFamily="49" charset="-127"/>
+                          <a:ea typeface="D2Coding" panose="020B0609020101020101" pitchFamily="49" charset="-127"/>
+                        </a:rPr>
+                        <a:t>월 </a:t>
+                      </a:r>
+                      <a:r>
+                        <a:rPr lang="en-US" altLang="ko-KR" sz="900" u="none" strike="noStrike">
+                          <a:effectLst/>
+                          <a:latin typeface="D2Coding" panose="020B0609020101020101" pitchFamily="49" charset="-127"/>
+                          <a:ea typeface="D2Coding" panose="020B0609020101020101" pitchFamily="49" charset="-127"/>
+                        </a:rPr>
+                        <a:t>26</a:t>
+                      </a:r>
+                      <a:r>
+                        <a:rPr lang="ko-KR" altLang="en-US" sz="900" u="none" strike="noStrike">
+                          <a:effectLst/>
+                          <a:latin typeface="D2Coding" panose="020B0609020101020101" pitchFamily="49" charset="-127"/>
+                          <a:ea typeface="D2Coding" panose="020B0609020101020101" pitchFamily="49" charset="-127"/>
+                        </a:rPr>
+                        <a:t>일</a:t>
+                      </a:r>
+                      <a:endParaRPr lang="ko-KR" altLang="en-US" sz="900" b="0" i="0" u="none" strike="noStrike">
+                        <a:solidFill>
+                          <a:srgbClr val="000000"/>
+                        </a:solidFill>
+                        <a:effectLst/>
+                        <a:latin typeface="D2Coding" panose="020B0609020101020101" pitchFamily="49" charset="-127"/>
+                        <a:ea typeface="D2Coding" panose="020B0609020101020101" pitchFamily="49" charset="-127"/>
+                      </a:endParaRPr>
+                    </a:p>
+                  </a:txBody>
+                  <a:tcPr marL="6430" marR="6430" marT="6430" marB="0" anchor="ctr"/>
+                </a:tc>
+                <a:tc>
+                  <a:txBody>
+                    <a:bodyPr/>
+                    <a:lstStyle/>
+                    <a:p>
+                      <a:pPr algn="r" fontAlgn="ctr">
+                        <a:buNone/>
+                      </a:pPr>
+                      <a:r>
+                        <a:rPr lang="en-US" altLang="ko-KR" sz="900" u="none" strike="noStrike" dirty="0">
+                          <a:effectLst/>
+                          <a:latin typeface="D2Coding" panose="020B0609020101020101" pitchFamily="49" charset="-127"/>
+                          <a:ea typeface="D2Coding" panose="020B0609020101020101" pitchFamily="49" charset="-127"/>
+                        </a:rPr>
+                        <a:t>19.20</a:t>
+                      </a:r>
+                      <a:endParaRPr lang="en-US" altLang="ko-KR" sz="900" b="0" i="0" u="none" strike="noStrike" dirty="0">
+                        <a:solidFill>
+                          <a:srgbClr val="000000"/>
+                        </a:solidFill>
+                        <a:effectLst/>
+                        <a:latin typeface="D2Coding" panose="020B0609020101020101" pitchFamily="49" charset="-127"/>
+                        <a:ea typeface="D2Coding" panose="020B0609020101020101" pitchFamily="49" charset="-127"/>
+                      </a:endParaRPr>
+                    </a:p>
+                  </a:txBody>
+                  <a:tcPr marL="6430" marR="6430" marT="6430" marB="0" anchor="ctr"/>
+                </a:tc>
+                <a:extLst>
+                  <a:ext uri="{0D108BD9-81ED-4DB2-BD59-A6C34878D82A}">
+                    <a16:rowId xmlns:a16="http://schemas.microsoft.com/office/drawing/2014/main" val="1058583137"/>
+                  </a:ext>
+                </a:extLst>
+              </a:tr>
+            </a:tbl>
+          </a:graphicData>
+        </a:graphic>
+      </p:graphicFrame>
+      <p:sp>
+        <p:nvSpPr>
+          <p:cNvPr id="6" name="TextBox 5">
+            <a:extLst>
+              <a:ext uri="{FF2B5EF4-FFF2-40B4-BE49-F238E27FC236}">
+                <a16:creationId xmlns:a16="http://schemas.microsoft.com/office/drawing/2014/main" id="{E1682B08-CD59-3A1E-9AE1-1640A4F3ECFB}"/>
+              </a:ext>
+            </a:extLst>
+          </p:cNvPr>
+          <p:cNvSpPr txBox="1"/>
+          <p:nvPr/>
+        </p:nvSpPr>
+        <p:spPr>
+          <a:xfrm>
+            <a:off x="609600" y="1238250"/>
+            <a:ext cx="10972800" cy="880819"/>
+          </a:xfrm>
+          <a:prstGeom prst="rect">
+            <a:avLst/>
+          </a:prstGeom>
+          <a:noFill/>
+        </p:spPr>
+        <p:txBody>
+          <a:bodyPr wrap="square" rtlCol="0">
+            <a:spAutoFit/>
+          </a:bodyPr>
+          <a:lstStyle/>
+          <a:p>
+            <a:pPr>
+              <a:lnSpc>
+                <a:spcPct val="150000"/>
+              </a:lnSpc>
+            </a:pPr>
+            <a:r>
+              <a:rPr lang="ko-KR" altLang="en-US" dirty="0">
+                <a:latin typeface="D2Coding" panose="020B0609020101020101" pitchFamily="49" charset="-127"/>
+                <a:ea typeface="D2Coding" panose="020B0609020101020101" pitchFamily="49" charset="-127"/>
+              </a:rPr>
+              <a:t>일자별로 </a:t>
+            </a:r>
+            <a:r>
+              <a:rPr lang="en-US" altLang="ko-KR" dirty="0">
+                <a:latin typeface="D2Coding" panose="020B0609020101020101" pitchFamily="49" charset="-127"/>
+                <a:ea typeface="D2Coding" panose="020B0609020101020101" pitchFamily="49" charset="-127"/>
+              </a:rPr>
+              <a:t>1</a:t>
+            </a:r>
+            <a:r>
+              <a:rPr lang="ko-KR" altLang="en-US" dirty="0">
+                <a:latin typeface="D2Coding" panose="020B0609020101020101" pitchFamily="49" charset="-127"/>
+                <a:ea typeface="D2Coding" panose="020B0609020101020101" pitchFamily="49" charset="-127"/>
+              </a:rPr>
+              <a:t>년치 주가가 아래와 같이 있을 때 어떤 식으로 예측이 가능한지</a:t>
+            </a:r>
+            <a:r>
+              <a:rPr lang="en-US" altLang="ko-KR" dirty="0">
+                <a:latin typeface="D2Coding" panose="020B0609020101020101" pitchFamily="49" charset="-127"/>
+                <a:ea typeface="D2Coding" panose="020B0609020101020101" pitchFamily="49" charset="-127"/>
+              </a:rPr>
+              <a:t>? </a:t>
+            </a:r>
+            <a:r>
+              <a:rPr lang="ko-KR" altLang="en-US" dirty="0">
+                <a:latin typeface="D2Coding" panose="020B0609020101020101" pitchFamily="49" charset="-127"/>
+                <a:ea typeface="D2Coding" panose="020B0609020101020101" pitchFamily="49" charset="-127"/>
+              </a:rPr>
+              <a:t>기존</a:t>
+            </a:r>
+            <a:r>
+              <a:rPr lang="en-US" altLang="ko-KR" dirty="0">
+                <a:latin typeface="D2Coding" panose="020B0609020101020101" pitchFamily="49" charset="-127"/>
+                <a:ea typeface="D2Coding" panose="020B0609020101020101" pitchFamily="49" charset="-127"/>
+              </a:rPr>
+              <a:t> ANN </a:t>
+            </a:r>
+            <a:r>
+              <a:rPr lang="ko-KR" altLang="en-US" dirty="0">
+                <a:latin typeface="D2Coding" panose="020B0609020101020101" pitchFamily="49" charset="-127"/>
+                <a:ea typeface="D2Coding" panose="020B0609020101020101" pitchFamily="49" charset="-127"/>
+              </a:rPr>
+              <a:t>모델의 한계는 무엇이고</a:t>
+            </a:r>
+            <a:r>
+              <a:rPr lang="en-US" altLang="ko-KR" dirty="0">
+                <a:latin typeface="D2Coding" panose="020B0609020101020101" pitchFamily="49" charset="-127"/>
+                <a:ea typeface="D2Coding" panose="020B0609020101020101" pitchFamily="49" charset="-127"/>
+              </a:rPr>
+              <a:t>? </a:t>
+            </a:r>
+            <a:r>
+              <a:rPr lang="ko-KR" altLang="en-US" dirty="0">
+                <a:latin typeface="D2Coding" panose="020B0609020101020101" pitchFamily="49" charset="-127"/>
+                <a:ea typeface="D2Coding" panose="020B0609020101020101" pitchFamily="49" charset="-127"/>
+              </a:rPr>
+              <a:t>왜 </a:t>
+            </a:r>
+            <a:r>
+              <a:rPr lang="en-US" altLang="ko-KR" dirty="0">
+                <a:latin typeface="D2Coding" panose="020B0609020101020101" pitchFamily="49" charset="-127"/>
+                <a:ea typeface="D2Coding" panose="020B0609020101020101" pitchFamily="49" charset="-127"/>
+              </a:rPr>
+              <a:t>RNN</a:t>
+            </a:r>
+            <a:r>
+              <a:rPr lang="ko-KR" altLang="en-US" dirty="0">
+                <a:latin typeface="D2Coding" panose="020B0609020101020101" pitchFamily="49" charset="-127"/>
+                <a:ea typeface="D2Coding" panose="020B0609020101020101" pitchFamily="49" charset="-127"/>
+              </a:rPr>
+              <a:t>이 필요한지</a:t>
+            </a:r>
+            <a:r>
+              <a:rPr lang="en-US" altLang="ko-KR" dirty="0">
+                <a:latin typeface="D2Coding" panose="020B0609020101020101" pitchFamily="49" charset="-127"/>
+                <a:ea typeface="D2Coding" panose="020B0609020101020101" pitchFamily="49" charset="-127"/>
+              </a:rPr>
+              <a:t>? </a:t>
+            </a:r>
+            <a:r>
+              <a:rPr lang="ko-KR" altLang="en-US" dirty="0">
+                <a:latin typeface="D2Coding" panose="020B0609020101020101" pitchFamily="49" charset="-127"/>
+                <a:ea typeface="D2Coding" panose="020B0609020101020101" pitchFamily="49" charset="-127"/>
+              </a:rPr>
+              <a:t>를</a:t>
+            </a:r>
+            <a:r>
+              <a:rPr lang="en-US" altLang="ko-KR" dirty="0">
+                <a:latin typeface="D2Coding" panose="020B0609020101020101" pitchFamily="49" charset="-127"/>
+                <a:ea typeface="D2Coding" panose="020B0609020101020101" pitchFamily="49" charset="-127"/>
+              </a:rPr>
+              <a:t> </a:t>
+            </a:r>
+            <a:r>
+              <a:rPr lang="ko-KR" altLang="en-US" dirty="0">
+                <a:latin typeface="D2Coding" panose="020B0609020101020101" pitchFamily="49" charset="-127"/>
+                <a:ea typeface="D2Coding" panose="020B0609020101020101" pitchFamily="49" charset="-127"/>
+              </a:rPr>
+              <a:t>토론하고 주가 예측 방식 </a:t>
+            </a:r>
+            <a:r>
+              <a:rPr lang="en-US" altLang="ko-KR" dirty="0">
+                <a:latin typeface="D2Coding" panose="020B0609020101020101" pitchFamily="49" charset="-127"/>
+                <a:ea typeface="D2Coding" panose="020B0609020101020101" pitchFamily="49" charset="-127"/>
+              </a:rPr>
+              <a:t>4</a:t>
+            </a:r>
+            <a:r>
+              <a:rPr lang="ko-KR" altLang="en-US" dirty="0">
+                <a:latin typeface="D2Coding" panose="020B0609020101020101" pitchFamily="49" charset="-127"/>
+                <a:ea typeface="D2Coding" panose="020B0609020101020101" pitchFamily="49" charset="-127"/>
+              </a:rPr>
+              <a:t>가지를 오른쪽 방식으로 제시하라</a:t>
+            </a:r>
+          </a:p>
+        </p:txBody>
+      </p:sp>
+      <p:pic>
+        <p:nvPicPr>
+          <p:cNvPr id="9" name="그림 8">
+            <a:extLst>
+              <a:ext uri="{FF2B5EF4-FFF2-40B4-BE49-F238E27FC236}">
+                <a16:creationId xmlns:a16="http://schemas.microsoft.com/office/drawing/2014/main" id="{F71D6366-ECCB-4037-D8F7-9766B35574CC}"/>
+              </a:ext>
+            </a:extLst>
+          </p:cNvPr>
+          <p:cNvPicPr>
+            <a:picLocks noChangeAspect="1"/>
+          </p:cNvPicPr>
+          <p:nvPr/>
+        </p:nvPicPr>
+        <p:blipFill>
+          <a:blip r:embed="rId2"/>
+          <a:stretch>
+            <a:fillRect/>
+          </a:stretch>
+        </p:blipFill>
+        <p:spPr>
+          <a:xfrm>
+            <a:off x="4956626" y="2405063"/>
+            <a:ext cx="5599614" cy="4205850"/>
+          </a:xfrm>
+          <a:prstGeom prst="rect">
+            <a:avLst/>
+          </a:prstGeom>
+        </p:spPr>
+      </p:pic>
+      <p:pic>
+        <p:nvPicPr>
+          <p:cNvPr id="11" name="그래픽 10" descr="물음표">
+            <a:extLst>
+              <a:ext uri="{FF2B5EF4-FFF2-40B4-BE49-F238E27FC236}">
+                <a16:creationId xmlns:a16="http://schemas.microsoft.com/office/drawing/2014/main" id="{A37A5489-EAC6-4176-D325-AC523BE36B77}"/>
+              </a:ext>
+            </a:extLst>
+          </p:cNvPr>
+          <p:cNvPicPr>
+            <a:picLocks noChangeAspect="1"/>
+          </p:cNvPicPr>
+          <p:nvPr/>
+        </p:nvPicPr>
+        <p:blipFill>
+          <a:blip r:embed="rId3">
+            <a:extLst>
+              <a:ext uri="{96DAC541-7B7A-43D3-8B79-37D633B846F1}">
+                <asvg:svgBlip xmlns:asvg="http://schemas.microsoft.com/office/drawing/2016/SVG/main" r:embed="rId4"/>
+              </a:ext>
+            </a:extLst>
+          </a:blip>
+          <a:stretch>
+            <a:fillRect/>
+          </a:stretch>
+        </p:blipFill>
+        <p:spPr>
+          <a:xfrm>
+            <a:off x="10556240" y="2971800"/>
+            <a:ext cx="914400" cy="914400"/>
+          </a:xfrm>
+          <a:prstGeom prst="rect">
+            <a:avLst/>
+          </a:prstGeom>
+        </p:spPr>
+      </p:pic>
+      <p:sp>
+        <p:nvSpPr>
+          <p:cNvPr id="12" name="화살표: 줄무늬가 있는 오른쪽 11">
+            <a:extLst>
+              <a:ext uri="{FF2B5EF4-FFF2-40B4-BE49-F238E27FC236}">
+                <a16:creationId xmlns:a16="http://schemas.microsoft.com/office/drawing/2014/main" id="{B150B105-D9C4-E76C-1B99-300BC744F8DC}"/>
+              </a:ext>
+            </a:extLst>
+          </p:cNvPr>
+          <p:cNvSpPr/>
+          <p:nvPr/>
+        </p:nvSpPr>
+        <p:spPr>
+          <a:xfrm>
+            <a:off x="3881120" y="3556000"/>
+            <a:ext cx="777688" cy="985520"/>
+          </a:xfrm>
+          <a:prstGeom prst="stripedRightArrow">
+            <a:avLst>
+              <a:gd name="adj1" fmla="val 64433"/>
+              <a:gd name="adj2" fmla="val 50000"/>
+            </a:avLst>
+          </a:prstGeom>
+        </p:spPr>
+        <p:style>
+          <a:lnRef idx="2">
+            <a:schemeClr val="accent1">
+              <a:shade val="15000"/>
+            </a:schemeClr>
+          </a:lnRef>
+          <a:fillRef idx="1">
+            <a:schemeClr val="accent1"/>
+          </a:fillRef>
+          <a:effectRef idx="0">
+            <a:schemeClr val="accent1"/>
+          </a:effectRef>
+          <a:fontRef idx="minor">
+            <a:schemeClr val="lt1"/>
+          </a:fontRef>
+        </p:style>
+        <p:txBody>
+          <a:bodyPr rtlCol="0" anchor="ctr"/>
+          <a:lstStyle/>
+          <a:p>
+            <a:pPr algn="ctr"/>
+            <a:endParaRPr lang="ko-KR" altLang="en-US"/>
+          </a:p>
+        </p:txBody>
+      </p:sp>
+      <p:sp>
+        <p:nvSpPr>
+          <p:cNvPr id="14" name="TextBox 13">
+            <a:extLst>
+              <a:ext uri="{FF2B5EF4-FFF2-40B4-BE49-F238E27FC236}">
+                <a16:creationId xmlns:a16="http://schemas.microsoft.com/office/drawing/2014/main" id="{409F955C-5EBE-00F4-6BD3-25B7D293FF8A}"/>
+              </a:ext>
+            </a:extLst>
+          </p:cNvPr>
+          <p:cNvSpPr txBox="1"/>
+          <p:nvPr/>
+        </p:nvSpPr>
+        <p:spPr>
+          <a:xfrm>
+            <a:off x="4914397" y="2159263"/>
+            <a:ext cx="6096000" cy="276999"/>
+          </a:xfrm>
+          <a:prstGeom prst="rect">
+            <a:avLst/>
+          </a:prstGeom>
+          <a:noFill/>
+        </p:spPr>
+        <p:txBody>
+          <a:bodyPr wrap="square">
+            <a:spAutoFit/>
+          </a:bodyPr>
+          <a:lstStyle/>
+          <a:p>
+            <a:r>
+              <a:rPr lang="ko-KR" altLang="en-US" sz="1200" dirty="0">
+                <a:latin typeface="D2Coding" panose="020B0609020101020101" pitchFamily="49" charset="-127"/>
+                <a:ea typeface="D2Coding" panose="020B0609020101020101" pitchFamily="49" charset="-127"/>
+              </a:rPr>
+              <a:t>Hands-On_Machine_Learning_with_Scikit-Learn-Keras-and-TensorFlow</a:t>
+            </a:r>
+          </a:p>
+        </p:txBody>
+      </p:sp>
+    </p:spTree>
+    <p:extLst>
+      <p:ext uri="{BB962C8B-B14F-4D97-AF65-F5344CB8AC3E}">
+        <p14:creationId xmlns:p14="http://schemas.microsoft.com/office/powerpoint/2010/main" val="1679317289"/>
+      </p:ext>
+    </p:extLst>
+  </p:cSld>
+  <p:clrMapOvr>
+    <a:masterClrMapping/>
+  </p:clrMapOvr>
+</p:sld>
+</file>
+
+<file path=ppt/slides/slide5.xml><?xml version="1.0" encoding="utf-8"?>
+<p:sld xmlns:a="http://schemas.openxmlformats.org/drawingml/2006/main" xmlns:r="http://schemas.openxmlformats.org/officeDocument/2006/relationships" xmlns:p="http://schemas.openxmlformats.org/presentationml/2006/main">
+  <p:cSld>
+    <p:spTree>
+      <p:nvGrpSpPr>
+        <p:cNvPr id="1" name="">
+          <a:extLst>
+            <a:ext uri="{FF2B5EF4-FFF2-40B4-BE49-F238E27FC236}">
               <a16:creationId xmlns:a16="http://schemas.microsoft.com/office/drawing/2014/main" id="{15DA55FA-C15E-7045-0184-107FFD09BC75}"/>
             </a:ext>
           </a:extLst>
@@ -6434,7 +9907,7 @@
             <a:fld id="{D57F1E4F-1CFF-5643-939E-217C01CDF565}" type="slidenum">
               <a:rPr lang="en-US" smtClean="0"/>
               <a:pPr/>
-              <a:t>4</a:t>
+              <a:t>5</a:t>
             </a:fld>
             <a:endParaRPr lang="en-US" dirty="0"/>
           </a:p>
@@ -6865,7 +10338,7 @@
 </p:sld>
 </file>
 
-<file path=ppt/slides/slide5.xml><?xml version="1.0" encoding="utf-8"?>
+<file path=ppt/slides/slide6.xml><?xml version="1.0" encoding="utf-8"?>
 <p:sld xmlns:a="http://schemas.openxmlformats.org/drawingml/2006/main" xmlns:r="http://schemas.openxmlformats.org/officeDocument/2006/relationships" xmlns:p="http://schemas.openxmlformats.org/presentationml/2006/main">
   <p:cSld>
     <p:spTree>
@@ -6917,7 +10390,7 @@
             <a:fld id="{D57F1E4F-1CFF-5643-939E-217C01CDF565}" type="slidenum">
               <a:rPr lang="en-US" smtClean="0"/>
               <a:pPr/>
-              <a:t>5</a:t>
+              <a:t>6</a:t>
             </a:fld>
             <a:endParaRPr lang="en-US" dirty="0"/>
           </a:p>
@@ -6998,8 +10471,8 @@
           </a:p>
         </p:txBody>
       </p:sp>
-      <mc:AlternateContent xmlns:mc="http://schemas.openxmlformats.org/markup-compatibility/2006">
-        <mc:Choice xmlns:a14="http://schemas.microsoft.com/office/drawing/2010/main" Requires="a14">
+      <mc:AlternateContent xmlns:mc="http://schemas.openxmlformats.org/markup-compatibility/2006" xmlns:a14="http://schemas.microsoft.com/office/drawing/2010/main">
+        <mc:Choice Requires="a14">
           <p:sp>
             <p:nvSpPr>
               <p:cNvPr id="13" name="TextBox 12">
@@ -7304,7 +10777,7 @@
             </p:txBody>
           </p:sp>
         </mc:Choice>
-        <mc:Fallback>
+        <mc:Fallback xmlns="">
           <p:sp>
             <p:nvSpPr>
               <p:cNvPr id="13" name="TextBox 12">
@@ -7705,7 +11178,7 @@
 </p:sld>
 </file>
 
-<file path=ppt/slides/slide6.xml><?xml version="1.0" encoding="utf-8"?>
+<file path=ppt/slides/slide7.xml><?xml version="1.0" encoding="utf-8"?>
 <p:sld xmlns:a="http://schemas.openxmlformats.org/drawingml/2006/main" xmlns:r="http://schemas.openxmlformats.org/officeDocument/2006/relationships" xmlns:p="http://schemas.openxmlformats.org/presentationml/2006/main">
   <p:cSld>
     <p:spTree>
@@ -7757,7 +11230,7 @@
             <a:fld id="{D57F1E4F-1CFF-5643-939E-217C01CDF565}" type="slidenum">
               <a:rPr lang="en-US" smtClean="0"/>
               <a:pPr/>
-              <a:t>6</a:t>
+              <a:t>7</a:t>
             </a:fld>
             <a:endParaRPr lang="en-US" dirty="0"/>
           </a:p>
@@ -8227,8 +11700,8 @@
           </a:graphicData>
         </a:graphic>
       </p:graphicFrame>
-      <mc:AlternateContent xmlns:mc="http://schemas.openxmlformats.org/markup-compatibility/2006">
-        <mc:Choice xmlns:a14="http://schemas.microsoft.com/office/drawing/2010/main" Requires="a14">
+      <mc:AlternateContent xmlns:mc="http://schemas.openxmlformats.org/markup-compatibility/2006" xmlns:a14="http://schemas.microsoft.com/office/drawing/2010/main">
+        <mc:Choice Requires="a14">
           <p:sp>
             <p:nvSpPr>
               <p:cNvPr id="20" name="TextBox 19">
@@ -8257,6 +11730,7 @@
               </a:bodyPr>
               <a:lstStyle/>
               <a:p>
+                <a:pPr/>
                 <a14:m>
                   <m:oMathPara xmlns:m="http://schemas.openxmlformats.org/officeDocument/2006/math">
                     <m:oMathParaPr>
@@ -8266,7 +11740,7 @@
                       <m:sSub>
                         <m:sSubPr>
                           <m:ctrlPr>
-                            <a:rPr lang="ko-KR" altLang="en-US" sz="2000" smtClean="0">
+                            <a:rPr lang="ko-KR" altLang="en-US" sz="2000" i="1" smtClean="0">
                               <a:latin typeface="Cambria Math" panose="02040503050406030204" pitchFamily="18" charset="0"/>
                             </a:rPr>
                           </m:ctrlPr>
@@ -8296,7 +11770,7 @@
             </p:txBody>
           </p:sp>
         </mc:Choice>
-        <mc:Fallback>
+        <mc:Fallback xmlns="">
           <p:sp>
             <p:nvSpPr>
               <p:cNvPr id="20" name="TextBox 19">
@@ -8341,8 +11815,8 @@
           </p:sp>
         </mc:Fallback>
       </mc:AlternateContent>
-      <mc:AlternateContent xmlns:mc="http://schemas.openxmlformats.org/markup-compatibility/2006">
-        <mc:Choice xmlns:a14="http://schemas.microsoft.com/office/drawing/2010/main" Requires="a14">
+      <mc:AlternateContent xmlns:mc="http://schemas.openxmlformats.org/markup-compatibility/2006" xmlns:a14="http://schemas.microsoft.com/office/drawing/2010/main">
+        <mc:Choice Requires="a14">
           <p:sp>
             <p:nvSpPr>
               <p:cNvPr id="22" name="TextBox 21">
@@ -8411,7 +11885,7 @@
             </p:txBody>
           </p:sp>
         </mc:Choice>
-        <mc:Fallback>
+        <mc:Fallback xmlns="">
           <p:sp>
             <p:nvSpPr>
               <p:cNvPr id="22" name="TextBox 21">
@@ -8456,8 +11930,8 @@
           </p:sp>
         </mc:Fallback>
       </mc:AlternateContent>
-      <mc:AlternateContent xmlns:mc="http://schemas.openxmlformats.org/markup-compatibility/2006">
-        <mc:Choice xmlns:a14="http://schemas.microsoft.com/office/drawing/2010/main" Requires="a14">
+      <mc:AlternateContent xmlns:mc="http://schemas.openxmlformats.org/markup-compatibility/2006" xmlns:a14="http://schemas.microsoft.com/office/drawing/2010/main">
+        <mc:Choice Requires="a14">
           <p:sp>
             <p:nvSpPr>
               <p:cNvPr id="28" name="TextBox 27">
@@ -8486,6 +11960,7 @@
               </a:bodyPr>
               <a:lstStyle/>
               <a:p>
+                <a:pPr/>
                 <a14:m>
                   <m:oMathPara xmlns:m="http://schemas.openxmlformats.org/officeDocument/2006/math">
                     <m:oMathParaPr>
@@ -8531,7 +12006,7 @@
                               </a:solidFill>
                               <a:latin typeface="Cambria Math" panose="02040503050406030204" pitchFamily="18" charset="0"/>
                             </a:rPr>
-                            <m:t>-1</m:t>
+                            <m:t>−1</m:t>
                           </m:r>
                         </m:sub>
                       </m:sSub>
@@ -8547,7 +12022,7 @@
             </p:txBody>
           </p:sp>
         </mc:Choice>
-        <mc:Fallback>
+        <mc:Fallback xmlns="">
           <p:sp>
             <p:nvSpPr>
               <p:cNvPr id="28" name="TextBox 27">
@@ -8592,8 +12067,8 @@
           </p:sp>
         </mc:Fallback>
       </mc:AlternateContent>
-      <mc:AlternateContent xmlns:mc="http://schemas.openxmlformats.org/markup-compatibility/2006">
-        <mc:Choice xmlns:a14="http://schemas.microsoft.com/office/drawing/2010/main" Requires="a14">
+      <mc:AlternateContent xmlns:mc="http://schemas.openxmlformats.org/markup-compatibility/2006" xmlns:a14="http://schemas.microsoft.com/office/drawing/2010/main">
+        <mc:Choice Requires="a14">
           <p:sp>
             <p:nvSpPr>
               <p:cNvPr id="29" name="TextBox 28">
@@ -8622,6 +12097,7 @@
               </a:bodyPr>
               <a:lstStyle/>
               <a:p>
+                <a:pPr/>
                 <a14:m>
                   <m:oMathPara xmlns:m="http://schemas.openxmlformats.org/officeDocument/2006/math">
                     <m:oMathParaPr>
@@ -8631,7 +12107,7 @@
                       <m:sSub>
                         <m:sSubPr>
                           <m:ctrlPr>
-                            <a:rPr lang="ko-KR" altLang="en-US" smtClean="0">
+                            <a:rPr lang="ko-KR" altLang="en-US" i="1" smtClean="0">
                               <a:latin typeface="Cambria Math" panose="02040503050406030204" pitchFamily="18" charset="0"/>
                             </a:rPr>
                           </m:ctrlPr>
@@ -8661,7 +12137,7 @@
             </p:txBody>
           </p:sp>
         </mc:Choice>
-        <mc:Fallback>
+        <mc:Fallback xmlns="">
           <p:sp>
             <p:nvSpPr>
               <p:cNvPr id="29" name="TextBox 28">
@@ -8706,8 +12182,8 @@
           </p:sp>
         </mc:Fallback>
       </mc:AlternateContent>
-      <mc:AlternateContent xmlns:mc="http://schemas.openxmlformats.org/markup-compatibility/2006">
-        <mc:Choice xmlns:a14="http://schemas.microsoft.com/office/drawing/2010/main" Requires="a14">
+      <mc:AlternateContent xmlns:mc="http://schemas.openxmlformats.org/markup-compatibility/2006" xmlns:a14="http://schemas.microsoft.com/office/drawing/2010/main">
+        <mc:Choice Requires="a14">
           <p:sp>
             <p:nvSpPr>
               <p:cNvPr id="31" name="TextBox 30">
@@ -8736,6 +12212,7 @@
               </a:bodyPr>
               <a:lstStyle/>
               <a:p>
+                <a:pPr/>
                 <a14:m>
                   <m:oMathPara xmlns:m="http://schemas.openxmlformats.org/officeDocument/2006/math">
                     <m:oMathParaPr>
@@ -8788,7 +12265,7 @@
             </p:txBody>
           </p:sp>
         </mc:Choice>
-        <mc:Fallback>
+        <mc:Fallback xmlns="">
           <p:sp>
             <p:nvSpPr>
               <p:cNvPr id="31" name="TextBox 30">
@@ -8833,8 +12310,8 @@
           </p:sp>
         </mc:Fallback>
       </mc:AlternateContent>
-      <mc:AlternateContent xmlns:mc="http://schemas.openxmlformats.org/markup-compatibility/2006">
-        <mc:Choice xmlns:a14="http://schemas.microsoft.com/office/drawing/2010/main" Requires="a14">
+      <mc:AlternateContent xmlns:mc="http://schemas.openxmlformats.org/markup-compatibility/2006" xmlns:a14="http://schemas.microsoft.com/office/drawing/2010/main">
+        <mc:Choice Requires="a14">
           <p:sp>
             <p:nvSpPr>
               <p:cNvPr id="32" name="TextBox 31">
@@ -8863,6 +12340,7 @@
               </a:bodyPr>
               <a:lstStyle/>
               <a:p>
+                <a:pPr/>
                 <a14:m>
                   <m:oMathPara xmlns:m="http://schemas.openxmlformats.org/officeDocument/2006/math">
                     <m:oMathParaPr>
@@ -8872,7 +12350,7 @@
                       <m:sSub>
                         <m:sSubPr>
                           <m:ctrlPr>
-                            <a:rPr lang="ko-KR" altLang="en-US" smtClean="0">
+                            <a:rPr lang="ko-KR" altLang="en-US" i="1" smtClean="0">
                               <a:solidFill>
                                 <a:schemeClr val="bg1"/>
                               </a:solidFill>
@@ -8915,7 +12393,7 @@
             </p:txBody>
           </p:sp>
         </mc:Choice>
-        <mc:Fallback>
+        <mc:Fallback xmlns="">
           <p:sp>
             <p:nvSpPr>
               <p:cNvPr id="32" name="TextBox 31">
@@ -8960,8 +12438,8 @@
           </p:sp>
         </mc:Fallback>
       </mc:AlternateContent>
-      <mc:AlternateContent xmlns:mc="http://schemas.openxmlformats.org/markup-compatibility/2006">
-        <mc:Choice xmlns:a14="http://schemas.microsoft.com/office/drawing/2010/main" Requires="a14">
+      <mc:AlternateContent xmlns:mc="http://schemas.openxmlformats.org/markup-compatibility/2006" xmlns:a14="http://schemas.microsoft.com/office/drawing/2010/main">
+        <mc:Choice Requires="a14">
           <p:sp>
             <p:nvSpPr>
               <p:cNvPr id="33" name="TextBox 32">
@@ -8990,6 +12468,7 @@
               </a:bodyPr>
               <a:lstStyle/>
               <a:p>
+                <a:pPr/>
                 <a14:m>
                   <m:oMathPara xmlns:m="http://schemas.openxmlformats.org/officeDocument/2006/math">
                     <m:oMathParaPr>
@@ -8999,7 +12478,7 @@
                       <m:sSub>
                         <m:sSubPr>
                           <m:ctrlPr>
-                            <a:rPr lang="ko-KR" altLang="en-US" smtClean="0">
+                            <a:rPr lang="ko-KR" altLang="en-US" i="1" smtClean="0">
                               <a:solidFill>
                                 <a:schemeClr val="bg1"/>
                               </a:solidFill>
@@ -9035,7 +12514,7 @@
                               </a:solidFill>
                               <a:latin typeface="Cambria Math" panose="02040503050406030204" pitchFamily="18" charset="0"/>
                             </a:rPr>
-                            <m:t>-1</m:t>
+                            <m:t>−1</m:t>
                           </m:r>
                         </m:sub>
                       </m:sSub>
@@ -9051,7 +12530,7 @@
             </p:txBody>
           </p:sp>
         </mc:Choice>
-        <mc:Fallback>
+        <mc:Fallback xmlns="">
           <p:sp>
             <p:nvSpPr>
               <p:cNvPr id="33" name="TextBox 32">
@@ -9638,8 +13117,8 @@
           </a:graphicData>
         </a:graphic>
       </p:graphicFrame>
-      <mc:AlternateContent xmlns:mc="http://schemas.openxmlformats.org/markup-compatibility/2006">
-        <mc:Choice xmlns:a14="http://schemas.microsoft.com/office/drawing/2010/main" Requires="a14">
+      <mc:AlternateContent xmlns:mc="http://schemas.openxmlformats.org/markup-compatibility/2006" xmlns:a14="http://schemas.microsoft.com/office/drawing/2010/main">
+        <mc:Choice Requires="a14">
           <p:sp>
             <p:nvSpPr>
               <p:cNvPr id="25" name="TextBox 24">
@@ -9708,7 +13187,7 @@
             </p:txBody>
           </p:sp>
         </mc:Choice>
-        <mc:Fallback>
+        <mc:Fallback xmlns="">
           <p:sp>
             <p:nvSpPr>
               <p:cNvPr id="25" name="TextBox 24">
@@ -10466,7 +13945,7 @@
 </p:sld>
 </file>
 
-<file path=ppt/slides/slide7.xml><?xml version="1.0" encoding="utf-8"?>
+<file path=ppt/slides/slide8.xml><?xml version="1.0" encoding="utf-8"?>
 <p:sld xmlns:a="http://schemas.openxmlformats.org/drawingml/2006/main" xmlns:r="http://schemas.openxmlformats.org/officeDocument/2006/relationships" xmlns:p="http://schemas.openxmlformats.org/presentationml/2006/main">
   <p:cSld>
     <p:spTree>
@@ -10518,7 +13997,7 @@
             <a:fld id="{D57F1E4F-1CFF-5643-939E-217C01CDF565}" type="slidenum">
               <a:rPr lang="en-US" smtClean="0"/>
               <a:pPr/>
-              <a:t>7</a:t>
+              <a:t>8</a:t>
             </a:fld>
             <a:endParaRPr lang="en-US" dirty="0"/>
           </a:p>
@@ -11354,8 +14833,8 @@
           </a:graphicData>
         </a:graphic>
       </p:graphicFrame>
-      <mc:AlternateContent xmlns:mc="http://schemas.openxmlformats.org/markup-compatibility/2006">
-        <mc:Choice xmlns:a14="http://schemas.microsoft.com/office/drawing/2010/main" Requires="a14">
+      <mc:AlternateContent xmlns:mc="http://schemas.openxmlformats.org/markup-compatibility/2006" xmlns:a14="http://schemas.microsoft.com/office/drawing/2010/main">
+        <mc:Choice Requires="a14">
           <p:sp>
             <p:nvSpPr>
               <p:cNvPr id="8" name="TextBox 7">
@@ -11424,7 +14903,7 @@
             </p:txBody>
           </p:sp>
         </mc:Choice>
-        <mc:Fallback>
+        <mc:Fallback xmlns="">
           <p:sp>
             <p:nvSpPr>
               <p:cNvPr id="8" name="TextBox 7">
@@ -11469,8 +14948,8 @@
           </p:sp>
         </mc:Fallback>
       </mc:AlternateContent>
-      <mc:AlternateContent xmlns:mc="http://schemas.openxmlformats.org/markup-compatibility/2006">
-        <mc:Choice xmlns:a14="http://schemas.microsoft.com/office/drawing/2010/main" Requires="a14">
+      <mc:AlternateContent xmlns:mc="http://schemas.openxmlformats.org/markup-compatibility/2006" xmlns:a14="http://schemas.microsoft.com/office/drawing/2010/main">
+        <mc:Choice Requires="a14">
           <p:sp>
             <p:nvSpPr>
               <p:cNvPr id="9" name="TextBox 8">
@@ -11499,6 +14978,7 @@
               </a:bodyPr>
               <a:lstStyle/>
               <a:p>
+                <a:pPr/>
                 <a14:m>
                   <m:oMathPara xmlns:m="http://schemas.openxmlformats.org/officeDocument/2006/math">
                     <m:oMathParaPr>
@@ -11508,7 +14988,7 @@
                       <m:sSub>
                         <m:sSubPr>
                           <m:ctrlPr>
-                            <a:rPr lang="ko-KR" altLang="en-US" smtClean="0">
+                            <a:rPr lang="ko-KR" altLang="en-US" i="1" smtClean="0">
                               <a:latin typeface="Cambria Math" panose="02040503050406030204" pitchFamily="18" charset="0"/>
                             </a:rPr>
                           </m:ctrlPr>
@@ -11538,7 +15018,7 @@
             </p:txBody>
           </p:sp>
         </mc:Choice>
-        <mc:Fallback>
+        <mc:Fallback xmlns="">
           <p:sp>
             <p:nvSpPr>
               <p:cNvPr id="9" name="TextBox 8">
@@ -11583,8 +15063,8 @@
           </p:sp>
         </mc:Fallback>
       </mc:AlternateContent>
-      <mc:AlternateContent xmlns:mc="http://schemas.openxmlformats.org/markup-compatibility/2006">
-        <mc:Choice xmlns:a14="http://schemas.microsoft.com/office/drawing/2010/main" Requires="a14">
+      <mc:AlternateContent xmlns:mc="http://schemas.openxmlformats.org/markup-compatibility/2006" xmlns:a14="http://schemas.microsoft.com/office/drawing/2010/main">
+        <mc:Choice Requires="a14">
           <p:sp>
             <p:nvSpPr>
               <p:cNvPr id="10" name="TextBox 9">
@@ -11653,7 +15133,7 @@
             </p:txBody>
           </p:sp>
         </mc:Choice>
-        <mc:Fallback>
+        <mc:Fallback xmlns="">
           <p:sp>
             <p:nvSpPr>
               <p:cNvPr id="10" name="TextBox 9">
@@ -11777,8 +15257,8 @@
           </a:graphicData>
         </a:graphic>
       </p:graphicFrame>
-      <mc:AlternateContent xmlns:mc="http://schemas.openxmlformats.org/markup-compatibility/2006">
-        <mc:Choice xmlns:a14="http://schemas.microsoft.com/office/drawing/2010/main" Requires="a14">
+      <mc:AlternateContent xmlns:mc="http://schemas.openxmlformats.org/markup-compatibility/2006" xmlns:a14="http://schemas.microsoft.com/office/drawing/2010/main">
+        <mc:Choice Requires="a14">
           <p:sp>
             <p:nvSpPr>
               <p:cNvPr id="14" name="TextBox 13">
@@ -11807,6 +15287,7 @@
               </a:bodyPr>
               <a:lstStyle/>
               <a:p>
+                <a:pPr/>
                 <a14:m>
                   <m:oMathPara xmlns:m="http://schemas.openxmlformats.org/officeDocument/2006/math">
                     <m:oMathParaPr>
@@ -11852,7 +15333,7 @@
                               </a:solidFill>
                               <a:latin typeface="Cambria Math" panose="02040503050406030204" pitchFamily="18" charset="0"/>
                             </a:rPr>
-                            <m:t>-1</m:t>
+                            <m:t>−1</m:t>
                           </m:r>
                         </m:sub>
                       </m:sSub>
@@ -11868,7 +15349,7 @@
             </p:txBody>
           </p:sp>
         </mc:Choice>
-        <mc:Fallback>
+        <mc:Fallback xmlns="">
           <p:sp>
             <p:nvSpPr>
               <p:cNvPr id="14" name="TextBox 13">
@@ -12063,8 +15544,8 @@
           </a:p>
         </p:txBody>
       </p:sp>
-      <mc:AlternateContent xmlns:mc="http://schemas.openxmlformats.org/markup-compatibility/2006">
-        <mc:Choice xmlns:a14="http://schemas.microsoft.com/office/drawing/2010/main" Requires="a14">
+      <mc:AlternateContent xmlns:mc="http://schemas.openxmlformats.org/markup-compatibility/2006" xmlns:a14="http://schemas.microsoft.com/office/drawing/2010/main">
+        <mc:Choice Requires="a14">
           <p:sp>
             <p:nvSpPr>
               <p:cNvPr id="23" name="TextBox 22">
@@ -12093,6 +15574,7 @@
               </a:bodyPr>
               <a:lstStyle/>
               <a:p>
+                <a:pPr/>
                 <a14:m>
                   <m:oMathPara xmlns:m="http://schemas.openxmlformats.org/officeDocument/2006/math">
                     <m:oMathParaPr>
@@ -12138,7 +15620,7 @@
                               </a:solidFill>
                               <a:latin typeface="Cambria Math" panose="02040503050406030204" pitchFamily="18" charset="0"/>
                             </a:rPr>
-                            <m:t>-1</m:t>
+                            <m:t>−1</m:t>
                           </m:r>
                         </m:sub>
                       </m:sSub>
@@ -12154,7 +15636,7 @@
             </p:txBody>
           </p:sp>
         </mc:Choice>
-        <mc:Fallback>
+        <mc:Fallback xmlns="">
           <p:sp>
             <p:nvSpPr>
               <p:cNvPr id="23" name="TextBox 22">
@@ -12466,8 +15948,8 @@
           </a:prstGeom>
         </p:spPr>
       </p:pic>
-      <mc:AlternateContent xmlns:mc="http://schemas.openxmlformats.org/markup-compatibility/2006">
-        <mc:Choice xmlns:a14="http://schemas.microsoft.com/office/drawing/2010/main" Requires="a14">
+      <mc:AlternateContent xmlns:mc="http://schemas.openxmlformats.org/markup-compatibility/2006" xmlns:a14="http://schemas.microsoft.com/office/drawing/2010/main">
+        <mc:Choice Requires="a14">
           <p:sp>
             <p:nvSpPr>
               <p:cNvPr id="29" name="TextBox 28">
@@ -12496,6 +15978,7 @@
               </a:bodyPr>
               <a:lstStyle/>
               <a:p>
+                <a:pPr/>
                 <a14:m>
                   <m:oMathPara xmlns:m="http://schemas.openxmlformats.org/officeDocument/2006/math">
                     <m:oMathParaPr>
@@ -12548,7 +16031,7 @@
             </p:txBody>
           </p:sp>
         </mc:Choice>
-        <mc:Fallback>
+        <mc:Fallback xmlns="">
           <p:sp>
             <p:nvSpPr>
               <p:cNvPr id="29" name="TextBox 28">
@@ -12722,8 +16205,8 @@
           </a:graphicData>
         </a:graphic>
       </p:graphicFrame>
-      <mc:AlternateContent xmlns:mc="http://schemas.openxmlformats.org/markup-compatibility/2006">
-        <mc:Choice xmlns:a14="http://schemas.microsoft.com/office/drawing/2010/main" Requires="a14">
+      <mc:AlternateContent xmlns:mc="http://schemas.openxmlformats.org/markup-compatibility/2006" xmlns:a14="http://schemas.microsoft.com/office/drawing/2010/main">
+        <mc:Choice Requires="a14">
           <p:sp>
             <p:nvSpPr>
               <p:cNvPr id="32" name="TextBox 31">
@@ -12752,6 +16235,7 @@
               </a:bodyPr>
               <a:lstStyle/>
               <a:p>
+                <a:pPr/>
                 <a14:m>
                   <m:oMathPara xmlns:m="http://schemas.openxmlformats.org/officeDocument/2006/math">
                     <m:oMathParaPr>
@@ -12761,7 +16245,7 @@
                       <m:sSub>
                         <m:sSubPr>
                           <m:ctrlPr>
-                            <a:rPr lang="ko-KR" altLang="en-US" smtClean="0">
+                            <a:rPr lang="ko-KR" altLang="en-US" i="1" smtClean="0">
                               <a:latin typeface="Cambria Math" panose="02040503050406030204" pitchFamily="18" charset="0"/>
                             </a:rPr>
                           </m:ctrlPr>
@@ -12791,7 +16275,7 @@
             </p:txBody>
           </p:sp>
         </mc:Choice>
-        <mc:Fallback>
+        <mc:Fallback xmlns="">
           <p:sp>
             <p:nvSpPr>
               <p:cNvPr id="32" name="TextBox 31">
@@ -13000,8 +16484,8 @@
           </a:graphicData>
         </a:graphic>
       </p:graphicFrame>
-      <mc:AlternateContent xmlns:mc="http://schemas.openxmlformats.org/markup-compatibility/2006">
-        <mc:Choice xmlns:a14="http://schemas.microsoft.com/office/drawing/2010/main" Requires="a14">
+      <mc:AlternateContent xmlns:mc="http://schemas.openxmlformats.org/markup-compatibility/2006" xmlns:a14="http://schemas.microsoft.com/office/drawing/2010/main">
+        <mc:Choice Requires="a14">
           <p:sp>
             <p:nvSpPr>
               <p:cNvPr id="36" name="TextBox 35">
@@ -13030,6 +16514,7 @@
               </a:bodyPr>
               <a:lstStyle/>
               <a:p>
+                <a:pPr/>
                 <a14:m>
                   <m:oMathPara xmlns:m="http://schemas.openxmlformats.org/officeDocument/2006/math">
                     <m:oMathParaPr>
@@ -13082,7 +16567,7 @@
             </p:txBody>
           </p:sp>
         </mc:Choice>
-        <mc:Fallback>
+        <mc:Fallback xmlns="">
           <p:sp>
             <p:nvSpPr>
               <p:cNvPr id="36" name="TextBox 35">
@@ -13255,8 +16740,8 @@
           </a:graphicData>
         </a:graphic>
       </p:graphicFrame>
-      <mc:AlternateContent xmlns:mc="http://schemas.openxmlformats.org/markup-compatibility/2006">
-        <mc:Choice xmlns:a14="http://schemas.microsoft.com/office/drawing/2010/main" Requires="a14">
+      <mc:AlternateContent xmlns:mc="http://schemas.openxmlformats.org/markup-compatibility/2006" xmlns:a14="http://schemas.microsoft.com/office/drawing/2010/main">
+        <mc:Choice Requires="a14">
           <p:sp>
             <p:nvSpPr>
               <p:cNvPr id="39" name="TextBox 38">
@@ -13285,6 +16770,7 @@
               </a:bodyPr>
               <a:lstStyle/>
               <a:p>
+                <a:pPr/>
                 <a14:m>
                   <m:oMathPara xmlns:m="http://schemas.openxmlformats.org/officeDocument/2006/math">
                     <m:oMathParaPr>
@@ -13337,7 +16823,7 @@
             </p:txBody>
           </p:sp>
         </mc:Choice>
-        <mc:Fallback>
+        <mc:Fallback xmlns="">
           <p:sp>
             <p:nvSpPr>
               <p:cNvPr id="39" name="TextBox 38">
@@ -13511,8 +16997,8 @@
           </a:graphicData>
         </a:graphic>
       </p:graphicFrame>
-      <mc:AlternateContent xmlns:mc="http://schemas.openxmlformats.org/markup-compatibility/2006">
-        <mc:Choice xmlns:a14="http://schemas.microsoft.com/office/drawing/2010/main" Requires="a14">
+      <mc:AlternateContent xmlns:mc="http://schemas.openxmlformats.org/markup-compatibility/2006" xmlns:a14="http://schemas.microsoft.com/office/drawing/2010/main">
+        <mc:Choice Requires="a14">
           <p:sp>
             <p:nvSpPr>
               <p:cNvPr id="42" name="TextBox 41">
@@ -13541,6 +17027,7 @@
               </a:bodyPr>
               <a:lstStyle/>
               <a:p>
+                <a:pPr/>
                 <a14:m>
                   <m:oMathPara xmlns:m="http://schemas.openxmlformats.org/officeDocument/2006/math">
                     <m:oMathParaPr>
@@ -13550,7 +17037,7 @@
                       <m:sSub>
                         <m:sSubPr>
                           <m:ctrlPr>
-                            <a:rPr lang="ko-KR" altLang="en-US" smtClean="0">
+                            <a:rPr lang="ko-KR" altLang="en-US" i="1" smtClean="0">
                               <a:latin typeface="Cambria Math" panose="02040503050406030204" pitchFamily="18" charset="0"/>
                             </a:rPr>
                           </m:ctrlPr>
@@ -13580,7 +17067,7 @@
             </p:txBody>
           </p:sp>
         </mc:Choice>
-        <mc:Fallback>
+        <mc:Fallback xmlns="">
           <p:sp>
             <p:nvSpPr>
               <p:cNvPr id="42" name="TextBox 41">
@@ -13755,8 +17242,8 @@
           </a:p>
         </p:txBody>
       </p:sp>
-      <mc:AlternateContent xmlns:mc="http://schemas.openxmlformats.org/markup-compatibility/2006">
-        <mc:Choice xmlns:a14="http://schemas.microsoft.com/office/drawing/2010/main" Requires="a14">
+      <mc:AlternateContent xmlns:mc="http://schemas.openxmlformats.org/markup-compatibility/2006" xmlns:a14="http://schemas.microsoft.com/office/drawing/2010/main">
+        <mc:Choice Requires="a14">
           <p:sp>
             <p:nvSpPr>
               <p:cNvPr id="47" name="TextBox 46">
@@ -13785,6 +17272,7 @@
               </a:bodyPr>
               <a:lstStyle/>
               <a:p>
+                <a:pPr/>
                 <a14:m>
                   <m:oMathPara xmlns:m="http://schemas.openxmlformats.org/officeDocument/2006/math">
                     <m:oMathParaPr>
@@ -13794,7 +17282,7 @@
                       <m:sSub>
                         <m:sSubPr>
                           <m:ctrlPr>
-                            <a:rPr lang="ko-KR" altLang="en-US" smtClean="0">
+                            <a:rPr lang="ko-KR" altLang="en-US" i="1" smtClean="0">
                               <a:latin typeface="Cambria Math" panose="02040503050406030204" pitchFamily="18" charset="0"/>
                             </a:rPr>
                           </m:ctrlPr>
@@ -13824,7 +17312,7 @@
             </p:txBody>
           </p:sp>
         </mc:Choice>
-        <mc:Fallback>
+        <mc:Fallback xmlns="">
           <p:sp>
             <p:nvSpPr>
               <p:cNvPr id="47" name="TextBox 46">
@@ -13869,8 +17357,8 @@
           </p:sp>
         </mc:Fallback>
       </mc:AlternateContent>
-      <mc:AlternateContent xmlns:mc="http://schemas.openxmlformats.org/markup-compatibility/2006">
-        <mc:Choice xmlns:a14="http://schemas.microsoft.com/office/drawing/2010/main" Requires="a14">
+      <mc:AlternateContent xmlns:mc="http://schemas.openxmlformats.org/markup-compatibility/2006" xmlns:a14="http://schemas.microsoft.com/office/drawing/2010/main">
+        <mc:Choice Requires="a14">
           <p:sp>
             <p:nvSpPr>
               <p:cNvPr id="50" name="TextBox 49">
@@ -13952,7 +17440,7 @@
             </p:txBody>
           </p:sp>
         </mc:Choice>
-        <mc:Fallback>
+        <mc:Fallback xmlns="">
           <p:sp>
             <p:nvSpPr>
               <p:cNvPr id="50" name="TextBox 49">
@@ -13997,8 +17485,8 @@
           </p:sp>
         </mc:Fallback>
       </mc:AlternateContent>
-      <mc:AlternateContent xmlns:mc="http://schemas.openxmlformats.org/markup-compatibility/2006">
-        <mc:Choice xmlns:a14="http://schemas.microsoft.com/office/drawing/2010/main" Requires="a14">
+      <mc:AlternateContent xmlns:mc="http://schemas.openxmlformats.org/markup-compatibility/2006" xmlns:a14="http://schemas.microsoft.com/office/drawing/2010/main">
+        <mc:Choice Requires="a14">
           <p:sp>
             <p:nvSpPr>
               <p:cNvPr id="51" name="TextBox 50">
@@ -14027,6 +17515,7 @@
               </a:bodyPr>
               <a:lstStyle/>
               <a:p>
+                <a:pPr/>
                 <a14:m>
                   <m:oMathPara xmlns:m="http://schemas.openxmlformats.org/officeDocument/2006/math">
                     <m:oMathParaPr>
@@ -14072,7 +17561,7 @@
                               </a:solidFill>
                               <a:latin typeface="Cambria Math" panose="02040503050406030204" pitchFamily="18" charset="0"/>
                             </a:rPr>
-                            <m:t>-1</m:t>
+                            <m:t>−1</m:t>
                           </m:r>
                         </m:sub>
                       </m:sSub>
@@ -14088,7 +17577,7 @@
             </p:txBody>
           </p:sp>
         </mc:Choice>
-        <mc:Fallback>
+        <mc:Fallback xmlns="">
           <p:sp>
             <p:nvSpPr>
               <p:cNvPr id="51" name="TextBox 50">
@@ -14133,8 +17622,8 @@
           </p:sp>
         </mc:Fallback>
       </mc:AlternateContent>
-      <mc:AlternateContent xmlns:mc="http://schemas.openxmlformats.org/markup-compatibility/2006">
-        <mc:Choice xmlns:a14="http://schemas.microsoft.com/office/drawing/2010/main" Requires="a14">
+      <mc:AlternateContent xmlns:mc="http://schemas.openxmlformats.org/markup-compatibility/2006" xmlns:a14="http://schemas.microsoft.com/office/drawing/2010/main">
+        <mc:Choice Requires="a14">
           <p:sp>
             <p:nvSpPr>
               <p:cNvPr id="52" name="TextBox 51">
@@ -14163,6 +17652,7 @@
               </a:bodyPr>
               <a:lstStyle/>
               <a:p>
+                <a:pPr/>
                 <a14:m>
                   <m:oMathPara xmlns:m="http://schemas.openxmlformats.org/officeDocument/2006/math">
                     <m:oMathParaPr>
@@ -14172,7 +17662,7 @@
                       <m:sSub>
                         <m:sSubPr>
                           <m:ctrlPr>
-                            <a:rPr lang="ko-KR" altLang="en-US" b="1" smtClean="0">
+                            <a:rPr lang="ko-KR" altLang="en-US" b="1" i="1" smtClean="0">
                               <a:solidFill>
                                 <a:srgbClr val="00B050"/>
                               </a:solidFill>
@@ -14215,7 +17705,7 @@
             </p:txBody>
           </p:sp>
         </mc:Choice>
-        <mc:Fallback>
+        <mc:Fallback xmlns="">
           <p:sp>
             <p:nvSpPr>
               <p:cNvPr id="52" name="TextBox 51">
@@ -14260,8 +17750,8 @@
           </p:sp>
         </mc:Fallback>
       </mc:AlternateContent>
-      <mc:AlternateContent xmlns:mc="http://schemas.openxmlformats.org/markup-compatibility/2006">
-        <mc:Choice xmlns:a14="http://schemas.microsoft.com/office/drawing/2010/main" Requires="a14">
+      <mc:AlternateContent xmlns:mc="http://schemas.openxmlformats.org/markup-compatibility/2006" xmlns:a14="http://schemas.microsoft.com/office/drawing/2010/main">
+        <mc:Choice Requires="a14">
           <p:sp>
             <p:nvSpPr>
               <p:cNvPr id="53" name="TextBox 52">
@@ -14290,6 +17780,7 @@
               </a:bodyPr>
               <a:lstStyle/>
               <a:p>
+                <a:pPr/>
                 <a14:m>
                   <m:oMathPara xmlns:m="http://schemas.openxmlformats.org/officeDocument/2006/math">
                     <m:oMathParaPr>
@@ -14342,7 +17833,7 @@
             </p:txBody>
           </p:sp>
         </mc:Choice>
-        <mc:Fallback>
+        <mc:Fallback xmlns="">
           <p:sp>
             <p:nvSpPr>
               <p:cNvPr id="53" name="TextBox 52">
@@ -14387,8 +17878,8 @@
           </p:sp>
         </mc:Fallback>
       </mc:AlternateContent>
-      <mc:AlternateContent xmlns:mc="http://schemas.openxmlformats.org/markup-compatibility/2006">
-        <mc:Choice xmlns:a14="http://schemas.microsoft.com/office/drawing/2010/main" Requires="a14">
+      <mc:AlternateContent xmlns:mc="http://schemas.openxmlformats.org/markup-compatibility/2006" xmlns:a14="http://schemas.microsoft.com/office/drawing/2010/main">
+        <mc:Choice Requires="a14">
           <p:sp>
             <p:nvSpPr>
               <p:cNvPr id="54" name="TextBox 53">
@@ -14417,6 +17908,7 @@
               </a:bodyPr>
               <a:lstStyle/>
               <a:p>
+                <a:pPr/>
                 <a14:m>
                   <m:oMathPara xmlns:m="http://schemas.openxmlformats.org/officeDocument/2006/math">
                     <m:oMathParaPr>
@@ -14426,7 +17918,7 @@
                       <m:sSub>
                         <m:sSubPr>
                           <m:ctrlPr>
-                            <a:rPr lang="ko-KR" altLang="en-US" smtClean="0">
+                            <a:rPr lang="ko-KR" altLang="en-US" i="1" smtClean="0">
                               <a:solidFill>
                                 <a:srgbClr val="FF0000"/>
                               </a:solidFill>
@@ -14469,7 +17961,7 @@
             </p:txBody>
           </p:sp>
         </mc:Choice>
-        <mc:Fallback>
+        <mc:Fallback xmlns="">
           <p:sp>
             <p:nvSpPr>
               <p:cNvPr id="54" name="TextBox 53">
@@ -14514,8 +18006,8 @@
           </p:sp>
         </mc:Fallback>
       </mc:AlternateContent>
-      <mc:AlternateContent xmlns:mc="http://schemas.openxmlformats.org/markup-compatibility/2006">
-        <mc:Choice xmlns:a14="http://schemas.microsoft.com/office/drawing/2010/main" Requires="a14">
+      <mc:AlternateContent xmlns:mc="http://schemas.openxmlformats.org/markup-compatibility/2006" xmlns:a14="http://schemas.microsoft.com/office/drawing/2010/main">
+        <mc:Choice Requires="a14">
           <p:sp>
             <p:nvSpPr>
               <p:cNvPr id="55" name="TextBox 54">
@@ -14544,6 +18036,7 @@
               </a:bodyPr>
               <a:lstStyle/>
               <a:p>
+                <a:pPr/>
                 <a14:m>
                   <m:oMathPara xmlns:m="http://schemas.openxmlformats.org/officeDocument/2006/math">
                     <m:oMathParaPr>
@@ -14553,7 +18046,7 @@
                       <m:sSub>
                         <m:sSubPr>
                           <m:ctrlPr>
-                            <a:rPr lang="ko-KR" altLang="en-US" smtClean="0">
+                            <a:rPr lang="ko-KR" altLang="en-US" i="1" smtClean="0">
                               <a:solidFill>
                                 <a:schemeClr val="tx1"/>
                               </a:solidFill>
@@ -14589,7 +18082,7 @@
                               </a:solidFill>
                               <a:latin typeface="Cambria Math" panose="02040503050406030204" pitchFamily="18" charset="0"/>
                             </a:rPr>
-                            <m:t>-1</m:t>
+                            <m:t>−1</m:t>
                           </m:r>
                         </m:sub>
                       </m:sSub>
@@ -14605,7 +18098,7 @@
             </p:txBody>
           </p:sp>
         </mc:Choice>
-        <mc:Fallback>
+        <mc:Fallback xmlns="">
           <p:sp>
             <p:nvSpPr>
               <p:cNvPr id="55" name="TextBox 54">
@@ -14650,8 +18143,8 @@
           </p:sp>
         </mc:Fallback>
       </mc:AlternateContent>
-      <mc:AlternateContent xmlns:mc="http://schemas.openxmlformats.org/markup-compatibility/2006">
-        <mc:Choice xmlns:a14="http://schemas.microsoft.com/office/drawing/2010/main" Requires="a14">
+      <mc:AlternateContent xmlns:mc="http://schemas.openxmlformats.org/markup-compatibility/2006" xmlns:a14="http://schemas.microsoft.com/office/drawing/2010/main">
+        <mc:Choice Requires="a14">
           <p:sp>
             <p:nvSpPr>
               <p:cNvPr id="56" name="TextBox 55">
@@ -14733,7 +18226,7 @@
             </p:txBody>
           </p:sp>
         </mc:Choice>
-        <mc:Fallback>
+        <mc:Fallback xmlns="">
           <p:sp>
             <p:nvSpPr>
               <p:cNvPr id="56" name="TextBox 55">
@@ -14778,8 +18271,8 @@
           </p:sp>
         </mc:Fallback>
       </mc:AlternateContent>
-      <mc:AlternateContent xmlns:mc="http://schemas.openxmlformats.org/markup-compatibility/2006">
-        <mc:Choice xmlns:a14="http://schemas.microsoft.com/office/drawing/2010/main" Requires="a14">
+      <mc:AlternateContent xmlns:mc="http://schemas.openxmlformats.org/markup-compatibility/2006" xmlns:a14="http://schemas.microsoft.com/office/drawing/2010/main">
+        <mc:Choice Requires="a14">
           <p:sp>
             <p:nvSpPr>
               <p:cNvPr id="57" name="TextBox 56">
@@ -14808,6 +18301,7 @@
               </a:bodyPr>
               <a:lstStyle/>
               <a:p>
+                <a:pPr/>
                 <a14:m>
                   <m:oMathPara xmlns:m="http://schemas.openxmlformats.org/officeDocument/2006/math">
                     <m:oMathParaPr>
@@ -14817,7 +18311,7 @@
                       <m:sSub>
                         <m:sSubPr>
                           <m:ctrlPr>
-                            <a:rPr lang="ko-KR" altLang="en-US" sz="2000" smtClean="0">
+                            <a:rPr lang="ko-KR" altLang="en-US" sz="2000" i="1" smtClean="0">
                               <a:latin typeface="Cambria Math" panose="02040503050406030204" pitchFamily="18" charset="0"/>
                             </a:rPr>
                           </m:ctrlPr>
@@ -14847,7 +18341,7 @@
             </p:txBody>
           </p:sp>
         </mc:Choice>
-        <mc:Fallback>
+        <mc:Fallback xmlns="">
           <p:sp>
             <p:nvSpPr>
               <p:cNvPr id="57" name="TextBox 56">
@@ -16070,7 +19564,7 @@
 </p:sld>
 </file>
 
-<file path=ppt/slides/slide8.xml><?xml version="1.0" encoding="utf-8"?>
+<file path=ppt/slides/slide9.xml><?xml version="1.0" encoding="utf-8"?>
 <p:sld xmlns:a="http://schemas.openxmlformats.org/drawingml/2006/main" xmlns:r="http://schemas.openxmlformats.org/officeDocument/2006/relationships" xmlns:p="http://schemas.openxmlformats.org/presentationml/2006/main">
   <p:cSld>
     <p:spTree>
@@ -16122,7 +19616,7 @@
             <a:fld id="{D57F1E4F-1CFF-5643-939E-217C01CDF565}" type="slidenum">
               <a:rPr lang="en-US" smtClean="0"/>
               <a:pPr/>
-              <a:t>8</a:t>
+              <a:t>9</a:t>
             </a:fld>
             <a:endParaRPr lang="en-US" dirty="0"/>
           </a:p>
@@ -16503,1293 +19997,6 @@
     <p:extLst>
       <p:ext uri="{BB962C8B-B14F-4D97-AF65-F5344CB8AC3E}">
         <p14:creationId xmlns:p14="http://schemas.microsoft.com/office/powerpoint/2010/main" val="4180074602"/>
-      </p:ext>
-    </p:extLst>
-  </p:cSld>
-  <p:clrMapOvr>
-    <a:masterClrMapping/>
-  </p:clrMapOvr>
-</p:sld>
-</file>
-
-<file path=ppt/slides/slide9.xml><?xml version="1.0" encoding="utf-8"?>
-<p:sld xmlns:a="http://schemas.openxmlformats.org/drawingml/2006/main" xmlns:r="http://schemas.openxmlformats.org/officeDocument/2006/relationships" xmlns:p="http://schemas.openxmlformats.org/presentationml/2006/main">
-  <p:cSld>
-    <p:spTree>
-      <p:nvGrpSpPr>
-        <p:cNvPr id="1" name="">
-          <a:extLst>
-            <a:ext uri="{FF2B5EF4-FFF2-40B4-BE49-F238E27FC236}">
-              <a16:creationId xmlns:a16="http://schemas.microsoft.com/office/drawing/2014/main" id="{7588426D-8F0A-9C95-EE6A-7E25361B4E84}"/>
-            </a:ext>
-          </a:extLst>
-        </p:cNvPr>
-        <p:cNvGrpSpPr/>
-        <p:nvPr/>
-      </p:nvGrpSpPr>
-      <p:grpSpPr>
-        <a:xfrm>
-          <a:off x="0" y="0"/>
-          <a:ext cx="0" cy="0"/>
-          <a:chOff x="0" y="0"/>
-          <a:chExt cx="0" cy="0"/>
-        </a:xfrm>
-      </p:grpSpPr>
-      <p:sp>
-        <p:nvSpPr>
-          <p:cNvPr id="4" name="슬라이드 번호 개체 틀 3">
-            <a:extLst>
-              <a:ext uri="{FF2B5EF4-FFF2-40B4-BE49-F238E27FC236}">
-                <a16:creationId xmlns:a16="http://schemas.microsoft.com/office/drawing/2014/main" id="{0CBC867F-634A-CA6A-7E8F-C93BE0151EF8}"/>
-              </a:ext>
-            </a:extLst>
-          </p:cNvPr>
-          <p:cNvSpPr>
-            <a:spLocks noGrp="1"/>
-          </p:cNvSpPr>
-          <p:nvPr>
-            <p:ph type="sldNum" sz="quarter" idx="12"/>
-          </p:nvPr>
-        </p:nvSpPr>
-        <p:spPr>
-          <a:xfrm>
-            <a:off x="10514011" y="6036261"/>
-            <a:ext cx="753545" cy="365125"/>
-          </a:xfrm>
-        </p:spPr>
-        <p:txBody>
-          <a:bodyPr/>
-          <a:lstStyle/>
-          <a:p>
-            <a:fld id="{D57F1E4F-1CFF-5643-939E-217C01CDF565}" type="slidenum">
-              <a:rPr lang="en-US" smtClean="0"/>
-              <a:pPr/>
-              <a:t>9</a:t>
-            </a:fld>
-            <a:endParaRPr lang="en-US" dirty="0"/>
-          </a:p>
-        </p:txBody>
-      </p:sp>
-      <p:sp>
-        <p:nvSpPr>
-          <p:cNvPr id="3" name="제목 1">
-            <a:extLst>
-              <a:ext uri="{FF2B5EF4-FFF2-40B4-BE49-F238E27FC236}">
-                <a16:creationId xmlns:a16="http://schemas.microsoft.com/office/drawing/2014/main" id="{33F4EFA4-4F17-3197-CE10-BB3BDAD9A141}"/>
-              </a:ext>
-            </a:extLst>
-          </p:cNvPr>
-          <p:cNvSpPr txBox="1">
-            <a:spLocks/>
-          </p:cNvSpPr>
-          <p:nvPr/>
-        </p:nvSpPr>
-        <p:spPr>
-          <a:xfrm>
-            <a:off x="475645" y="481983"/>
-            <a:ext cx="10353762" cy="766439"/>
-          </a:xfrm>
-          <a:prstGeom prst="rect">
-            <a:avLst/>
-          </a:prstGeom>
-        </p:spPr>
-        <p:txBody>
-          <a:bodyPr vert="horz" lIns="91440" tIns="45720" rIns="91440" bIns="45720" rtlCol="0" anchor="ctr">
-            <a:normAutofit/>
-          </a:bodyPr>
-          <a:lstStyle>
-            <a:lvl1pPr algn="ctr" defTabSz="914400" rtl="0" eaLnBrk="1" latinLnBrk="1" hangingPunct="1">
-              <a:lnSpc>
-                <a:spcPct val="90000"/>
-              </a:lnSpc>
-              <a:spcBef>
-                <a:spcPct val="0"/>
-              </a:spcBef>
-              <a:buNone/>
-              <a:defRPr sz="3200" kern="1200" cap="all" baseline="0">
-                <a:solidFill>
-                  <a:schemeClr val="tx1"/>
-                </a:solidFill>
-                <a:effectLst/>
-                <a:latin typeface="Batang" panose="02030600000101010101" pitchFamily="18" charset="-127"/>
-                <a:ea typeface="Batang" panose="02030600000101010101" pitchFamily="18" charset="-127"/>
-                <a:cs typeface="+mj-cs"/>
-              </a:defRPr>
-            </a:lvl1pPr>
-          </a:lstStyle>
-          <a:p>
-            <a:pPr algn="l"/>
-            <a:r>
-              <a:rPr lang="en-US" altLang="ko-KR" sz="2800" cap="none" dirty="0">
-                <a:solidFill>
-                  <a:schemeClr val="bg2">
-                    <a:lumMod val="25000"/>
-                  </a:schemeClr>
-                </a:solidFill>
-                <a:latin typeface="D2Coding" panose="020B0609020101020101" pitchFamily="49" charset="-127"/>
-                <a:ea typeface="D2Coding" panose="020B0609020101020101" pitchFamily="49" charset="-127"/>
-                <a:cs typeface="Segoe UI Light" panose="020B0502040204020203" pitchFamily="34" charset="0"/>
-              </a:rPr>
-              <a:t>Recurrent Neural Network (RNN)</a:t>
-            </a:r>
-            <a:endParaRPr lang="ko-KR" altLang="en-US" sz="2800" cap="none" dirty="0">
-              <a:solidFill>
-                <a:schemeClr val="bg2">
-                  <a:lumMod val="25000"/>
-                </a:schemeClr>
-              </a:solidFill>
-              <a:latin typeface="D2Coding" panose="020B0609020101020101" pitchFamily="49" charset="-127"/>
-              <a:ea typeface="D2Coding" panose="020B0609020101020101" pitchFamily="49" charset="-127"/>
-              <a:cs typeface="Segoe UI Light" panose="020B0502040204020203" pitchFamily="34" charset="0"/>
-            </a:endParaRPr>
-          </a:p>
-        </p:txBody>
-      </p:sp>
-      <p:sp>
-        <p:nvSpPr>
-          <p:cNvPr id="13" name="TextBox 12">
-            <a:extLst>
-              <a:ext uri="{FF2B5EF4-FFF2-40B4-BE49-F238E27FC236}">
-                <a16:creationId xmlns:a16="http://schemas.microsoft.com/office/drawing/2014/main" id="{E67D1473-2FE3-A86E-CE51-23B8E5AA8E21}"/>
-              </a:ext>
-            </a:extLst>
-          </p:cNvPr>
-          <p:cNvSpPr txBox="1"/>
-          <p:nvPr/>
-        </p:nvSpPr>
-        <p:spPr>
-          <a:xfrm>
-            <a:off x="629920" y="1390662"/>
-            <a:ext cx="9884091" cy="5093702"/>
-          </a:xfrm>
-          <a:prstGeom prst="rect">
-            <a:avLst/>
-          </a:prstGeom>
-          <a:solidFill>
-            <a:srgbClr val="76E3FF"/>
-          </a:solidFill>
-        </p:spPr>
-        <p:txBody>
-          <a:bodyPr wrap="square" rtlCol="0">
-            <a:spAutoFit/>
-          </a:bodyPr>
-          <a:lstStyle/>
-          <a:p>
-            <a:r>
-              <a:rPr lang="en-US" altLang="ko-KR" sz="1300" dirty="0">
-                <a:latin typeface="D2Coding" panose="020B0609020101020101" pitchFamily="49" charset="-127"/>
-                <a:ea typeface="D2Coding" panose="020B0609020101020101" pitchFamily="49" charset="-127"/>
-              </a:rPr>
-              <a:t>import </a:t>
-            </a:r>
-            <a:r>
-              <a:rPr lang="en-US" altLang="ko-KR" sz="1300" dirty="0" err="1">
-                <a:latin typeface="D2Coding" panose="020B0609020101020101" pitchFamily="49" charset="-127"/>
-                <a:ea typeface="D2Coding" panose="020B0609020101020101" pitchFamily="49" charset="-127"/>
-              </a:rPr>
-              <a:t>numpy</a:t>
-            </a:r>
-            <a:r>
-              <a:rPr lang="en-US" altLang="ko-KR" sz="1300" dirty="0">
-                <a:latin typeface="D2Coding" panose="020B0609020101020101" pitchFamily="49" charset="-127"/>
-                <a:ea typeface="D2Coding" panose="020B0609020101020101" pitchFamily="49" charset="-127"/>
-              </a:rPr>
-              <a:t> as np</a:t>
-            </a:r>
-          </a:p>
-          <a:p>
-            <a:r>
-              <a:rPr lang="en-US" altLang="ko-KR" sz="1300" dirty="0">
-                <a:latin typeface="D2Coding" panose="020B0609020101020101" pitchFamily="49" charset="-127"/>
-                <a:ea typeface="D2Coding" panose="020B0609020101020101" pitchFamily="49" charset="-127"/>
-              </a:rPr>
-              <a:t>from </a:t>
-            </a:r>
-            <a:r>
-              <a:rPr lang="en-US" altLang="ko-KR" sz="1300" dirty="0" err="1">
-                <a:latin typeface="D2Coding" panose="020B0609020101020101" pitchFamily="49" charset="-127"/>
-                <a:ea typeface="D2Coding" panose="020B0609020101020101" pitchFamily="49" charset="-127"/>
-              </a:rPr>
-              <a:t>gensim.models</a:t>
-            </a:r>
-            <a:r>
-              <a:rPr lang="en-US" altLang="ko-KR" sz="1300" dirty="0">
-                <a:latin typeface="D2Coding" panose="020B0609020101020101" pitchFamily="49" charset="-127"/>
-                <a:ea typeface="D2Coding" panose="020B0609020101020101" pitchFamily="49" charset="-127"/>
-              </a:rPr>
-              <a:t> import Word2Vec</a:t>
-            </a:r>
-          </a:p>
-          <a:p>
-            <a:endParaRPr lang="en-US" altLang="ko-KR" sz="1300" dirty="0">
-              <a:latin typeface="D2Coding" panose="020B0609020101020101" pitchFamily="49" charset="-127"/>
-              <a:ea typeface="D2Coding" panose="020B0609020101020101" pitchFamily="49" charset="-127"/>
-            </a:endParaRPr>
-          </a:p>
-          <a:p>
-            <a:r>
-              <a:rPr lang="en-US" altLang="ko-KR" sz="1300" dirty="0">
-                <a:latin typeface="D2Coding" panose="020B0609020101020101" pitchFamily="49" charset="-127"/>
-                <a:ea typeface="D2Coding" panose="020B0609020101020101" pitchFamily="49" charset="-127"/>
-              </a:rPr>
-              <a:t># 1. </a:t>
-            </a:r>
-            <a:r>
-              <a:rPr lang="ko-KR" altLang="en-US" sz="1300" dirty="0">
-                <a:latin typeface="D2Coding" panose="020B0609020101020101" pitchFamily="49" charset="-127"/>
-                <a:ea typeface="D2Coding" panose="020B0609020101020101" pitchFamily="49" charset="-127"/>
-              </a:rPr>
-              <a:t>예시 문장 데이터 </a:t>
-            </a:r>
-            <a:r>
-              <a:rPr lang="en-US" altLang="ko-KR" sz="1300" dirty="0">
-                <a:latin typeface="D2Coding" panose="020B0609020101020101" pitchFamily="49" charset="-127"/>
-                <a:ea typeface="D2Coding" panose="020B0609020101020101" pitchFamily="49" charset="-127"/>
-              </a:rPr>
-              <a:t>(Word2Vec </a:t>
-            </a:r>
-            <a:r>
-              <a:rPr lang="ko-KR" altLang="en-US" sz="1300" dirty="0">
-                <a:latin typeface="D2Coding" panose="020B0609020101020101" pitchFamily="49" charset="-127"/>
-                <a:ea typeface="D2Coding" panose="020B0609020101020101" pitchFamily="49" charset="-127"/>
-              </a:rPr>
-              <a:t>학습용 코퍼스</a:t>
-            </a:r>
-            <a:r>
-              <a:rPr lang="en-US" altLang="ko-KR" sz="1300" dirty="0">
-                <a:latin typeface="D2Coding" panose="020B0609020101020101" pitchFamily="49" charset="-127"/>
-                <a:ea typeface="D2Coding" panose="020B0609020101020101" pitchFamily="49" charset="-127"/>
-              </a:rPr>
-              <a:t>), </a:t>
-            </a:r>
-            <a:r>
-              <a:rPr lang="ko-KR" altLang="en-US" sz="1300" dirty="0">
-                <a:latin typeface="D2Coding" panose="020B0609020101020101" pitchFamily="49" charset="-127"/>
-                <a:ea typeface="D2Coding" panose="020B0609020101020101" pitchFamily="49" charset="-127"/>
-              </a:rPr>
-              <a:t>단어들이 모델 내부에서 학습될 수 있도록 리스트 형태로 제공</a:t>
-            </a:r>
-          </a:p>
-          <a:p>
-            <a:r>
-              <a:rPr lang="en-US" altLang="ko-KR" sz="1300" dirty="0">
-                <a:latin typeface="D2Coding" panose="020B0609020101020101" pitchFamily="49" charset="-127"/>
-                <a:ea typeface="D2Coding" panose="020B0609020101020101" pitchFamily="49" charset="-127"/>
-              </a:rPr>
-              <a:t>sentences = [["I", "am", “your”, “father”]]</a:t>
-            </a:r>
-          </a:p>
-          <a:p>
-            <a:endParaRPr lang="en-US" altLang="ko-KR" sz="1300" dirty="0">
-              <a:latin typeface="D2Coding" panose="020B0609020101020101" pitchFamily="49" charset="-127"/>
-              <a:ea typeface="D2Coding" panose="020B0609020101020101" pitchFamily="49" charset="-127"/>
-            </a:endParaRPr>
-          </a:p>
-          <a:p>
-            <a:r>
-              <a:rPr lang="en-US" altLang="ko-KR" sz="1300" dirty="0">
-                <a:latin typeface="D2Coding" panose="020B0609020101020101" pitchFamily="49" charset="-127"/>
-                <a:ea typeface="D2Coding" panose="020B0609020101020101" pitchFamily="49" charset="-127"/>
-              </a:rPr>
-              <a:t># 2. </a:t>
-            </a:r>
-            <a:r>
-              <a:rPr lang="en-US" altLang="ko-KR" sz="1300" dirty="0" err="1">
-                <a:latin typeface="D2Coding" panose="020B0609020101020101" pitchFamily="49" charset="-127"/>
-                <a:ea typeface="D2Coding" panose="020B0609020101020101" pitchFamily="49" charset="-127"/>
-              </a:rPr>
-              <a:t>Gensim</a:t>
-            </a:r>
-            <a:r>
-              <a:rPr lang="en-US" altLang="ko-KR" sz="1300" dirty="0">
-                <a:latin typeface="D2Coding" panose="020B0609020101020101" pitchFamily="49" charset="-127"/>
-                <a:ea typeface="D2Coding" panose="020B0609020101020101" pitchFamily="49" charset="-127"/>
-              </a:rPr>
-              <a:t> Word2Vec </a:t>
-            </a:r>
-            <a:r>
-              <a:rPr lang="ko-KR" altLang="en-US" sz="1300" dirty="0">
-                <a:latin typeface="D2Coding" panose="020B0609020101020101" pitchFamily="49" charset="-127"/>
-                <a:ea typeface="D2Coding" panose="020B0609020101020101" pitchFamily="49" charset="-127"/>
-              </a:rPr>
-              <a:t>모델 생성 및 학습</a:t>
-            </a:r>
-          </a:p>
-          <a:p>
-            <a:r>
-              <a:rPr lang="en-US" altLang="ko-KR" sz="1300" dirty="0">
-                <a:latin typeface="D2Coding" panose="020B0609020101020101" pitchFamily="49" charset="-127"/>
-                <a:ea typeface="D2Coding" panose="020B0609020101020101" pitchFamily="49" charset="-127"/>
-              </a:rPr>
-              <a:t># </a:t>
-            </a:r>
-            <a:r>
-              <a:rPr lang="en-US" altLang="ko-KR" sz="1300" dirty="0" err="1">
-                <a:latin typeface="D2Coding" panose="020B0609020101020101" pitchFamily="49" charset="-127"/>
-                <a:ea typeface="D2Coding" panose="020B0609020101020101" pitchFamily="49" charset="-127"/>
-              </a:rPr>
-              <a:t>vector_size</a:t>
-            </a:r>
-            <a:r>
-              <a:rPr lang="en-US" altLang="ko-KR" sz="1300" dirty="0">
-                <a:latin typeface="D2Coding" panose="020B0609020101020101" pitchFamily="49" charset="-127"/>
-                <a:ea typeface="D2Coding" panose="020B0609020101020101" pitchFamily="49" charset="-127"/>
-              </a:rPr>
-              <a:t>=4 : </a:t>
-            </a:r>
-            <a:r>
-              <a:rPr lang="ko-KR" altLang="en-US" sz="1300" dirty="0">
-                <a:latin typeface="D2Coding" panose="020B0609020101020101" pitchFamily="49" charset="-127"/>
-                <a:ea typeface="D2Coding" panose="020B0609020101020101" pitchFamily="49" charset="-127"/>
-              </a:rPr>
-              <a:t>단어 하나를 </a:t>
-            </a:r>
-            <a:r>
-              <a:rPr lang="en-US" altLang="ko-KR" sz="1300" dirty="0">
-                <a:latin typeface="D2Coding" panose="020B0609020101020101" pitchFamily="49" charset="-127"/>
-                <a:ea typeface="D2Coding" panose="020B0609020101020101" pitchFamily="49" charset="-127"/>
-              </a:rPr>
-              <a:t>4</a:t>
-            </a:r>
-            <a:r>
-              <a:rPr lang="ko-KR" altLang="en-US" sz="1300" dirty="0">
-                <a:latin typeface="D2Coding" panose="020B0609020101020101" pitchFamily="49" charset="-127"/>
-                <a:ea typeface="D2Coding" panose="020B0609020101020101" pitchFamily="49" charset="-127"/>
-              </a:rPr>
-              <a:t>차원 벡터로 표현하겠다는 의미 </a:t>
-            </a:r>
-            <a:r>
-              <a:rPr lang="en-US" altLang="ko-KR" sz="1300" dirty="0">
-                <a:latin typeface="D2Coding" panose="020B0609020101020101" pitchFamily="49" charset="-127"/>
-                <a:ea typeface="D2Coding" panose="020B0609020101020101" pitchFamily="49" charset="-127"/>
-              </a:rPr>
-              <a:t>(</a:t>
-            </a:r>
-            <a:r>
-              <a:rPr lang="en-US" altLang="ko-KR" sz="1300" dirty="0" err="1">
-                <a:latin typeface="D2Coding" panose="020B0609020101020101" pitchFamily="49" charset="-127"/>
-                <a:ea typeface="D2Coding" panose="020B0609020101020101" pitchFamily="49" charset="-127"/>
-              </a:rPr>
-              <a:t>input_size</a:t>
-            </a:r>
-            <a:r>
-              <a:rPr lang="en-US" altLang="ko-KR" sz="1300" dirty="0">
-                <a:latin typeface="D2Coding" panose="020B0609020101020101" pitchFamily="49" charset="-127"/>
-                <a:ea typeface="D2Coding" panose="020B0609020101020101" pitchFamily="49" charset="-127"/>
-              </a:rPr>
-              <a:t>=4)</a:t>
-            </a:r>
-          </a:p>
-          <a:p>
-            <a:r>
-              <a:rPr lang="en-US" altLang="ko-KR" sz="1300" dirty="0">
-                <a:latin typeface="D2Coding" panose="020B0609020101020101" pitchFamily="49" charset="-127"/>
-                <a:ea typeface="D2Coding" panose="020B0609020101020101" pitchFamily="49" charset="-127"/>
-              </a:rPr>
-              <a:t># </a:t>
-            </a:r>
-            <a:r>
-              <a:rPr lang="en-US" altLang="ko-KR" sz="1300" dirty="0" err="1">
-                <a:latin typeface="D2Coding" panose="020B0609020101020101" pitchFamily="49" charset="-127"/>
-                <a:ea typeface="D2Coding" panose="020B0609020101020101" pitchFamily="49" charset="-127"/>
-              </a:rPr>
-              <a:t>min_count</a:t>
-            </a:r>
-            <a:r>
-              <a:rPr lang="en-US" altLang="ko-KR" sz="1300" dirty="0">
-                <a:latin typeface="D2Coding" panose="020B0609020101020101" pitchFamily="49" charset="-127"/>
-                <a:ea typeface="D2Coding" panose="020B0609020101020101" pitchFamily="49" charset="-127"/>
-              </a:rPr>
-              <a:t>=1  : </a:t>
-            </a:r>
-            <a:r>
-              <a:rPr lang="ko-KR" altLang="en-US" sz="1300" dirty="0">
-                <a:latin typeface="D2Coding" panose="020B0609020101020101" pitchFamily="49" charset="-127"/>
-                <a:ea typeface="D2Coding" panose="020B0609020101020101" pitchFamily="49" charset="-127"/>
-              </a:rPr>
-              <a:t>빈도수가 </a:t>
-            </a:r>
-            <a:r>
-              <a:rPr lang="en-US" altLang="ko-KR" sz="1300" dirty="0">
-                <a:latin typeface="D2Coding" panose="020B0609020101020101" pitchFamily="49" charset="-127"/>
-                <a:ea typeface="D2Coding" panose="020B0609020101020101" pitchFamily="49" charset="-127"/>
-              </a:rPr>
-              <a:t>1</a:t>
-            </a:r>
-            <a:r>
-              <a:rPr lang="ko-KR" altLang="en-US" sz="1300" dirty="0">
-                <a:latin typeface="D2Coding" panose="020B0609020101020101" pitchFamily="49" charset="-127"/>
-                <a:ea typeface="D2Coding" panose="020B0609020101020101" pitchFamily="49" charset="-127"/>
-              </a:rPr>
-              <a:t>번만 나와도 단어장에 포함</a:t>
-            </a:r>
-            <a:r>
-              <a:rPr lang="en-US" altLang="ko-KR" sz="1300" dirty="0">
-                <a:latin typeface="D2Coding" panose="020B0609020101020101" pitchFamily="49" charset="-127"/>
-                <a:ea typeface="D2Coding" panose="020B0609020101020101" pitchFamily="49" charset="-127"/>
-              </a:rPr>
-              <a:t>, window=2 : </a:t>
-            </a:r>
-            <a:r>
-              <a:rPr lang="ko-KR" altLang="en-US" sz="1300" dirty="0">
-                <a:latin typeface="D2Coding" panose="020B0609020101020101" pitchFamily="49" charset="-127"/>
-                <a:ea typeface="D2Coding" panose="020B0609020101020101" pitchFamily="49" charset="-127"/>
-              </a:rPr>
-              <a:t>문맥을 파악할 앞뒤 단어의 범위</a:t>
-            </a:r>
-          </a:p>
-          <a:p>
-            <a:r>
-              <a:rPr lang="en-US" altLang="ko-KR" sz="1300" dirty="0">
-                <a:latin typeface="D2Coding" panose="020B0609020101020101" pitchFamily="49" charset="-127"/>
-                <a:ea typeface="D2Coding" panose="020B0609020101020101" pitchFamily="49" charset="-127"/>
-              </a:rPr>
-              <a:t>model = Word2Vec(sentences, </a:t>
-            </a:r>
-            <a:r>
-              <a:rPr lang="en-US" altLang="ko-KR" sz="1300" dirty="0" err="1">
-                <a:latin typeface="D2Coding" panose="020B0609020101020101" pitchFamily="49" charset="-127"/>
-                <a:ea typeface="D2Coding" panose="020B0609020101020101" pitchFamily="49" charset="-127"/>
-              </a:rPr>
-              <a:t>vector_size</a:t>
-            </a:r>
-            <a:r>
-              <a:rPr lang="en-US" altLang="ko-KR" sz="1300" dirty="0">
-                <a:latin typeface="D2Coding" panose="020B0609020101020101" pitchFamily="49" charset="-127"/>
-                <a:ea typeface="D2Coding" panose="020B0609020101020101" pitchFamily="49" charset="-127"/>
-              </a:rPr>
-              <a:t>=4, </a:t>
-            </a:r>
-            <a:r>
-              <a:rPr lang="en-US" altLang="ko-KR" sz="1300" dirty="0" err="1">
-                <a:latin typeface="D2Coding" panose="020B0609020101020101" pitchFamily="49" charset="-127"/>
-                <a:ea typeface="D2Coding" panose="020B0609020101020101" pitchFamily="49" charset="-127"/>
-              </a:rPr>
-              <a:t>min_count</a:t>
-            </a:r>
-            <a:r>
-              <a:rPr lang="en-US" altLang="ko-KR" sz="1300" dirty="0">
-                <a:latin typeface="D2Coding" panose="020B0609020101020101" pitchFamily="49" charset="-127"/>
-                <a:ea typeface="D2Coding" panose="020B0609020101020101" pitchFamily="49" charset="-127"/>
-              </a:rPr>
-              <a:t>=1, window=2, epochs=100, seed=42)</a:t>
-            </a:r>
-          </a:p>
-          <a:p>
-            <a:endParaRPr lang="en-US" altLang="ko-KR" sz="1300" dirty="0">
-              <a:latin typeface="D2Coding" panose="020B0609020101020101" pitchFamily="49" charset="-127"/>
-              <a:ea typeface="D2Coding" panose="020B0609020101020101" pitchFamily="49" charset="-127"/>
-            </a:endParaRPr>
-          </a:p>
-          <a:p>
-            <a:r>
-              <a:rPr lang="en-US" altLang="ko-KR" sz="1300" dirty="0">
-                <a:latin typeface="D2Coding" panose="020B0609020101020101" pitchFamily="49" charset="-127"/>
-                <a:ea typeface="D2Coding" panose="020B0609020101020101" pitchFamily="49" charset="-127"/>
-              </a:rPr>
-              <a:t># 3. RNN</a:t>
-            </a:r>
-            <a:r>
-              <a:rPr lang="ko-KR" altLang="en-US" sz="1300" dirty="0">
-                <a:latin typeface="D2Coding" panose="020B0609020101020101" pitchFamily="49" charset="-127"/>
-                <a:ea typeface="D2Coding" panose="020B0609020101020101" pitchFamily="49" charset="-127"/>
-              </a:rPr>
-              <a:t>에 입력할 데이터 구조</a:t>
-            </a:r>
-            <a:r>
-              <a:rPr lang="en-US" altLang="ko-KR" sz="1300" dirty="0">
-                <a:latin typeface="D2Coding" panose="020B0609020101020101" pitchFamily="49" charset="-127"/>
-                <a:ea typeface="D2Coding" panose="020B0609020101020101" pitchFamily="49" charset="-127"/>
-              </a:rPr>
-              <a:t>(Matrix) </a:t>
-            </a:r>
-            <a:r>
-              <a:rPr lang="ko-KR" altLang="en-US" sz="1300" dirty="0">
-                <a:latin typeface="D2Coding" panose="020B0609020101020101" pitchFamily="49" charset="-127"/>
-                <a:ea typeface="D2Coding" panose="020B0609020101020101" pitchFamily="49" charset="-127"/>
-              </a:rPr>
-              <a:t>만들기</a:t>
-            </a:r>
-          </a:p>
-          <a:p>
-            <a:r>
-              <a:rPr lang="en-US" altLang="ko-KR" sz="1300" dirty="0">
-                <a:latin typeface="D2Coding" panose="020B0609020101020101" pitchFamily="49" charset="-127"/>
-                <a:ea typeface="D2Coding" panose="020B0609020101020101" pitchFamily="49" charset="-127"/>
-              </a:rPr>
-              <a:t>timesteps = 4    # </a:t>
-            </a:r>
-            <a:r>
-              <a:rPr lang="ko-KR" altLang="en-US" sz="1300" dirty="0">
-                <a:latin typeface="D2Coding" panose="020B0609020101020101" pitchFamily="49" charset="-127"/>
-                <a:ea typeface="D2Coding" panose="020B0609020101020101" pitchFamily="49" charset="-127"/>
-              </a:rPr>
-              <a:t>문장 속 단어의 수 </a:t>
-            </a:r>
-            <a:r>
-              <a:rPr lang="en-US" altLang="ko-KR" sz="1300" dirty="0">
-                <a:latin typeface="D2Coding" panose="020B0609020101020101" pitchFamily="49" charset="-127"/>
-                <a:ea typeface="D2Coding" panose="020B0609020101020101" pitchFamily="49" charset="-127"/>
-              </a:rPr>
-              <a:t>(“I”, “am”, “your", "father")</a:t>
-            </a:r>
-          </a:p>
-          <a:p>
-            <a:r>
-              <a:rPr lang="en-US" altLang="ko-KR" sz="1300" dirty="0" err="1">
-                <a:latin typeface="D2Coding" panose="020B0609020101020101" pitchFamily="49" charset="-127"/>
-                <a:ea typeface="D2Coding" panose="020B0609020101020101" pitchFamily="49" charset="-127"/>
-              </a:rPr>
-              <a:t>input_size</a:t>
-            </a:r>
-            <a:r>
-              <a:rPr lang="en-US" altLang="ko-KR" sz="1300" dirty="0">
-                <a:latin typeface="D2Coding" panose="020B0609020101020101" pitchFamily="49" charset="-127"/>
-                <a:ea typeface="D2Coding" panose="020B0609020101020101" pitchFamily="49" charset="-127"/>
-              </a:rPr>
-              <a:t> = 4   # Word2Vec </a:t>
-            </a:r>
-            <a:r>
-              <a:rPr lang="ko-KR" altLang="en-US" sz="1300" dirty="0" err="1">
-                <a:latin typeface="D2Coding" panose="020B0609020101020101" pitchFamily="49" charset="-127"/>
-                <a:ea typeface="D2Coding" panose="020B0609020101020101" pitchFamily="49" charset="-127"/>
-              </a:rPr>
-              <a:t>임베딩</a:t>
-            </a:r>
-            <a:r>
-              <a:rPr lang="ko-KR" altLang="en-US" sz="1300" dirty="0">
-                <a:latin typeface="D2Coding" panose="020B0609020101020101" pitchFamily="49" charset="-127"/>
-                <a:ea typeface="D2Coding" panose="020B0609020101020101" pitchFamily="49" charset="-127"/>
-              </a:rPr>
-              <a:t> 차원수</a:t>
-            </a:r>
-          </a:p>
-          <a:p>
-            <a:r>
-              <a:rPr lang="en-US" altLang="ko-KR" sz="1300" dirty="0" err="1">
-                <a:latin typeface="D2Coding" panose="020B0609020101020101" pitchFamily="49" charset="-127"/>
-                <a:ea typeface="D2Coding" panose="020B0609020101020101" pitchFamily="49" charset="-127"/>
-              </a:rPr>
-              <a:t>hidden_size</a:t>
-            </a:r>
-            <a:r>
-              <a:rPr lang="en-US" altLang="ko-KR" sz="1300" dirty="0">
-                <a:latin typeface="D2Coding" panose="020B0609020101020101" pitchFamily="49" charset="-127"/>
-                <a:ea typeface="D2Coding" panose="020B0609020101020101" pitchFamily="49" charset="-127"/>
-              </a:rPr>
-              <a:t> = 2  # </a:t>
-            </a:r>
-            <a:r>
-              <a:rPr lang="ko-KR" altLang="en-US" sz="1300" dirty="0">
-                <a:latin typeface="D2Coding" panose="020B0609020101020101" pitchFamily="49" charset="-127"/>
-                <a:ea typeface="D2Coding" panose="020B0609020101020101" pitchFamily="49" charset="-127"/>
-              </a:rPr>
-              <a:t>은닉 상태의 크기 </a:t>
-            </a:r>
-            <a:r>
-              <a:rPr lang="en-US" altLang="ko-KR" sz="1300" dirty="0">
-                <a:latin typeface="D2Coding" panose="020B0609020101020101" pitchFamily="49" charset="-127"/>
-                <a:ea typeface="D2Coding" panose="020B0609020101020101" pitchFamily="49" charset="-127"/>
-              </a:rPr>
-              <a:t>(</a:t>
-            </a:r>
-            <a:r>
-              <a:rPr lang="ko-KR" altLang="en-US" sz="1300" dirty="0">
-                <a:latin typeface="D2Coding" panose="020B0609020101020101" pitchFamily="49" charset="-127"/>
-                <a:ea typeface="D2Coding" panose="020B0609020101020101" pitchFamily="49" charset="-127"/>
-              </a:rPr>
-              <a:t>기억 방의 개수</a:t>
-            </a:r>
-            <a:r>
-              <a:rPr lang="en-US" altLang="ko-KR" sz="1300" dirty="0">
-                <a:latin typeface="D2Coding" panose="020B0609020101020101" pitchFamily="49" charset="-127"/>
-                <a:ea typeface="D2Coding" panose="020B0609020101020101" pitchFamily="49" charset="-127"/>
-              </a:rPr>
-              <a:t>)</a:t>
-            </a:r>
-          </a:p>
-          <a:p>
-            <a:endParaRPr lang="en-US" altLang="ko-KR" sz="1300" dirty="0">
-              <a:latin typeface="D2Coding" panose="020B0609020101020101" pitchFamily="49" charset="-127"/>
-              <a:ea typeface="D2Coding" panose="020B0609020101020101" pitchFamily="49" charset="-127"/>
-            </a:endParaRPr>
-          </a:p>
-          <a:p>
-            <a:r>
-              <a:rPr lang="en-US" altLang="ko-KR" sz="1300" dirty="0">
-                <a:latin typeface="D2Coding" panose="020B0609020101020101" pitchFamily="49" charset="-127"/>
-                <a:ea typeface="D2Coding" panose="020B0609020101020101" pitchFamily="49" charset="-127"/>
-              </a:rPr>
-              <a:t># 4</a:t>
-            </a:r>
-            <a:r>
-              <a:rPr lang="ko-KR" altLang="en-US" sz="1300" dirty="0">
-                <a:latin typeface="D2Coding" panose="020B0609020101020101" pitchFamily="49" charset="-127"/>
-                <a:ea typeface="D2Coding" panose="020B0609020101020101" pitchFamily="49" charset="-127"/>
-              </a:rPr>
-              <a:t>차원 벡터로 변환된 단어들을 순서대로 담을 빈 행렬 생성 </a:t>
-            </a:r>
-            <a:r>
-              <a:rPr lang="en-US" altLang="ko-KR" sz="1300" dirty="0">
-                <a:latin typeface="D2Coding" panose="020B0609020101020101" pitchFamily="49" charset="-127"/>
-                <a:ea typeface="D2Coding" panose="020B0609020101020101" pitchFamily="49" charset="-127"/>
-              </a:rPr>
-              <a:t>- </a:t>
-            </a:r>
-            <a:r>
-              <a:rPr lang="ko-KR" altLang="en-US" sz="1300" dirty="0">
-                <a:latin typeface="D2Coding" panose="020B0609020101020101" pitchFamily="49" charset="-127"/>
-                <a:ea typeface="D2Coding" panose="020B0609020101020101" pitchFamily="49" charset="-127"/>
-              </a:rPr>
-              <a:t>크기</a:t>
-            </a:r>
-            <a:r>
-              <a:rPr lang="en-US" altLang="ko-KR" sz="1300" dirty="0">
-                <a:latin typeface="D2Coding" panose="020B0609020101020101" pitchFamily="49" charset="-127"/>
-                <a:ea typeface="D2Coding" panose="020B0609020101020101" pitchFamily="49" charset="-127"/>
-              </a:rPr>
-              <a:t>: (4, 4)</a:t>
-            </a:r>
-          </a:p>
-          <a:p>
-            <a:r>
-              <a:rPr lang="en-US" altLang="ko-KR" sz="1300" dirty="0">
-                <a:latin typeface="D2Coding" panose="020B0609020101020101" pitchFamily="49" charset="-127"/>
-                <a:ea typeface="D2Coding" panose="020B0609020101020101" pitchFamily="49" charset="-127"/>
-              </a:rPr>
-              <a:t>inputs = </a:t>
-            </a:r>
-            <a:r>
-              <a:rPr lang="en-US" altLang="ko-KR" sz="1300" dirty="0" err="1">
-                <a:latin typeface="D2Coding" panose="020B0609020101020101" pitchFamily="49" charset="-127"/>
-                <a:ea typeface="D2Coding" panose="020B0609020101020101" pitchFamily="49" charset="-127"/>
-              </a:rPr>
-              <a:t>np.zeros</a:t>
-            </a:r>
-            <a:r>
-              <a:rPr lang="en-US" altLang="ko-KR" sz="1300" dirty="0">
-                <a:latin typeface="D2Coding" panose="020B0609020101020101" pitchFamily="49" charset="-127"/>
-                <a:ea typeface="D2Coding" panose="020B0609020101020101" pitchFamily="49" charset="-127"/>
-              </a:rPr>
-              <a:t>((timesteps, </a:t>
-            </a:r>
-            <a:r>
-              <a:rPr lang="en-US" altLang="ko-KR" sz="1300" dirty="0" err="1">
-                <a:latin typeface="D2Coding" panose="020B0609020101020101" pitchFamily="49" charset="-127"/>
-                <a:ea typeface="D2Coding" panose="020B0609020101020101" pitchFamily="49" charset="-127"/>
-              </a:rPr>
-              <a:t>input_size</a:t>
-            </a:r>
-            <a:r>
-              <a:rPr lang="en-US" altLang="ko-KR" sz="1300" dirty="0">
-                <a:latin typeface="D2Coding" panose="020B0609020101020101" pitchFamily="49" charset="-127"/>
-                <a:ea typeface="D2Coding" panose="020B0609020101020101" pitchFamily="49" charset="-127"/>
-              </a:rPr>
-              <a:t>))</a:t>
-            </a:r>
-          </a:p>
-          <a:p>
-            <a:endParaRPr lang="en-US" altLang="ko-KR" sz="1300" dirty="0">
-              <a:latin typeface="D2Coding" panose="020B0609020101020101" pitchFamily="49" charset="-127"/>
-              <a:ea typeface="D2Coding" panose="020B0609020101020101" pitchFamily="49" charset="-127"/>
-            </a:endParaRPr>
-          </a:p>
-          <a:p>
-            <a:r>
-              <a:rPr lang="en-US" altLang="ko-KR" sz="1300" dirty="0">
-                <a:latin typeface="D2Coding" panose="020B0609020101020101" pitchFamily="49" charset="-127"/>
-                <a:ea typeface="D2Coding" panose="020B0609020101020101" pitchFamily="49" charset="-127"/>
-              </a:rPr>
-              <a:t># </a:t>
-            </a:r>
-            <a:r>
-              <a:rPr lang="ko-KR" altLang="en-US" sz="1300" dirty="0">
-                <a:latin typeface="D2Coding" panose="020B0609020101020101" pitchFamily="49" charset="-127"/>
-                <a:ea typeface="D2Coding" panose="020B0609020101020101" pitchFamily="49" charset="-127"/>
-              </a:rPr>
-              <a:t>단어 순서대로 </a:t>
-            </a:r>
-            <a:r>
-              <a:rPr lang="en-US" altLang="ko-KR" sz="1300" dirty="0">
-                <a:latin typeface="D2Coding" panose="020B0609020101020101" pitchFamily="49" charset="-127"/>
-                <a:ea typeface="D2Coding" panose="020B0609020101020101" pitchFamily="49" charset="-127"/>
-              </a:rPr>
-              <a:t>Word2Vec</a:t>
-            </a:r>
-            <a:r>
-              <a:rPr lang="ko-KR" altLang="en-US" sz="1300" dirty="0">
-                <a:latin typeface="D2Coding" panose="020B0609020101020101" pitchFamily="49" charset="-127"/>
-                <a:ea typeface="D2Coding" panose="020B0609020101020101" pitchFamily="49" charset="-127"/>
-              </a:rPr>
-              <a:t>에서 </a:t>
-            </a:r>
-            <a:r>
-              <a:rPr lang="ko-KR" altLang="en-US" sz="1300" dirty="0" err="1">
-                <a:latin typeface="D2Coding" panose="020B0609020101020101" pitchFamily="49" charset="-127"/>
-                <a:ea typeface="D2Coding" panose="020B0609020101020101" pitchFamily="49" charset="-127"/>
-              </a:rPr>
-              <a:t>벡터값을</a:t>
-            </a:r>
-            <a:r>
-              <a:rPr lang="ko-KR" altLang="en-US" sz="1300" dirty="0">
-                <a:latin typeface="D2Coding" panose="020B0609020101020101" pitchFamily="49" charset="-127"/>
-                <a:ea typeface="D2Coding" panose="020B0609020101020101" pitchFamily="49" charset="-127"/>
-              </a:rPr>
-              <a:t> 추출하여 행렬에 </a:t>
-            </a:r>
-            <a:r>
-              <a:rPr lang="ko-KR" altLang="en-US" sz="1300" dirty="0" err="1">
-                <a:latin typeface="D2Coding" panose="020B0609020101020101" pitchFamily="49" charset="-127"/>
-                <a:ea typeface="D2Coding" panose="020B0609020101020101" pitchFamily="49" charset="-127"/>
-              </a:rPr>
-              <a:t>채워넣기</a:t>
-            </a:r>
-            <a:endParaRPr lang="ko-KR" altLang="en-US" sz="1300" dirty="0">
-              <a:latin typeface="D2Coding" panose="020B0609020101020101" pitchFamily="49" charset="-127"/>
-              <a:ea typeface="D2Coding" panose="020B0609020101020101" pitchFamily="49" charset="-127"/>
-            </a:endParaRPr>
-          </a:p>
-          <a:p>
-            <a:r>
-              <a:rPr lang="en-US" altLang="ko-KR" sz="1300" dirty="0" err="1">
-                <a:latin typeface="D2Coding" panose="020B0609020101020101" pitchFamily="49" charset="-127"/>
-                <a:ea typeface="D2Coding" panose="020B0609020101020101" pitchFamily="49" charset="-127"/>
-              </a:rPr>
-              <a:t>word_list</a:t>
-            </a:r>
-            <a:r>
-              <a:rPr lang="en-US" altLang="ko-KR" sz="1300" dirty="0">
-                <a:latin typeface="D2Coding" panose="020B0609020101020101" pitchFamily="49" charset="-127"/>
-                <a:ea typeface="D2Coding" panose="020B0609020101020101" pitchFamily="49" charset="-127"/>
-              </a:rPr>
-              <a:t> = ["I", "am", “your", "father"] # Changed to match the training data</a:t>
-            </a:r>
-          </a:p>
-          <a:p>
-            <a:r>
-              <a:rPr lang="en-US" altLang="ko-KR" sz="1300" dirty="0">
-                <a:latin typeface="D2Coding" panose="020B0609020101020101" pitchFamily="49" charset="-127"/>
-                <a:ea typeface="D2Coding" panose="020B0609020101020101" pitchFamily="49" charset="-127"/>
-              </a:rPr>
-              <a:t>for </a:t>
-            </a:r>
-            <a:r>
-              <a:rPr lang="en-US" altLang="ko-KR" sz="1300" dirty="0" err="1">
-                <a:latin typeface="D2Coding" panose="020B0609020101020101" pitchFamily="49" charset="-127"/>
-                <a:ea typeface="D2Coding" panose="020B0609020101020101" pitchFamily="49" charset="-127"/>
-              </a:rPr>
-              <a:t>i</a:t>
-            </a:r>
-            <a:r>
-              <a:rPr lang="en-US" altLang="ko-KR" sz="1300" dirty="0">
-                <a:latin typeface="D2Coding" panose="020B0609020101020101" pitchFamily="49" charset="-127"/>
-                <a:ea typeface="D2Coding" panose="020B0609020101020101" pitchFamily="49" charset="-127"/>
-              </a:rPr>
-              <a:t>, word in enumerate(</a:t>
-            </a:r>
-            <a:r>
-              <a:rPr lang="en-US" altLang="ko-KR" sz="1300" dirty="0" err="1">
-                <a:latin typeface="D2Coding" panose="020B0609020101020101" pitchFamily="49" charset="-127"/>
-                <a:ea typeface="D2Coding" panose="020B0609020101020101" pitchFamily="49" charset="-127"/>
-              </a:rPr>
-              <a:t>word_list</a:t>
-            </a:r>
-            <a:r>
-              <a:rPr lang="en-US" altLang="ko-KR" sz="1300" dirty="0">
-                <a:latin typeface="D2Coding" panose="020B0609020101020101" pitchFamily="49" charset="-127"/>
-                <a:ea typeface="D2Coding" panose="020B0609020101020101" pitchFamily="49" charset="-127"/>
-              </a:rPr>
-              <a:t>):</a:t>
-            </a:r>
-          </a:p>
-          <a:p>
-            <a:r>
-              <a:rPr lang="en-US" altLang="ko-KR" sz="1300" dirty="0">
-                <a:latin typeface="D2Coding" panose="020B0609020101020101" pitchFamily="49" charset="-127"/>
-                <a:ea typeface="D2Coding" panose="020B0609020101020101" pitchFamily="49" charset="-127"/>
-              </a:rPr>
-              <a:t>    inputs[</a:t>
-            </a:r>
-            <a:r>
-              <a:rPr lang="en-US" altLang="ko-KR" sz="1300" dirty="0" err="1">
-                <a:latin typeface="D2Coding" panose="020B0609020101020101" pitchFamily="49" charset="-127"/>
-                <a:ea typeface="D2Coding" panose="020B0609020101020101" pitchFamily="49" charset="-127"/>
-              </a:rPr>
-              <a:t>i</a:t>
-            </a:r>
-            <a:r>
-              <a:rPr lang="en-US" altLang="ko-KR" sz="1300" dirty="0">
-                <a:latin typeface="D2Coding" panose="020B0609020101020101" pitchFamily="49" charset="-127"/>
-                <a:ea typeface="D2Coding" panose="020B0609020101020101" pitchFamily="49" charset="-127"/>
-              </a:rPr>
-              <a:t>] = </a:t>
-            </a:r>
-            <a:r>
-              <a:rPr lang="en-US" altLang="ko-KR" sz="1300" dirty="0" err="1">
-                <a:latin typeface="D2Coding" panose="020B0609020101020101" pitchFamily="49" charset="-127"/>
-                <a:ea typeface="D2Coding" panose="020B0609020101020101" pitchFamily="49" charset="-127"/>
-              </a:rPr>
-              <a:t>model.wv</a:t>
-            </a:r>
-            <a:r>
-              <a:rPr lang="en-US" altLang="ko-KR" sz="1300" dirty="0">
-                <a:latin typeface="D2Coding" panose="020B0609020101020101" pitchFamily="49" charset="-127"/>
-                <a:ea typeface="D2Coding" panose="020B0609020101020101" pitchFamily="49" charset="-127"/>
-              </a:rPr>
-              <a:t>[word]  # </a:t>
-            </a:r>
-            <a:r>
-              <a:rPr lang="ko-KR" altLang="en-US" sz="1300" dirty="0">
-                <a:latin typeface="D2Coding" panose="020B0609020101020101" pitchFamily="49" charset="-127"/>
-                <a:ea typeface="D2Coding" panose="020B0609020101020101" pitchFamily="49" charset="-127"/>
-              </a:rPr>
-              <a:t>각 단어의 </a:t>
-            </a:r>
-            <a:r>
-              <a:rPr lang="en-US" altLang="ko-KR" sz="1300" dirty="0">
-                <a:latin typeface="D2Coding" panose="020B0609020101020101" pitchFamily="49" charset="-127"/>
-                <a:ea typeface="D2Coding" panose="020B0609020101020101" pitchFamily="49" charset="-127"/>
-              </a:rPr>
-              <a:t>4</a:t>
-            </a:r>
-            <a:r>
-              <a:rPr lang="ko-KR" altLang="en-US" sz="1300" dirty="0">
-                <a:latin typeface="D2Coding" panose="020B0609020101020101" pitchFamily="49" charset="-127"/>
-                <a:ea typeface="D2Coding" panose="020B0609020101020101" pitchFamily="49" charset="-127"/>
-              </a:rPr>
-              <a:t>차원 실수 </a:t>
-            </a:r>
-            <a:r>
-              <a:rPr lang="ko-KR" altLang="en-US" sz="1300" dirty="0" err="1">
-                <a:latin typeface="D2Coding" panose="020B0609020101020101" pitchFamily="49" charset="-127"/>
-                <a:ea typeface="D2Coding" panose="020B0609020101020101" pitchFamily="49" charset="-127"/>
-              </a:rPr>
-              <a:t>벡터값</a:t>
-            </a:r>
-            <a:r>
-              <a:rPr lang="ko-KR" altLang="en-US" sz="1300" dirty="0">
-                <a:latin typeface="D2Coding" panose="020B0609020101020101" pitchFamily="49" charset="-127"/>
-                <a:ea typeface="D2Coding" panose="020B0609020101020101" pitchFamily="49" charset="-127"/>
-              </a:rPr>
-              <a:t> 대입</a:t>
-            </a:r>
-          </a:p>
-          <a:p>
-            <a:r>
-              <a:rPr lang="en-US" altLang="ko-KR" sz="1300" dirty="0">
-                <a:latin typeface="D2Coding" panose="020B0609020101020101" pitchFamily="49" charset="-127"/>
-                <a:ea typeface="D2Coding" panose="020B0609020101020101" pitchFamily="49" charset="-127"/>
-              </a:rPr>
-              <a:t>print("=== </a:t>
-            </a:r>
-            <a:r>
-              <a:rPr lang="en-US" altLang="ko-KR" sz="1300" dirty="0" err="1">
-                <a:latin typeface="D2Coding" panose="020B0609020101020101" pitchFamily="49" charset="-127"/>
-                <a:ea typeface="D2Coding" panose="020B0609020101020101" pitchFamily="49" charset="-127"/>
-              </a:rPr>
-              <a:t>Gensim</a:t>
-            </a:r>
-            <a:r>
-              <a:rPr lang="ko-KR" altLang="en-US" sz="1300" dirty="0">
-                <a:latin typeface="D2Coding" panose="020B0609020101020101" pitchFamily="49" charset="-127"/>
-                <a:ea typeface="D2Coding" panose="020B0609020101020101" pitchFamily="49" charset="-127"/>
-              </a:rPr>
-              <a:t>으로 생성된 실제 텍스트 입력 데이터 </a:t>
-            </a:r>
-            <a:r>
-              <a:rPr lang="en-US" altLang="ko-KR" sz="1300" dirty="0">
-                <a:latin typeface="D2Coding" panose="020B0609020101020101" pitchFamily="49" charset="-127"/>
-                <a:ea typeface="D2Coding" panose="020B0609020101020101" pitchFamily="49" charset="-127"/>
-              </a:rPr>
-              <a:t>(</a:t>
-            </a:r>
-            <a:r>
-              <a:rPr lang="ko-KR" altLang="en-US" sz="1300" dirty="0">
-                <a:latin typeface="D2Coding" panose="020B0609020101020101" pitchFamily="49" charset="-127"/>
-                <a:ea typeface="D2Coding" panose="020B0609020101020101" pitchFamily="49" charset="-127"/>
-              </a:rPr>
-              <a:t>크기</a:t>
-            </a:r>
-            <a:r>
-              <a:rPr lang="en-US" altLang="ko-KR" sz="1300" dirty="0">
-                <a:latin typeface="D2Coding" panose="020B0609020101020101" pitchFamily="49" charset="-127"/>
-                <a:ea typeface="D2Coding" panose="020B0609020101020101" pitchFamily="49" charset="-127"/>
-              </a:rPr>
-              <a:t>: 4x4) ===")</a:t>
-            </a:r>
-          </a:p>
-          <a:p>
-            <a:r>
-              <a:rPr lang="en-US" altLang="ko-KR" sz="1300" dirty="0">
-                <a:latin typeface="D2Coding" panose="020B0609020101020101" pitchFamily="49" charset="-127"/>
-                <a:ea typeface="D2Coding" panose="020B0609020101020101" pitchFamily="49" charset="-127"/>
-              </a:rPr>
-              <a:t>print(inputs)</a:t>
-            </a:r>
-          </a:p>
-        </p:txBody>
-      </p:sp>
-      <p:pic>
-        <p:nvPicPr>
-          <p:cNvPr id="8194" name="Picture 2" descr="Darth Vader I Am Your Father Star Wars Movie Film Sci-fi Quote Picture  Poster | eBay">
-            <a:extLst>
-              <a:ext uri="{FF2B5EF4-FFF2-40B4-BE49-F238E27FC236}">
-                <a16:creationId xmlns:a16="http://schemas.microsoft.com/office/drawing/2014/main" id="{FE1CFB7F-8D0D-C3A5-AE3C-E294A70BAAA0}"/>
-              </a:ext>
-            </a:extLst>
-          </p:cNvPr>
-          <p:cNvPicPr>
-            <a:picLocks noChangeAspect="1" noChangeArrowheads="1"/>
-          </p:cNvPicPr>
-          <p:nvPr/>
-        </p:nvPicPr>
-        <p:blipFill>
-          <a:blip r:embed="rId2">
-            <a:extLst>
-              <a:ext uri="{28A0092B-C50C-407E-A947-70E740481C1C}">
-                <a14:useLocalDpi xmlns:a14="http://schemas.microsoft.com/office/drawing/2010/main" val="0"/>
-              </a:ext>
-            </a:extLst>
-          </a:blip>
-          <a:srcRect/>
-          <a:stretch>
-            <a:fillRect/>
-          </a:stretch>
-        </p:blipFill>
-        <p:spPr bwMode="auto">
-          <a:xfrm>
-            <a:off x="9642909" y="1390662"/>
-            <a:ext cx="2372995" cy="1732377"/>
-          </a:xfrm>
-          <a:prstGeom prst="rect">
-            <a:avLst/>
-          </a:prstGeom>
-          <a:noFill/>
-          <a:extLst>
-            <a:ext uri="{909E8E84-426E-40DD-AFC4-6F175D3DCCD1}">
-              <a14:hiddenFill xmlns:a14="http://schemas.microsoft.com/office/drawing/2010/main">
-                <a:solidFill>
-                  <a:srgbClr val="FFFFFF"/>
-                </a:solidFill>
-              </a14:hiddenFill>
-            </a:ext>
-          </a:extLst>
-        </p:spPr>
-      </p:pic>
-      <p:sp>
-        <p:nvSpPr>
-          <p:cNvPr id="15" name="TextBox 14">
-            <a:extLst>
-              <a:ext uri="{FF2B5EF4-FFF2-40B4-BE49-F238E27FC236}">
-                <a16:creationId xmlns:a16="http://schemas.microsoft.com/office/drawing/2014/main" id="{4AD21CB7-915B-B450-618A-FB2D83F87379}"/>
-              </a:ext>
-            </a:extLst>
-          </p:cNvPr>
-          <p:cNvSpPr txBox="1"/>
-          <p:nvPr/>
-        </p:nvSpPr>
-        <p:spPr>
-          <a:xfrm>
-            <a:off x="6544861" y="3783497"/>
-            <a:ext cx="5388393" cy="769441"/>
-          </a:xfrm>
-          <a:prstGeom prst="rect">
-            <a:avLst/>
-          </a:prstGeom>
-          <a:solidFill>
-            <a:schemeClr val="bg1">
-              <a:lumMod val="95000"/>
-            </a:schemeClr>
-          </a:solidFill>
-        </p:spPr>
-        <p:txBody>
-          <a:bodyPr wrap="square">
-            <a:spAutoFit/>
-          </a:bodyPr>
-          <a:lstStyle/>
-          <a:p>
-            <a:r>
-              <a:rPr lang="en-US" altLang="ko-KR" sz="1100" dirty="0">
-                <a:latin typeface="D2Coding" panose="020B0609020101020101" pitchFamily="49" charset="-127"/>
-                <a:ea typeface="D2Coding" panose="020B0609020101020101" pitchFamily="49" charset="-127"/>
-              </a:rPr>
-              <a:t>Time</a:t>
-            </a:r>
-            <a:r>
-              <a:rPr lang="ko-KR" altLang="en-US" sz="1100" dirty="0">
-                <a:latin typeface="D2Coding" panose="020B0609020101020101" pitchFamily="49" charset="-127"/>
-                <a:ea typeface="D2Coding" panose="020B0609020101020101" pitchFamily="49" charset="-127"/>
-              </a:rPr>
-              <a:t> </a:t>
-            </a:r>
-            <a:r>
-              <a:rPr lang="en-US" altLang="ko-KR" sz="1100" dirty="0">
-                <a:latin typeface="D2Coding" panose="020B0609020101020101" pitchFamily="49" charset="-127"/>
-                <a:ea typeface="D2Coding" panose="020B0609020101020101" pitchFamily="49" charset="-127"/>
-              </a:rPr>
-              <a:t>Steps : </a:t>
-            </a:r>
-          </a:p>
-          <a:p>
-            <a:pPr>
-              <a:buFont typeface="Arial" panose="020B0604020202020204" pitchFamily="34" charset="0"/>
-              <a:buChar char="•"/>
-            </a:pPr>
-            <a:r>
-              <a:rPr lang="ko-KR" altLang="en-US" sz="1100" dirty="0">
-                <a:latin typeface="D2Coding" panose="020B0609020101020101" pitchFamily="49" charset="-127"/>
-                <a:ea typeface="D2Coding" panose="020B0609020101020101" pitchFamily="49" charset="-127"/>
-              </a:rPr>
-              <a:t> 텍스트에서는 </a:t>
-            </a:r>
-            <a:r>
-              <a:rPr lang="en-US" altLang="ko-KR" sz="1100" dirty="0">
-                <a:latin typeface="D2Coding" panose="020B0609020101020101" pitchFamily="49" charset="-127"/>
-                <a:ea typeface="D2Coding" panose="020B0609020101020101" pitchFamily="49" charset="-127"/>
-              </a:rPr>
-              <a:t>"</a:t>
-            </a:r>
-            <a:r>
-              <a:rPr lang="ko-KR" altLang="en-US" sz="1100" dirty="0">
-                <a:latin typeface="D2Coding" panose="020B0609020101020101" pitchFamily="49" charset="-127"/>
-                <a:ea typeface="D2Coding" panose="020B0609020101020101" pitchFamily="49" charset="-127"/>
-              </a:rPr>
-              <a:t>문장 속 단어의 순서</a:t>
-            </a:r>
-            <a:r>
-              <a:rPr lang="en-US" altLang="ko-KR" sz="1100" dirty="0">
-                <a:latin typeface="D2Coding" panose="020B0609020101020101" pitchFamily="49" charset="-127"/>
-                <a:ea typeface="D2Coding" panose="020B0609020101020101" pitchFamily="49" charset="-127"/>
-              </a:rPr>
-              <a:t>(</a:t>
-            </a:r>
-            <a:r>
-              <a:rPr lang="ko-KR" altLang="en-US" sz="1100" dirty="0">
-                <a:latin typeface="D2Coding" panose="020B0609020101020101" pitchFamily="49" charset="-127"/>
-                <a:ea typeface="D2Coding" panose="020B0609020101020101" pitchFamily="49" charset="-127"/>
-              </a:rPr>
-              <a:t>몇 번째 단어인가</a:t>
-            </a:r>
-            <a:r>
-              <a:rPr lang="en-US" altLang="ko-KR" sz="1100" dirty="0">
-                <a:latin typeface="D2Coding" panose="020B0609020101020101" pitchFamily="49" charset="-127"/>
-                <a:ea typeface="D2Coding" panose="020B0609020101020101" pitchFamily="49" charset="-127"/>
-              </a:rPr>
-              <a:t>)"</a:t>
-            </a:r>
-            <a:endParaRPr lang="ko-KR" altLang="en-US" sz="1100" dirty="0">
-              <a:latin typeface="D2Coding" panose="020B0609020101020101" pitchFamily="49" charset="-127"/>
-              <a:ea typeface="D2Coding" panose="020B0609020101020101" pitchFamily="49" charset="-127"/>
-            </a:endParaRPr>
-          </a:p>
-          <a:p>
-            <a:pPr>
-              <a:buFont typeface="Arial" panose="020B0604020202020204" pitchFamily="34" charset="0"/>
-              <a:buChar char="•"/>
-            </a:pPr>
-            <a:r>
-              <a:rPr lang="ko-KR" altLang="en-US" sz="1100" dirty="0">
-                <a:latin typeface="D2Coding" panose="020B0609020101020101" pitchFamily="49" charset="-127"/>
-                <a:ea typeface="D2Coding" panose="020B0609020101020101" pitchFamily="49" charset="-127"/>
-              </a:rPr>
-              <a:t> 시계열 데이터</a:t>
-            </a:r>
-            <a:r>
-              <a:rPr lang="en-US" altLang="ko-KR" sz="1100" dirty="0">
-                <a:latin typeface="D2Coding" panose="020B0609020101020101" pitchFamily="49" charset="-127"/>
-                <a:ea typeface="D2Coding" panose="020B0609020101020101" pitchFamily="49" charset="-127"/>
-              </a:rPr>
-              <a:t>(</a:t>
-            </a:r>
-            <a:r>
-              <a:rPr lang="ko-KR" altLang="en-US" sz="1100" dirty="0">
-                <a:latin typeface="D2Coding" panose="020B0609020101020101" pitchFamily="49" charset="-127"/>
-                <a:ea typeface="D2Coding" panose="020B0609020101020101" pitchFamily="49" charset="-127"/>
-              </a:rPr>
-              <a:t>예</a:t>
-            </a:r>
-            <a:r>
-              <a:rPr lang="en-US" altLang="ko-KR" sz="1100" dirty="0">
-                <a:latin typeface="D2Coding" panose="020B0609020101020101" pitchFamily="49" charset="-127"/>
-                <a:ea typeface="D2Coding" panose="020B0609020101020101" pitchFamily="49" charset="-127"/>
-              </a:rPr>
-              <a:t>: </a:t>
-            </a:r>
-            <a:r>
-              <a:rPr lang="ko-KR" altLang="en-US" sz="1100" dirty="0">
-                <a:latin typeface="D2Coding" panose="020B0609020101020101" pitchFamily="49" charset="-127"/>
-                <a:ea typeface="D2Coding" panose="020B0609020101020101" pitchFamily="49" charset="-127"/>
-              </a:rPr>
-              <a:t>주가</a:t>
-            </a:r>
-            <a:r>
-              <a:rPr lang="en-US" altLang="ko-KR" sz="1100" dirty="0">
-                <a:latin typeface="D2Coding" panose="020B0609020101020101" pitchFamily="49" charset="-127"/>
-                <a:ea typeface="D2Coding" panose="020B0609020101020101" pitchFamily="49" charset="-127"/>
-              </a:rPr>
-              <a:t>)</a:t>
-            </a:r>
-            <a:r>
-              <a:rPr lang="ko-KR" altLang="en-US" sz="1100" dirty="0">
-                <a:latin typeface="D2Coding" panose="020B0609020101020101" pitchFamily="49" charset="-127"/>
-                <a:ea typeface="D2Coding" panose="020B0609020101020101" pitchFamily="49" charset="-127"/>
-              </a:rPr>
-              <a:t>에서는 </a:t>
-            </a:r>
-            <a:r>
-              <a:rPr lang="en-US" altLang="ko-KR" sz="1100" dirty="0">
-                <a:latin typeface="D2Coding" panose="020B0609020101020101" pitchFamily="49" charset="-127"/>
-                <a:ea typeface="D2Coding" panose="020B0609020101020101" pitchFamily="49" charset="-127"/>
-              </a:rPr>
-              <a:t>"</a:t>
-            </a:r>
-            <a:r>
-              <a:rPr lang="ko-KR" altLang="en-US" sz="1100" dirty="0">
-                <a:latin typeface="D2Coding" panose="020B0609020101020101" pitchFamily="49" charset="-127"/>
-                <a:ea typeface="D2Coding" panose="020B0609020101020101" pitchFamily="49" charset="-127"/>
-              </a:rPr>
-              <a:t>날짜의 순서</a:t>
-            </a:r>
-            <a:r>
-              <a:rPr lang="en-US" altLang="ko-KR" sz="1100" dirty="0">
-                <a:latin typeface="D2Coding" panose="020B0609020101020101" pitchFamily="49" charset="-127"/>
-                <a:ea typeface="D2Coding" panose="020B0609020101020101" pitchFamily="49" charset="-127"/>
-              </a:rPr>
-              <a:t>(1</a:t>
-            </a:r>
-            <a:r>
-              <a:rPr lang="ko-KR" altLang="en-US" sz="1100" dirty="0">
-                <a:latin typeface="D2Coding" panose="020B0609020101020101" pitchFamily="49" charset="-127"/>
-                <a:ea typeface="D2Coding" panose="020B0609020101020101" pitchFamily="49" charset="-127"/>
-              </a:rPr>
-              <a:t>일 차</a:t>
-            </a:r>
-            <a:r>
-              <a:rPr lang="en-US" altLang="ko-KR" sz="1100" dirty="0">
-                <a:latin typeface="D2Coding" panose="020B0609020101020101" pitchFamily="49" charset="-127"/>
-                <a:ea typeface="D2Coding" panose="020B0609020101020101" pitchFamily="49" charset="-127"/>
-              </a:rPr>
-              <a:t>, 2</a:t>
-            </a:r>
-            <a:r>
-              <a:rPr lang="ko-KR" altLang="en-US" sz="1100" dirty="0">
-                <a:latin typeface="D2Coding" panose="020B0609020101020101" pitchFamily="49" charset="-127"/>
-                <a:ea typeface="D2Coding" panose="020B0609020101020101" pitchFamily="49" charset="-127"/>
-              </a:rPr>
-              <a:t>일 차</a:t>
-            </a:r>
-            <a:r>
-              <a:rPr lang="en-US" altLang="ko-KR" sz="1100" dirty="0">
-                <a:latin typeface="D2Coding" panose="020B0609020101020101" pitchFamily="49" charset="-127"/>
-                <a:ea typeface="D2Coding" panose="020B0609020101020101" pitchFamily="49" charset="-127"/>
-              </a:rPr>
-              <a:t>, 3</a:t>
-            </a:r>
-            <a:r>
-              <a:rPr lang="ko-KR" altLang="en-US" sz="1100" dirty="0">
-                <a:latin typeface="D2Coding" panose="020B0609020101020101" pitchFamily="49" charset="-127"/>
-                <a:ea typeface="D2Coding" panose="020B0609020101020101" pitchFamily="49" charset="-127"/>
-              </a:rPr>
-              <a:t>일 차</a:t>
-            </a:r>
-            <a:r>
-              <a:rPr lang="en-US" altLang="ko-KR" sz="1100" dirty="0">
-                <a:latin typeface="D2Coding" panose="020B0609020101020101" pitchFamily="49" charset="-127"/>
-                <a:ea typeface="D2Coding" panose="020B0609020101020101" pitchFamily="49" charset="-127"/>
-              </a:rPr>
-              <a:t>...)"</a:t>
-            </a:r>
-            <a:endParaRPr lang="ko-KR" altLang="en-US" sz="1100" dirty="0">
-              <a:latin typeface="D2Coding" panose="020B0609020101020101" pitchFamily="49" charset="-127"/>
-              <a:ea typeface="D2Coding" panose="020B0609020101020101" pitchFamily="49" charset="-127"/>
-            </a:endParaRPr>
-          </a:p>
-          <a:p>
-            <a:pPr>
-              <a:buFont typeface="Arial" panose="020B0604020202020204" pitchFamily="34" charset="0"/>
-              <a:buChar char="•"/>
-            </a:pPr>
-            <a:r>
-              <a:rPr lang="ko-KR" altLang="en-US" sz="1100" dirty="0">
-                <a:latin typeface="D2Coding" panose="020B0609020101020101" pitchFamily="49" charset="-127"/>
-                <a:ea typeface="D2Coding" panose="020B0609020101020101" pitchFamily="49" charset="-127"/>
-              </a:rPr>
-              <a:t> 음성에서는 </a:t>
-            </a:r>
-            <a:r>
-              <a:rPr lang="en-US" altLang="ko-KR" sz="1100" dirty="0">
-                <a:latin typeface="D2Coding" panose="020B0609020101020101" pitchFamily="49" charset="-127"/>
-                <a:ea typeface="D2Coding" panose="020B0609020101020101" pitchFamily="49" charset="-127"/>
-              </a:rPr>
-              <a:t>"</a:t>
-            </a:r>
-            <a:r>
-              <a:rPr lang="ko-KR" altLang="en-US" sz="1100" dirty="0">
-                <a:latin typeface="D2Coding" panose="020B0609020101020101" pitchFamily="49" charset="-127"/>
-                <a:ea typeface="D2Coding" panose="020B0609020101020101" pitchFamily="49" charset="-127"/>
-              </a:rPr>
-              <a:t>오디오 신호의 시간 순서</a:t>
-            </a:r>
-            <a:r>
-              <a:rPr lang="en-US" altLang="ko-KR" sz="1100" dirty="0">
-                <a:latin typeface="D2Coding" panose="020B0609020101020101" pitchFamily="49" charset="-127"/>
-                <a:ea typeface="D2Coding" panose="020B0609020101020101" pitchFamily="49" charset="-127"/>
-              </a:rPr>
-              <a:t>(0.1</a:t>
-            </a:r>
-            <a:r>
-              <a:rPr lang="ko-KR" altLang="en-US" sz="1100" dirty="0">
-                <a:latin typeface="D2Coding" panose="020B0609020101020101" pitchFamily="49" charset="-127"/>
-                <a:ea typeface="D2Coding" panose="020B0609020101020101" pitchFamily="49" charset="-127"/>
-              </a:rPr>
-              <a:t>초</a:t>
-            </a:r>
-            <a:r>
-              <a:rPr lang="en-US" altLang="ko-KR" sz="1100" dirty="0">
-                <a:latin typeface="D2Coding" panose="020B0609020101020101" pitchFamily="49" charset="-127"/>
-                <a:ea typeface="D2Coding" panose="020B0609020101020101" pitchFamily="49" charset="-127"/>
-              </a:rPr>
-              <a:t>, 0.2</a:t>
-            </a:r>
-            <a:r>
-              <a:rPr lang="ko-KR" altLang="en-US" sz="1100" dirty="0">
-                <a:latin typeface="D2Coding" panose="020B0609020101020101" pitchFamily="49" charset="-127"/>
-                <a:ea typeface="D2Coding" panose="020B0609020101020101" pitchFamily="49" charset="-127"/>
-              </a:rPr>
-              <a:t>초</a:t>
-            </a:r>
-            <a:r>
-              <a:rPr lang="en-US" altLang="ko-KR" sz="1100" dirty="0">
-                <a:latin typeface="D2Coding" panose="020B0609020101020101" pitchFamily="49" charset="-127"/>
-                <a:ea typeface="D2Coding" panose="020B0609020101020101" pitchFamily="49" charset="-127"/>
-              </a:rPr>
-              <a:t>, 0.3</a:t>
-            </a:r>
-            <a:r>
-              <a:rPr lang="ko-KR" altLang="en-US" sz="1100" dirty="0">
-                <a:latin typeface="D2Coding" panose="020B0609020101020101" pitchFamily="49" charset="-127"/>
-                <a:ea typeface="D2Coding" panose="020B0609020101020101" pitchFamily="49" charset="-127"/>
-              </a:rPr>
-              <a:t>초</a:t>
-            </a:r>
-            <a:r>
-              <a:rPr lang="en-US" altLang="ko-KR" sz="1100" dirty="0">
-                <a:latin typeface="D2Coding" panose="020B0609020101020101" pitchFamily="49" charset="-127"/>
-                <a:ea typeface="D2Coding" panose="020B0609020101020101" pitchFamily="49" charset="-127"/>
-              </a:rPr>
-              <a:t>...)"</a:t>
-            </a:r>
-            <a:endParaRPr lang="ko-KR" altLang="en-US" sz="1100" dirty="0">
-              <a:latin typeface="D2Coding" panose="020B0609020101020101" pitchFamily="49" charset="-127"/>
-              <a:ea typeface="D2Coding" panose="020B0609020101020101" pitchFamily="49" charset="-127"/>
-            </a:endParaRPr>
-          </a:p>
-        </p:txBody>
-      </p:sp>
-    </p:spTree>
-    <p:extLst>
-      <p:ext uri="{BB962C8B-B14F-4D97-AF65-F5344CB8AC3E}">
-        <p14:creationId xmlns:p14="http://schemas.microsoft.com/office/powerpoint/2010/main" val="2171070356"/>
       </p:ext>
     </p:extLst>
   </p:cSld>

--- a/RNN/RNN.pptx
+++ b/RNN/RNN.pptx
@@ -5,10 +5,10 @@
     <p:sldMasterId id="2147483660" r:id="rId1"/>
   </p:sldMasterIdLst>
   <p:notesMasterIdLst>
-    <p:notesMasterId r:id="rId20"/>
+    <p:notesMasterId r:id="rId21"/>
   </p:notesMasterIdLst>
   <p:handoutMasterIdLst>
-    <p:handoutMasterId r:id="rId21"/>
+    <p:handoutMasterId r:id="rId22"/>
   </p:handoutMasterIdLst>
   <p:sldIdLst>
     <p:sldId id="256" r:id="rId2"/>
@@ -27,8 +27,9 @@
     <p:sldId id="1137" r:id="rId15"/>
     <p:sldId id="1138" r:id="rId16"/>
     <p:sldId id="1129" r:id="rId17"/>
-    <p:sldId id="978" r:id="rId18"/>
-    <p:sldId id="1121" r:id="rId19"/>
+    <p:sldId id="1139" r:id="rId18"/>
+    <p:sldId id="978" r:id="rId19"/>
+    <p:sldId id="1121" r:id="rId20"/>
   </p:sldIdLst>
   <p:sldSz cx="12192000" cy="6858000"/>
   <p:notesSz cx="6858000" cy="9144000"/>
@@ -152,6 +153,7 @@
             <p14:sldId id="1137"/>
             <p14:sldId id="1138"/>
             <p14:sldId id="1129"/>
+            <p14:sldId id="1139"/>
             <p14:sldId id="978"/>
             <p14:sldId id="1121"/>
           </p14:sldIdLst>
@@ -14134,6 +14136,447 @@
                 <a:ea typeface="D2Coding" panose="020B0609020101020101" pitchFamily="49" charset="-127"/>
                 <a:cs typeface="Segoe UI Light" panose="020B0502040204020203" pitchFamily="34" charset="0"/>
               </a:rPr>
+              <a:t>Deep</a:t>
+            </a:r>
+            <a:r>
+              <a:rPr lang="ko-KR" altLang="en-US" sz="2800" cap="none" dirty="0">
+                <a:solidFill>
+                  <a:schemeClr val="bg2">
+                    <a:lumMod val="25000"/>
+                  </a:schemeClr>
+                </a:solidFill>
+                <a:latin typeface="D2Coding" panose="020B0609020101020101" pitchFamily="49" charset="-127"/>
+                <a:ea typeface="D2Coding" panose="020B0609020101020101" pitchFamily="49" charset="-127"/>
+                <a:cs typeface="Segoe UI Light" panose="020B0502040204020203" pitchFamily="34" charset="0"/>
+              </a:rPr>
+              <a:t> </a:t>
+            </a:r>
+            <a:r>
+              <a:rPr lang="en-US" altLang="ko-KR" sz="2800" cap="none" dirty="0">
+                <a:solidFill>
+                  <a:schemeClr val="bg2">
+                    <a:lumMod val="25000"/>
+                  </a:schemeClr>
+                </a:solidFill>
+                <a:latin typeface="D2Coding" panose="020B0609020101020101" pitchFamily="49" charset="-127"/>
+                <a:ea typeface="D2Coding" panose="020B0609020101020101" pitchFamily="49" charset="-127"/>
+                <a:cs typeface="Segoe UI Light" panose="020B0502040204020203" pitchFamily="34" charset="0"/>
+              </a:rPr>
+              <a:t>Recurrent Neural Network (RNN)</a:t>
+            </a:r>
+            <a:endParaRPr lang="ko-KR" altLang="en-US" sz="2800" cap="none" dirty="0">
+              <a:solidFill>
+                <a:schemeClr val="bg2">
+                  <a:lumMod val="25000"/>
+                </a:schemeClr>
+              </a:solidFill>
+              <a:latin typeface="D2Coding" panose="020B0609020101020101" pitchFamily="49" charset="-127"/>
+              <a:ea typeface="D2Coding" panose="020B0609020101020101" pitchFamily="49" charset="-127"/>
+              <a:cs typeface="Segoe UI Light" panose="020B0502040204020203" pitchFamily="34" charset="0"/>
+            </a:endParaRPr>
+          </a:p>
+        </p:txBody>
+      </p:sp>
+      <p:pic>
+        <p:nvPicPr>
+          <p:cNvPr id="5" name="그림 4">
+            <a:extLst>
+              <a:ext uri="{FF2B5EF4-FFF2-40B4-BE49-F238E27FC236}">
+                <a16:creationId xmlns:a16="http://schemas.microsoft.com/office/drawing/2014/main" id="{FB46B54B-58F6-E08B-924D-D269DB922BB6}"/>
+              </a:ext>
+            </a:extLst>
+          </p:cNvPr>
+          <p:cNvPicPr>
+            <a:picLocks noChangeAspect="1"/>
+          </p:cNvPicPr>
+          <p:nvPr/>
+        </p:nvPicPr>
+        <p:blipFill>
+          <a:blip r:embed="rId2"/>
+          <a:stretch>
+            <a:fillRect/>
+          </a:stretch>
+        </p:blipFill>
+        <p:spPr>
+          <a:xfrm>
+            <a:off x="658459" y="1446542"/>
+            <a:ext cx="4922947" cy="2834886"/>
+          </a:xfrm>
+          <a:prstGeom prst="rect">
+            <a:avLst/>
+          </a:prstGeom>
+        </p:spPr>
+      </p:pic>
+      <p:sp>
+        <p:nvSpPr>
+          <p:cNvPr id="7" name="TextBox 6">
+            <a:extLst>
+              <a:ext uri="{FF2B5EF4-FFF2-40B4-BE49-F238E27FC236}">
+                <a16:creationId xmlns:a16="http://schemas.microsoft.com/office/drawing/2014/main" id="{22D46B0D-9D00-4C42-8ED7-31125215AF15}"/>
+              </a:ext>
+            </a:extLst>
+          </p:cNvPr>
+          <p:cNvSpPr txBox="1"/>
+          <p:nvPr/>
+        </p:nvSpPr>
+        <p:spPr>
+          <a:xfrm>
+            <a:off x="658459" y="4419262"/>
+            <a:ext cx="7711440" cy="1901161"/>
+          </a:xfrm>
+          <a:prstGeom prst="rect">
+            <a:avLst/>
+          </a:prstGeom>
+          <a:solidFill>
+            <a:srgbClr val="76E3FF"/>
+          </a:solidFill>
+        </p:spPr>
+        <p:txBody>
+          <a:bodyPr wrap="square">
+            <a:spAutoFit/>
+          </a:bodyPr>
+          <a:lstStyle/>
+          <a:p>
+            <a:pPr>
+              <a:lnSpc>
+                <a:spcPct val="150000"/>
+              </a:lnSpc>
+            </a:pPr>
+            <a:r>
+              <a:rPr lang="en-US" altLang="ko-KR" sz="1600" dirty="0">
+                <a:latin typeface="D2Coding" panose="020B0609020101020101" pitchFamily="49" charset="-127"/>
+                <a:ea typeface="D2Coding" panose="020B0609020101020101" pitchFamily="49" charset="-127"/>
+              </a:rPr>
+              <a:t>model = </a:t>
+            </a:r>
+            <a:r>
+              <a:rPr lang="en-US" altLang="ko-KR" sz="1600" dirty="0" err="1">
+                <a:latin typeface="D2Coding" panose="020B0609020101020101" pitchFamily="49" charset="-127"/>
+                <a:ea typeface="D2Coding" panose="020B0609020101020101" pitchFamily="49" charset="-127"/>
+              </a:rPr>
+              <a:t>keras.models.Sequential</a:t>
+            </a:r>
+            <a:r>
+              <a:rPr lang="en-US" altLang="ko-KR" sz="1600" dirty="0">
+                <a:latin typeface="D2Coding" panose="020B0609020101020101" pitchFamily="49" charset="-127"/>
+                <a:ea typeface="D2Coding" panose="020B0609020101020101" pitchFamily="49" charset="-127"/>
+              </a:rPr>
+              <a:t>([</a:t>
+            </a:r>
+          </a:p>
+          <a:p>
+            <a:pPr>
+              <a:lnSpc>
+                <a:spcPct val="150000"/>
+              </a:lnSpc>
+            </a:pPr>
+            <a:r>
+              <a:rPr lang="en-US" altLang="ko-KR" sz="1600" dirty="0" err="1">
+                <a:latin typeface="D2Coding" panose="020B0609020101020101" pitchFamily="49" charset="-127"/>
+                <a:ea typeface="D2Coding" panose="020B0609020101020101" pitchFamily="49" charset="-127"/>
+              </a:rPr>
+              <a:t>keras.layers.SimpleRNN</a:t>
+            </a:r>
+            <a:r>
+              <a:rPr lang="en-US" altLang="ko-KR" sz="1600" dirty="0">
+                <a:latin typeface="D2Coding" panose="020B0609020101020101" pitchFamily="49" charset="-127"/>
+                <a:ea typeface="D2Coding" panose="020B0609020101020101" pitchFamily="49" charset="-127"/>
+              </a:rPr>
+              <a:t>(20, </a:t>
+            </a:r>
+            <a:r>
+              <a:rPr lang="en-US" altLang="ko-KR" sz="1600" dirty="0" err="1">
+                <a:latin typeface="D2Coding" panose="020B0609020101020101" pitchFamily="49" charset="-127"/>
+                <a:ea typeface="D2Coding" panose="020B0609020101020101" pitchFamily="49" charset="-127"/>
+              </a:rPr>
+              <a:t>return_sequences</a:t>
+            </a:r>
+            <a:r>
+              <a:rPr lang="en-US" altLang="ko-KR" sz="1600" dirty="0">
+                <a:latin typeface="D2Coding" panose="020B0609020101020101" pitchFamily="49" charset="-127"/>
+                <a:ea typeface="D2Coding" panose="020B0609020101020101" pitchFamily="49" charset="-127"/>
+              </a:rPr>
+              <a:t>=True, </a:t>
+            </a:r>
+            <a:r>
+              <a:rPr lang="en-US" altLang="ko-KR" sz="1600" dirty="0" err="1">
+                <a:latin typeface="D2Coding" panose="020B0609020101020101" pitchFamily="49" charset="-127"/>
+                <a:ea typeface="D2Coding" panose="020B0609020101020101" pitchFamily="49" charset="-127"/>
+              </a:rPr>
+              <a:t>input_shape</a:t>
+            </a:r>
+            <a:r>
+              <a:rPr lang="en-US" altLang="ko-KR" sz="1600" dirty="0">
+                <a:latin typeface="D2Coding" panose="020B0609020101020101" pitchFamily="49" charset="-127"/>
+                <a:ea typeface="D2Coding" panose="020B0609020101020101" pitchFamily="49" charset="-127"/>
+              </a:rPr>
+              <a:t>=[None, 1]),</a:t>
+            </a:r>
+          </a:p>
+          <a:p>
+            <a:pPr>
+              <a:lnSpc>
+                <a:spcPct val="150000"/>
+              </a:lnSpc>
+            </a:pPr>
+            <a:r>
+              <a:rPr lang="en-US" altLang="ko-KR" sz="1600" dirty="0" err="1">
+                <a:latin typeface="D2Coding" panose="020B0609020101020101" pitchFamily="49" charset="-127"/>
+                <a:ea typeface="D2Coding" panose="020B0609020101020101" pitchFamily="49" charset="-127"/>
+              </a:rPr>
+              <a:t>keras.layers.SimpleRNN</a:t>
+            </a:r>
+            <a:r>
+              <a:rPr lang="en-US" altLang="ko-KR" sz="1600" dirty="0">
+                <a:latin typeface="D2Coding" panose="020B0609020101020101" pitchFamily="49" charset="-127"/>
+                <a:ea typeface="D2Coding" panose="020B0609020101020101" pitchFamily="49" charset="-127"/>
+              </a:rPr>
+              <a:t>(20, </a:t>
+            </a:r>
+            <a:r>
+              <a:rPr lang="en-US" altLang="ko-KR" sz="1600" dirty="0" err="1">
+                <a:latin typeface="D2Coding" panose="020B0609020101020101" pitchFamily="49" charset="-127"/>
+                <a:ea typeface="D2Coding" panose="020B0609020101020101" pitchFamily="49" charset="-127"/>
+              </a:rPr>
+              <a:t>return_sequences</a:t>
+            </a:r>
+            <a:r>
+              <a:rPr lang="en-US" altLang="ko-KR" sz="1600" dirty="0">
+                <a:latin typeface="D2Coding" panose="020B0609020101020101" pitchFamily="49" charset="-127"/>
+                <a:ea typeface="D2Coding" panose="020B0609020101020101" pitchFamily="49" charset="-127"/>
+              </a:rPr>
+              <a:t>=True),</a:t>
+            </a:r>
+          </a:p>
+          <a:p>
+            <a:pPr>
+              <a:lnSpc>
+                <a:spcPct val="150000"/>
+              </a:lnSpc>
+            </a:pPr>
+            <a:r>
+              <a:rPr lang="en-US" altLang="ko-KR" sz="1600" dirty="0" err="1">
+                <a:latin typeface="D2Coding" panose="020B0609020101020101" pitchFamily="49" charset="-127"/>
+                <a:ea typeface="D2Coding" panose="020B0609020101020101" pitchFamily="49" charset="-127"/>
+              </a:rPr>
+              <a:t>keras.layers.SimpleRNN</a:t>
+            </a:r>
+            <a:r>
+              <a:rPr lang="en-US" altLang="ko-KR" sz="1600" dirty="0">
+                <a:latin typeface="D2Coding" panose="020B0609020101020101" pitchFamily="49" charset="-127"/>
+                <a:ea typeface="D2Coding" panose="020B0609020101020101" pitchFamily="49" charset="-127"/>
+              </a:rPr>
+              <a:t>(1)</a:t>
+            </a:r>
+          </a:p>
+          <a:p>
+            <a:pPr>
+              <a:lnSpc>
+                <a:spcPct val="150000"/>
+              </a:lnSpc>
+            </a:pPr>
+            <a:r>
+              <a:rPr lang="en-US" altLang="ko-KR" sz="1600" dirty="0">
+                <a:latin typeface="D2Coding" panose="020B0609020101020101" pitchFamily="49" charset="-127"/>
+                <a:ea typeface="D2Coding" panose="020B0609020101020101" pitchFamily="49" charset="-127"/>
+              </a:rPr>
+              <a:t>])</a:t>
+            </a:r>
+            <a:endParaRPr lang="ko-KR" altLang="en-US" sz="1600" dirty="0">
+              <a:latin typeface="D2Coding" panose="020B0609020101020101" pitchFamily="49" charset="-127"/>
+              <a:ea typeface="D2Coding" panose="020B0609020101020101" pitchFamily="49" charset="-127"/>
+            </a:endParaRPr>
+          </a:p>
+        </p:txBody>
+      </p:sp>
+      <p:sp>
+        <p:nvSpPr>
+          <p:cNvPr id="8" name="TextBox 7">
+            <a:extLst>
+              <a:ext uri="{FF2B5EF4-FFF2-40B4-BE49-F238E27FC236}">
+                <a16:creationId xmlns:a16="http://schemas.microsoft.com/office/drawing/2014/main" id="{C6F2EA05-A1C1-C3D6-A27F-B8B458C99403}"/>
+              </a:ext>
+            </a:extLst>
+          </p:cNvPr>
+          <p:cNvSpPr txBox="1"/>
+          <p:nvPr/>
+        </p:nvSpPr>
+        <p:spPr>
+          <a:xfrm>
+            <a:off x="7112116" y="2291584"/>
+            <a:ext cx="4155440" cy="506742"/>
+          </a:xfrm>
+          <a:prstGeom prst="rect">
+            <a:avLst/>
+          </a:prstGeom>
+          <a:noFill/>
+        </p:spPr>
+        <p:txBody>
+          <a:bodyPr wrap="square" rtlCol="0">
+            <a:spAutoFit/>
+          </a:bodyPr>
+          <a:lstStyle/>
+          <a:p>
+            <a:pPr>
+              <a:lnSpc>
+                <a:spcPct val="150000"/>
+              </a:lnSpc>
+            </a:pPr>
+            <a:r>
+              <a:rPr lang="ko-KR" altLang="en-US" sz="2000" dirty="0">
+                <a:latin typeface="D2Coding" panose="020B0609020101020101" pitchFamily="49" charset="-127"/>
+                <a:ea typeface="D2Coding" panose="020B0609020101020101" pitchFamily="49" charset="-127"/>
+              </a:rPr>
+              <a:t>은닉층은 </a:t>
+            </a:r>
+            <a:r>
+              <a:rPr lang="en-US" altLang="ko-KR" sz="2000" dirty="0">
+                <a:latin typeface="D2Coding" panose="020B0609020101020101" pitchFamily="49" charset="-127"/>
+                <a:ea typeface="D2Coding" panose="020B0609020101020101" pitchFamily="49" charset="-127"/>
+              </a:rPr>
+              <a:t>3</a:t>
+            </a:r>
+            <a:r>
+              <a:rPr lang="ko-KR" altLang="en-US" sz="2000" dirty="0">
+                <a:latin typeface="D2Coding" panose="020B0609020101020101" pitchFamily="49" charset="-127"/>
+                <a:ea typeface="D2Coding" panose="020B0609020101020101" pitchFamily="49" charset="-127"/>
+              </a:rPr>
+              <a:t>개</a:t>
+            </a:r>
+          </a:p>
+        </p:txBody>
+      </p:sp>
+    </p:spTree>
+    <p:extLst>
+      <p:ext uri="{BB962C8B-B14F-4D97-AF65-F5344CB8AC3E}">
+        <p14:creationId xmlns:p14="http://schemas.microsoft.com/office/powerpoint/2010/main" val="652204200"/>
+      </p:ext>
+    </p:extLst>
+  </p:cSld>
+  <p:clrMapOvr>
+    <a:masterClrMapping/>
+  </p:clrMapOvr>
+</p:sld>
+</file>
+
+<file path=ppt/slides/slide17.xml><?xml version="1.0" encoding="utf-8"?>
+<p:sld xmlns:a="http://schemas.openxmlformats.org/drawingml/2006/main" xmlns:r="http://schemas.openxmlformats.org/officeDocument/2006/relationships" xmlns:p="http://schemas.openxmlformats.org/presentationml/2006/main">
+  <p:cSld>
+    <p:spTree>
+      <p:nvGrpSpPr>
+        <p:cNvPr id="1" name="">
+          <a:extLst>
+            <a:ext uri="{FF2B5EF4-FFF2-40B4-BE49-F238E27FC236}">
+              <a16:creationId xmlns:a16="http://schemas.microsoft.com/office/drawing/2014/main" id="{FE9E28F8-30D6-EE0C-AD4D-3720D804185A}"/>
+            </a:ext>
+          </a:extLst>
+        </p:cNvPr>
+        <p:cNvGrpSpPr/>
+        <p:nvPr/>
+      </p:nvGrpSpPr>
+      <p:grpSpPr>
+        <a:xfrm>
+          <a:off x="0" y="0"/>
+          <a:ext cx="0" cy="0"/>
+          <a:chOff x="0" y="0"/>
+          <a:chExt cx="0" cy="0"/>
+        </a:xfrm>
+      </p:grpSpPr>
+      <p:sp>
+        <p:nvSpPr>
+          <p:cNvPr id="4" name="슬라이드 번호 개체 틀 3">
+            <a:extLst>
+              <a:ext uri="{FF2B5EF4-FFF2-40B4-BE49-F238E27FC236}">
+                <a16:creationId xmlns:a16="http://schemas.microsoft.com/office/drawing/2014/main" id="{ADB3AF37-E42F-565B-46B9-6B7245CE7DE5}"/>
+              </a:ext>
+            </a:extLst>
+          </p:cNvPr>
+          <p:cNvSpPr>
+            <a:spLocks noGrp="1"/>
+          </p:cNvSpPr>
+          <p:nvPr>
+            <p:ph type="sldNum" sz="quarter" idx="12"/>
+          </p:nvPr>
+        </p:nvSpPr>
+        <p:spPr>
+          <a:xfrm>
+            <a:off x="10514011" y="6036261"/>
+            <a:ext cx="753545" cy="365125"/>
+          </a:xfrm>
+        </p:spPr>
+        <p:txBody>
+          <a:bodyPr/>
+          <a:lstStyle/>
+          <a:p>
+            <a:fld id="{D57F1E4F-1CFF-5643-939E-217C01CDF565}" type="slidenum">
+              <a:rPr lang="en-US" smtClean="0"/>
+              <a:pPr/>
+              <a:t>17</a:t>
+            </a:fld>
+            <a:endParaRPr lang="en-US" dirty="0"/>
+          </a:p>
+        </p:txBody>
+      </p:sp>
+      <p:sp>
+        <p:nvSpPr>
+          <p:cNvPr id="3" name="제목 1">
+            <a:extLst>
+              <a:ext uri="{FF2B5EF4-FFF2-40B4-BE49-F238E27FC236}">
+                <a16:creationId xmlns:a16="http://schemas.microsoft.com/office/drawing/2014/main" id="{B028BB7D-FB7D-3D9C-7C18-B5CA95794DFE}"/>
+              </a:ext>
+            </a:extLst>
+          </p:cNvPr>
+          <p:cNvSpPr txBox="1">
+            <a:spLocks/>
+          </p:cNvSpPr>
+          <p:nvPr/>
+        </p:nvSpPr>
+        <p:spPr>
+          <a:xfrm>
+            <a:off x="475645" y="481983"/>
+            <a:ext cx="10353762" cy="766439"/>
+          </a:xfrm>
+          <a:prstGeom prst="rect">
+            <a:avLst/>
+          </a:prstGeom>
+        </p:spPr>
+        <p:txBody>
+          <a:bodyPr vert="horz" lIns="91440" tIns="45720" rIns="91440" bIns="45720" rtlCol="0" anchor="ctr">
+            <a:normAutofit/>
+          </a:bodyPr>
+          <a:lstStyle>
+            <a:lvl1pPr algn="ctr" defTabSz="914400" rtl="0" eaLnBrk="1" latinLnBrk="1" hangingPunct="1">
+              <a:lnSpc>
+                <a:spcPct val="90000"/>
+              </a:lnSpc>
+              <a:spcBef>
+                <a:spcPct val="0"/>
+              </a:spcBef>
+              <a:buNone/>
+              <a:defRPr sz="3200" kern="1200" cap="all" baseline="0">
+                <a:solidFill>
+                  <a:schemeClr val="tx1"/>
+                </a:solidFill>
+                <a:effectLst/>
+                <a:latin typeface="Batang" panose="02030600000101010101" pitchFamily="18" charset="-127"/>
+                <a:ea typeface="Batang" panose="02030600000101010101" pitchFamily="18" charset="-127"/>
+                <a:cs typeface="+mj-cs"/>
+              </a:defRPr>
+            </a:lvl1pPr>
+          </a:lstStyle>
+          <a:p>
+            <a:pPr algn="l"/>
+            <a:r>
+              <a:rPr lang="en-US" altLang="ko-KR" sz="2800" cap="none" dirty="0">
+                <a:solidFill>
+                  <a:schemeClr val="bg2">
+                    <a:lumMod val="25000"/>
+                  </a:schemeClr>
+                </a:solidFill>
+                <a:latin typeface="D2Coding" panose="020B0609020101020101" pitchFamily="49" charset="-127"/>
+                <a:ea typeface="D2Coding" panose="020B0609020101020101" pitchFamily="49" charset="-127"/>
+                <a:cs typeface="Segoe UI Light" panose="020B0502040204020203" pitchFamily="34" charset="0"/>
+              </a:rPr>
               <a:t>Recurrent Neural Network (RNN)</a:t>
             </a:r>
             <a:endParaRPr lang="ko-KR" altLang="en-US" sz="2800" cap="none" dirty="0">
@@ -14154,7 +14597,7 @@
           <p:cNvPr id="1026" name="Picture 2">
             <a:extLst>
               <a:ext uri="{FF2B5EF4-FFF2-40B4-BE49-F238E27FC236}">
-                <a16:creationId xmlns:a16="http://schemas.microsoft.com/office/drawing/2014/main" id="{CD59038B-7A7C-818F-9D36-304EC0E04302}"/>
+                <a16:creationId xmlns:a16="http://schemas.microsoft.com/office/drawing/2014/main" id="{339970A5-A681-2B27-3205-D7A4C775AA70}"/>
               </a:ext>
             </a:extLst>
           </p:cNvPr>
@@ -14208,7 +14651,7 @@
     </p:spTree>
     <p:extLst>
       <p:ext uri="{BB962C8B-B14F-4D97-AF65-F5344CB8AC3E}">
-        <p14:creationId xmlns:p14="http://schemas.microsoft.com/office/powerpoint/2010/main" val="652204200"/>
+        <p14:creationId xmlns:p14="http://schemas.microsoft.com/office/powerpoint/2010/main" val="2857055801"/>
       </p:ext>
     </p:extLst>
   </p:cSld>
@@ -14218,7 +14661,7 @@
 </p:sld>
 </file>
 
-<file path=ppt/slides/slide17.xml><?xml version="1.0" encoding="utf-8"?>
+<file path=ppt/slides/slide18.xml><?xml version="1.0" encoding="utf-8"?>
 <p:sld xmlns:a="http://schemas.openxmlformats.org/drawingml/2006/main" xmlns:r="http://schemas.openxmlformats.org/officeDocument/2006/relationships" xmlns:p="http://schemas.openxmlformats.org/presentationml/2006/main">
   <p:cSld>
     <p:spTree>
@@ -14270,7 +14713,7 @@
             <a:fld id="{D57F1E4F-1CFF-5643-939E-217C01CDF565}" type="slidenum">
               <a:rPr lang="en-US" smtClean="0"/>
               <a:pPr/>
-              <a:t>17</a:t>
+              <a:t>18</a:t>
             </a:fld>
             <a:endParaRPr lang="en-US" dirty="0"/>
           </a:p>
@@ -14420,7 +14863,7 @@
 </p:sld>
 </file>
 
-<file path=ppt/slides/slide18.xml><?xml version="1.0" encoding="utf-8"?>
+<file path=ppt/slides/slide19.xml><?xml version="1.0" encoding="utf-8"?>
 <p:sld xmlns:a="http://schemas.openxmlformats.org/drawingml/2006/main" xmlns:r="http://schemas.openxmlformats.org/officeDocument/2006/relationships" xmlns:p="http://schemas.openxmlformats.org/presentationml/2006/main">
   <p:cSld>
     <p:spTree>
@@ -14472,7 +14915,7 @@
             <a:fld id="{D57F1E4F-1CFF-5643-939E-217C01CDF565}" type="slidenum">
               <a:rPr lang="en-US" smtClean="0"/>
               <a:pPr/>
-              <a:t>18</a:t>
+              <a:t>19</a:t>
             </a:fld>
             <a:endParaRPr lang="en-US" dirty="0"/>
           </a:p>
